--- a/output/wordlabs-un-prefix-3day.pptx
+++ b/output/wordlabs-un-prefix-3day.pptx
@@ -6040,7 +6040,7 @@
                 <a:ea typeface="Calibri" pitchFamily="34" charset="-122"/>
                 <a:cs typeface="Calibri" pitchFamily="34" charset="-120"/>
               </a:rPr>
-              <a:t>It was </a:t>
+              <a:t>The teacher asked us to </a:t>
             </a:r>
             <a:pPr algn="l" indent="0" marL="0">
               <a:buNone/>
@@ -6057,7 +6057,7 @@
                 <a:ea typeface="Calibri" pitchFamily="34" charset="-122"/>
                 <a:cs typeface="Calibri" pitchFamily="34" charset="-120"/>
               </a:rPr>
-              <a:t>unkind</a:t>
+              <a:t>unlock</a:t>
             </a:r>
             <a:pPr algn="l" indent="0" marL="0">
               <a:buNone/>
@@ -6071,7 +6071,7 @@
                 <a:ea typeface="Calibri" pitchFamily="34" charset="-122"/>
                 <a:cs typeface="Calibri" pitchFamily="34" charset="-120"/>
               </a:rPr>
-              <a:t> to leave her out, and everyone felt </a:t>
+              <a:t> the puzzle and find the </a:t>
             </a:r>
             <a:pPr algn="l" indent="0" marL="0">
               <a:buNone/>
@@ -6088,7 +6088,7 @@
                 <a:ea typeface="Calibri" pitchFamily="34" charset="-122"/>
                 <a:cs typeface="Calibri" pitchFamily="34" charset="-120"/>
               </a:rPr>
-              <a:t>uncomfortable</a:t>
+              <a:t>unfinished</a:t>
             </a:r>
             <a:pPr algn="l" indent="0" marL="0">
               <a:buNone/>
@@ -6102,7 +6102,7 @@
                 <a:ea typeface="Calibri" pitchFamily="34" charset="-122"/>
                 <a:cs typeface="Calibri" pitchFamily="34" charset="-120"/>
               </a:rPr>
-              <a:t> about it.</a:t>
+              <a:t> message inside.</a:t>
             </a:r>
             <a:endParaRPr lang="en-US" sz="1800" dirty="0"/>
           </a:p>
@@ -6257,7 +6257,7 @@
                 <a:ea typeface="Trebuchet MS" pitchFamily="34" charset="-122"/>
                 <a:cs typeface="Trebuchet MS" pitchFamily="34" charset="-120"/>
               </a:rPr>
-              <a:t>unkind</a:t>
+              <a:t>unlock</a:t>
             </a:r>
             <a:endParaRPr lang="en-US" sz="1400" dirty="0"/>
           </a:p>
@@ -6385,7 +6385,7 @@
                 <a:ea typeface="Trebuchet MS" pitchFamily="34" charset="-122"/>
                 <a:cs typeface="Trebuchet MS" pitchFamily="34" charset="-120"/>
               </a:rPr>
-              <a:t>uncomfortable</a:t>
+              <a:t>unfinished</a:t>
             </a:r>
             <a:endParaRPr lang="en-US" sz="1400" dirty="0"/>
           </a:p>
@@ -6855,7 +6855,7 @@
                 <a:ea typeface="Trebuchet MS" pitchFamily="34" charset="-122"/>
                 <a:cs typeface="Trebuchet MS" pitchFamily="34" charset="-120"/>
               </a:rPr>
-              <a:t>unkind</a:t>
+              <a:t>unlock</a:t>
             </a:r>
             <a:endParaRPr lang="en-US" sz="2800" dirty="0"/>
           </a:p>
@@ -7682,7 +7682,7 @@
                 <a:ea typeface="Trebuchet MS" pitchFamily="34" charset="-122"/>
                 <a:cs typeface="Trebuchet MS" pitchFamily="34" charset="-120"/>
               </a:rPr>
-              <a:t>unkind</a:t>
+              <a:t>unlock</a:t>
             </a:r>
             <a:endParaRPr lang="en-US" sz="2800" dirty="0"/>
           </a:p>
@@ -7860,7 +7860,7 @@
                 <a:ea typeface="Calibri" pitchFamily="34" charset="-122"/>
                 <a:cs typeface="Calibri" pitchFamily="34" charset="-120"/>
               </a:rPr>
-              <a:t>not</a:t>
+              <a:t>opposite of</a:t>
             </a:r>
             <a:endParaRPr lang="en-US" sz="850" dirty="0"/>
           </a:p>
@@ -7883,11 +7883,11 @@
             </a:avLst>
           </a:prstGeom>
           <a:solidFill>
-            <a:srgbClr val="FCE7F3"/>
+            <a:srgbClr val="DDD6FE"/>
           </a:solidFill>
           <a:ln w="19050">
             <a:solidFill>
-              <a:srgbClr val="DB2777"/>
+              <a:srgbClr val="7C3AED"/>
             </a:solidFill>
             <a:prstDash val="solid"/>
           </a:ln>
@@ -7927,13 +7927,13 @@
             <a:r>
               <a:rPr lang="en-US" sz="1300" b="1" dirty="0">
                 <a:solidFill>
-                  <a:srgbClr val="9D174D"/>
+                  <a:srgbClr val="4C1D95"/>
                 </a:solidFill>
                 <a:latin typeface="Trebuchet MS" pitchFamily="34" charset="0"/>
                 <a:ea typeface="Trebuchet MS" pitchFamily="34" charset="-122"/>
                 <a:cs typeface="Trebuchet MS" pitchFamily="34" charset="-120"/>
               </a:rPr>
-              <a:t>kind</a:t>
+              <a:t>lock</a:t>
             </a:r>
             <a:endParaRPr lang="en-US" sz="1300" dirty="0"/>
           </a:p>
@@ -7972,7 +7972,7 @@
                 <a:ea typeface="Calibri" pitchFamily="34" charset="-122"/>
                 <a:cs typeface="Calibri" pitchFamily="34" charset="-120"/>
               </a:rPr>
-              <a:t>caring and gentle</a:t>
+              <a:t>to fasten with a lock</a:t>
             </a:r>
             <a:endParaRPr lang="en-US" sz="850" dirty="0"/>
           </a:p>
@@ -8667,7 +8667,7 @@
                 <a:ea typeface="Trebuchet MS" pitchFamily="34" charset="-122"/>
                 <a:cs typeface="Trebuchet MS" pitchFamily="34" charset="-120"/>
               </a:rPr>
-              <a:t>unkind</a:t>
+              <a:t>unlock</a:t>
             </a:r>
             <a:endParaRPr lang="en-US" sz="2800" dirty="0"/>
           </a:p>
@@ -8845,7 +8845,7 @@
                 <a:ea typeface="Calibri" pitchFamily="34" charset="-122"/>
                 <a:cs typeface="Calibri" pitchFamily="34" charset="-120"/>
               </a:rPr>
-              <a:t>not</a:t>
+              <a:t>opposite of</a:t>
             </a:r>
             <a:endParaRPr lang="en-US" sz="850" dirty="0"/>
           </a:p>
@@ -8868,11 +8868,11 @@
             </a:avLst>
           </a:prstGeom>
           <a:solidFill>
-            <a:srgbClr val="FCE7F3"/>
+            <a:srgbClr val="DDD6FE"/>
           </a:solidFill>
           <a:ln w="19050">
             <a:solidFill>
-              <a:srgbClr val="DB2777"/>
+              <a:srgbClr val="7C3AED"/>
             </a:solidFill>
             <a:prstDash val="solid"/>
           </a:ln>
@@ -8912,13 +8912,13 @@
             <a:r>
               <a:rPr lang="en-US" sz="1300" b="1" dirty="0">
                 <a:solidFill>
-                  <a:srgbClr val="9D174D"/>
+                  <a:srgbClr val="4C1D95"/>
                 </a:solidFill>
                 <a:latin typeface="Trebuchet MS" pitchFamily="34" charset="0"/>
                 <a:ea typeface="Trebuchet MS" pitchFamily="34" charset="-122"/>
                 <a:cs typeface="Trebuchet MS" pitchFamily="34" charset="-120"/>
               </a:rPr>
-              <a:t>kind</a:t>
+              <a:t>lock</a:t>
             </a:r>
             <a:endParaRPr lang="en-US" sz="1300" dirty="0"/>
           </a:p>
@@ -8957,7 +8957,7 @@
                 <a:ea typeface="Calibri" pitchFamily="34" charset="-122"/>
                 <a:cs typeface="Calibri" pitchFamily="34" charset="-120"/>
               </a:rPr>
-              <a:t>caring and gentle</a:t>
+              <a:t>to fasten with a lock</a:t>
             </a:r>
             <a:endParaRPr lang="en-US" sz="850" dirty="0"/>
           </a:p>
@@ -9221,7 +9221,7 @@
                 <a:ea typeface="Trebuchet MS" pitchFamily="34" charset="-122"/>
                 <a:cs typeface="Trebuchet MS" pitchFamily="34" charset="-120"/>
               </a:rPr>
-              <a:t>kind</a:t>
+              <a:t>lock</a:t>
             </a:r>
             <a:endParaRPr lang="en-US" sz="1400" dirty="0"/>
           </a:p>
@@ -9784,7 +9784,7 @@
                 <a:ea typeface="Trebuchet MS" pitchFamily="34" charset="-122"/>
                 <a:cs typeface="Trebuchet MS" pitchFamily="34" charset="-120"/>
               </a:rPr>
-              <a:t>unkind</a:t>
+              <a:t>unlock</a:t>
             </a:r>
             <a:endParaRPr lang="en-US" sz="2800" dirty="0"/>
           </a:p>
@@ -9962,7 +9962,7 @@
                 <a:ea typeface="Calibri" pitchFamily="34" charset="-122"/>
                 <a:cs typeface="Calibri" pitchFamily="34" charset="-120"/>
               </a:rPr>
-              <a:t>not</a:t>
+              <a:t>opposite of</a:t>
             </a:r>
             <a:endParaRPr lang="en-US" sz="850" dirty="0"/>
           </a:p>
@@ -9985,11 +9985,11 @@
             </a:avLst>
           </a:prstGeom>
           <a:solidFill>
-            <a:srgbClr val="FCE7F3"/>
+            <a:srgbClr val="DDD6FE"/>
           </a:solidFill>
           <a:ln w="19050">
             <a:solidFill>
-              <a:srgbClr val="DB2777"/>
+              <a:srgbClr val="7C3AED"/>
             </a:solidFill>
             <a:prstDash val="solid"/>
           </a:ln>
@@ -10029,13 +10029,13 @@
             <a:r>
               <a:rPr lang="en-US" sz="1300" b="1" dirty="0">
                 <a:solidFill>
-                  <a:srgbClr val="9D174D"/>
+                  <a:srgbClr val="4C1D95"/>
                 </a:solidFill>
                 <a:latin typeface="Trebuchet MS" pitchFamily="34" charset="0"/>
                 <a:ea typeface="Trebuchet MS" pitchFamily="34" charset="-122"/>
                 <a:cs typeface="Trebuchet MS" pitchFamily="34" charset="-120"/>
               </a:rPr>
-              <a:t>kind</a:t>
+              <a:t>lock</a:t>
             </a:r>
             <a:endParaRPr lang="en-US" sz="1300" dirty="0"/>
           </a:p>
@@ -10074,7 +10074,7 @@
                 <a:ea typeface="Calibri" pitchFamily="34" charset="-122"/>
                 <a:cs typeface="Calibri" pitchFamily="34" charset="-120"/>
               </a:rPr>
-              <a:t>caring and gentle</a:t>
+              <a:t>to fasten with a lock</a:t>
             </a:r>
             <a:endParaRPr lang="en-US" sz="850" dirty="0"/>
           </a:p>
@@ -10338,7 +10338,7 @@
                 <a:ea typeface="Trebuchet MS" pitchFamily="34" charset="-122"/>
                 <a:cs typeface="Trebuchet MS" pitchFamily="34" charset="-120"/>
               </a:rPr>
-              <a:t>kind</a:t>
+              <a:t>lock</a:t>
             </a:r>
             <a:endParaRPr lang="en-US" sz="1400" dirty="0"/>
           </a:p>
@@ -10445,7 +10445,7 @@
         </p:nvSpPr>
         <p:spPr>
           <a:xfrm>
-            <a:off x="2254649" y="4169664"/>
+            <a:off x="2427732" y="4169664"/>
             <a:ext cx="685800" cy="475488"/>
           </a:xfrm>
           <a:prstGeom prst="rect">
@@ -10472,7 +10472,7 @@
         </p:nvSpPr>
         <p:spPr>
           <a:xfrm>
-            <a:off x="2254649" y="4169664"/>
+            <a:off x="2427732" y="4169664"/>
             <a:ext cx="685800" cy="475488"/>
           </a:xfrm>
           <a:prstGeom prst="rect">
@@ -10511,7 +10511,7 @@
         </p:nvSpPr>
         <p:spPr>
           <a:xfrm>
-            <a:off x="3293146" y="4169664"/>
+            <a:off x="3639312" y="4169664"/>
             <a:ext cx="685800" cy="475488"/>
           </a:xfrm>
           <a:prstGeom prst="rect">
@@ -10538,7 +10538,7 @@
         </p:nvSpPr>
         <p:spPr>
           <a:xfrm>
-            <a:off x="3293146" y="4169664"/>
+            <a:off x="3639312" y="4169664"/>
             <a:ext cx="685800" cy="475488"/>
           </a:xfrm>
           <a:prstGeom prst="rect">
@@ -10577,7 +10577,7 @@
         </p:nvSpPr>
         <p:spPr>
           <a:xfrm>
-            <a:off x="4331643" y="4169664"/>
+            <a:off x="4850892" y="4169664"/>
             <a:ext cx="685800" cy="475488"/>
           </a:xfrm>
           <a:prstGeom prst="rect">
@@ -10604,7 +10604,7 @@
         </p:nvSpPr>
         <p:spPr>
           <a:xfrm>
-            <a:off x="4331643" y="4169664"/>
+            <a:off x="4850892" y="4169664"/>
             <a:ext cx="685800" cy="475488"/>
           </a:xfrm>
           <a:prstGeom prst="rect">
@@ -10629,7 +10629,7 @@
                 <a:ea typeface="Trebuchet MS" pitchFamily="34" charset="-122"/>
                 <a:cs typeface="Trebuchet MS" pitchFamily="34" charset="-120"/>
               </a:rPr>
-              <a:t>k</a:t>
+              <a:t>l</a:t>
             </a:r>
             <a:endParaRPr lang="en-US" sz="900" dirty="0"/>
           </a:p>
@@ -10643,7 +10643,7 @@
         </p:nvSpPr>
         <p:spPr>
           <a:xfrm>
-            <a:off x="5370141" y="4169664"/>
+            <a:off x="6062472" y="4169664"/>
             <a:ext cx="685800" cy="475488"/>
           </a:xfrm>
           <a:prstGeom prst="rect">
@@ -10670,7 +10670,7 @@
         </p:nvSpPr>
         <p:spPr>
           <a:xfrm>
-            <a:off x="5370141" y="4169664"/>
+            <a:off x="6062472" y="4169664"/>
             <a:ext cx="685800" cy="475488"/>
           </a:xfrm>
           <a:prstGeom prst="rect">
@@ -10695,7 +10695,7 @@
                 <a:ea typeface="Trebuchet MS" pitchFamily="34" charset="-122"/>
                 <a:cs typeface="Trebuchet MS" pitchFamily="34" charset="-120"/>
               </a:rPr>
-              <a:t>i</a:t>
+              <a:t>o</a:t>
             </a:r>
             <a:endParaRPr lang="en-US" sz="900" dirty="0"/>
           </a:p>
@@ -10709,7 +10709,7 @@
         </p:nvSpPr>
         <p:spPr>
           <a:xfrm>
-            <a:off x="6408638" y="4169664"/>
+            <a:off x="7274052" y="4169664"/>
             <a:ext cx="685800" cy="475488"/>
           </a:xfrm>
           <a:prstGeom prst="rect">
@@ -10736,7 +10736,7 @@
         </p:nvSpPr>
         <p:spPr>
           <a:xfrm>
-            <a:off x="6408638" y="4169664"/>
+            <a:off x="7274052" y="4169664"/>
             <a:ext cx="685800" cy="475488"/>
           </a:xfrm>
           <a:prstGeom prst="rect">
@@ -10761,73 +10761,7 @@
                 <a:ea typeface="Trebuchet MS" pitchFamily="34" charset="-122"/>
                 <a:cs typeface="Trebuchet MS" pitchFamily="34" charset="-120"/>
               </a:rPr>
-              <a:t>n</a:t>
-            </a:r>
-            <a:endParaRPr lang="en-US" sz="900" dirty="0"/>
-          </a:p>
-        </p:txBody>
-      </p:sp>
-      <p:sp>
-        <p:nvSpPr>
-          <p:cNvPr id="43" name="Shape 41"/>
-          <p:cNvSpPr/>
-          <p:nvPr/>
-        </p:nvSpPr>
-        <p:spPr>
-          <a:xfrm>
-            <a:off x="7447135" y="4169664"/>
-            <a:ext cx="685800" cy="475488"/>
-          </a:xfrm>
-          <a:prstGeom prst="rect">
-            <a:avLst>
-              <a:gd name="adj" fmla="val 7692"/>
-            </a:avLst>
-          </a:prstGeom>
-          <a:solidFill>
-            <a:srgbClr val="FFFFFF"/>
-          </a:solidFill>
-          <a:ln w="12700">
-            <a:solidFill>
-              <a:srgbClr val="DB2777"/>
-            </a:solidFill>
-            <a:prstDash val="solid"/>
-          </a:ln>
-        </p:spPr>
-      </p:sp>
-      <p:sp>
-        <p:nvSpPr>
-          <p:cNvPr id="44" name="Text 42"/>
-          <p:cNvSpPr/>
-          <p:nvPr/>
-        </p:nvSpPr>
-        <p:spPr>
-          <a:xfrm>
-            <a:off x="7447135" y="4169664"/>
-            <a:ext cx="685800" cy="475488"/>
-          </a:xfrm>
-          <a:prstGeom prst="rect">
-            <a:avLst/>
-          </a:prstGeom>
-          <a:noFill/>
-          <a:ln/>
-        </p:spPr>
-        <p:txBody>
-          <a:bodyPr wrap="square" lIns="0" tIns="0" rIns="0" bIns="0" rtlCol="0" anchor="ctr"/>
-          <a:lstStyle/>
-          <a:p>
-            <a:pPr algn="ctr" indent="0" marL="0">
-              <a:buNone/>
-            </a:pPr>
-            <a:r>
-              <a:rPr lang="en-US" sz="900" b="1" dirty="0">
-                <a:solidFill>
-                  <a:srgbClr val="9D174D"/>
-                </a:solidFill>
-                <a:latin typeface="Trebuchet MS" pitchFamily="34" charset="0"/>
-                <a:ea typeface="Trebuchet MS" pitchFamily="34" charset="-122"/>
-                <a:cs typeface="Trebuchet MS" pitchFamily="34" charset="-120"/>
-              </a:rPr>
-              <a:t>d</a:t>
+              <a:t>ck</a:t>
             </a:r>
             <a:endParaRPr lang="en-US" sz="900" dirty="0"/>
           </a:p>
@@ -11258,7 +11192,7 @@
                 <a:ea typeface="Trebuchet MS" pitchFamily="34" charset="-122"/>
                 <a:cs typeface="Trebuchet MS" pitchFamily="34" charset="-120"/>
               </a:rPr>
-              <a:t>uncomfortable</a:t>
+              <a:t>unfinished</a:t>
             </a:r>
             <a:endParaRPr lang="en-US" sz="2800" dirty="0"/>
           </a:p>
@@ -12085,7 +12019,7 @@
                 <a:ea typeface="Trebuchet MS" pitchFamily="34" charset="-122"/>
                 <a:cs typeface="Trebuchet MS" pitchFamily="34" charset="-120"/>
               </a:rPr>
-              <a:t>uncomfortable</a:t>
+              <a:t>unfinished</a:t>
             </a:r>
             <a:endParaRPr lang="en-US" sz="2800" dirty="0"/>
           </a:p>
@@ -12336,7 +12270,7 @@
                 <a:ea typeface="Trebuchet MS" pitchFamily="34" charset="-122"/>
                 <a:cs typeface="Trebuchet MS" pitchFamily="34" charset="-120"/>
               </a:rPr>
-              <a:t>comfort</a:t>
+              <a:t>finish</a:t>
             </a:r>
             <a:endParaRPr lang="en-US" sz="1300" dirty="0"/>
           </a:p>
@@ -12375,7 +12309,7 @@
                 <a:ea typeface="Calibri" pitchFamily="34" charset="-122"/>
                 <a:cs typeface="Calibri" pitchFamily="34" charset="-120"/>
               </a:rPr>
-              <a:t>a feeling of ease</a:t>
+              <a:t>to complete</a:t>
             </a:r>
             <a:endParaRPr lang="en-US" sz="850" dirty="0"/>
           </a:p>
@@ -12448,7 +12382,7 @@
                 <a:ea typeface="Trebuchet MS" pitchFamily="34" charset="-122"/>
                 <a:cs typeface="Trebuchet MS" pitchFamily="34" charset="-120"/>
               </a:rPr>
-              <a:t>able</a:t>
+              <a:t>ed</a:t>
             </a:r>
             <a:endParaRPr lang="en-US" sz="1300" dirty="0"/>
           </a:p>
@@ -12487,7 +12421,7 @@
                 <a:ea typeface="Calibri" pitchFamily="34" charset="-122"/>
                 <a:cs typeface="Calibri" pitchFamily="34" charset="-120"/>
               </a:rPr>
-              <a:t>able to be</a:t>
+              <a:t>past tense</a:t>
             </a:r>
             <a:endParaRPr lang="en-US" sz="850" dirty="0"/>
           </a:p>
@@ -13182,7 +13116,7 @@
                 <a:ea typeface="Trebuchet MS" pitchFamily="34" charset="-122"/>
                 <a:cs typeface="Trebuchet MS" pitchFamily="34" charset="-120"/>
               </a:rPr>
-              <a:t>uncomfortable</a:t>
+              <a:t>unfinished</a:t>
             </a:r>
             <a:endParaRPr lang="en-US" sz="2800" dirty="0"/>
           </a:p>
@@ -13433,7 +13367,7 @@
                 <a:ea typeface="Trebuchet MS" pitchFamily="34" charset="-122"/>
                 <a:cs typeface="Trebuchet MS" pitchFamily="34" charset="-120"/>
               </a:rPr>
-              <a:t>comfort</a:t>
+              <a:t>finish</a:t>
             </a:r>
             <a:endParaRPr lang="en-US" sz="1300" dirty="0"/>
           </a:p>
@@ -13472,7 +13406,7 @@
                 <a:ea typeface="Calibri" pitchFamily="34" charset="-122"/>
                 <a:cs typeface="Calibri" pitchFamily="34" charset="-120"/>
               </a:rPr>
-              <a:t>a feeling of ease</a:t>
+              <a:t>to complete</a:t>
             </a:r>
             <a:endParaRPr lang="en-US" sz="850" dirty="0"/>
           </a:p>
@@ -13545,7 +13479,7 @@
                 <a:ea typeface="Trebuchet MS" pitchFamily="34" charset="-122"/>
                 <a:cs typeface="Trebuchet MS" pitchFamily="34" charset="-120"/>
               </a:rPr>
-              <a:t>able</a:t>
+              <a:t>ed</a:t>
             </a:r>
             <a:endParaRPr lang="en-US" sz="1300" dirty="0"/>
           </a:p>
@@ -13584,7 +13518,7 @@
                 <a:ea typeface="Calibri" pitchFamily="34" charset="-122"/>
                 <a:cs typeface="Calibri" pitchFamily="34" charset="-120"/>
               </a:rPr>
-              <a:t>able to be</a:t>
+              <a:t>past tense</a:t>
             </a:r>
             <a:endParaRPr lang="en-US" sz="850" dirty="0"/>
           </a:p>
@@ -13691,8 +13625,8 @@
         </p:nvSpPr>
         <p:spPr>
           <a:xfrm>
-            <a:off x="1978152" y="3364992"/>
-            <a:ext cx="1225296" cy="475488"/>
+            <a:off x="2313432" y="3364992"/>
+            <a:ext cx="1645920" cy="475488"/>
           </a:xfrm>
           <a:prstGeom prst="rect">
             <a:avLst>
@@ -13718,8 +13652,8 @@
         </p:nvSpPr>
         <p:spPr>
           <a:xfrm>
-            <a:off x="1978152" y="3364992"/>
-            <a:ext cx="1225296" cy="475488"/>
+            <a:off x="2313432" y="3364992"/>
+            <a:ext cx="1645920" cy="475488"/>
           </a:xfrm>
           <a:prstGeom prst="rect">
             <a:avLst/>
@@ -13757,8 +13691,8 @@
         </p:nvSpPr>
         <p:spPr>
           <a:xfrm>
-            <a:off x="3203448" y="3364992"/>
-            <a:ext cx="76200" cy="475488"/>
+            <a:off x="3959352" y="3364992"/>
+            <a:ext cx="411480" cy="475488"/>
           </a:xfrm>
           <a:prstGeom prst="rect">
             <a:avLst/>
@@ -13796,8 +13730,8 @@
         </p:nvSpPr>
         <p:spPr>
           <a:xfrm>
-            <a:off x="3279648" y="3364992"/>
-            <a:ext cx="1225296" cy="475488"/>
+            <a:off x="4370832" y="3364992"/>
+            <a:ext cx="1645920" cy="475488"/>
           </a:xfrm>
           <a:prstGeom prst="rect">
             <a:avLst>
@@ -13823,8 +13757,8 @@
         </p:nvSpPr>
         <p:spPr>
           <a:xfrm>
-            <a:off x="3279648" y="3364992"/>
-            <a:ext cx="1225296" cy="475488"/>
+            <a:off x="4370832" y="3364992"/>
+            <a:ext cx="1645920" cy="475488"/>
           </a:xfrm>
           <a:prstGeom prst="rect">
             <a:avLst/>
@@ -13848,7 +13782,7 @@
                 <a:ea typeface="Trebuchet MS" pitchFamily="34" charset="-122"/>
                 <a:cs typeface="Trebuchet MS" pitchFamily="34" charset="-120"/>
               </a:rPr>
-              <a:t>com</a:t>
+              <a:t>fin</a:t>
             </a:r>
             <a:endParaRPr lang="en-US" sz="1400" dirty="0"/>
           </a:p>
@@ -13862,8 +13796,8 @@
         </p:nvSpPr>
         <p:spPr>
           <a:xfrm>
-            <a:off x="4504944" y="3364992"/>
-            <a:ext cx="76200" cy="475488"/>
+            <a:off x="6016752" y="3364992"/>
+            <a:ext cx="411480" cy="475488"/>
           </a:xfrm>
           <a:prstGeom prst="rect">
             <a:avLst/>
@@ -13901,8 +13835,8 @@
         </p:nvSpPr>
         <p:spPr>
           <a:xfrm>
-            <a:off x="4581144" y="3364992"/>
-            <a:ext cx="1225296" cy="475488"/>
+            <a:off x="6428232" y="3364992"/>
+            <a:ext cx="1645920" cy="475488"/>
           </a:xfrm>
           <a:prstGeom prst="rect">
             <a:avLst>
@@ -13928,8 +13862,8 @@
         </p:nvSpPr>
         <p:spPr>
           <a:xfrm>
-            <a:off x="4581144" y="3364992"/>
-            <a:ext cx="1225296" cy="475488"/>
+            <a:off x="6428232" y="3364992"/>
+            <a:ext cx="1645920" cy="475488"/>
           </a:xfrm>
           <a:prstGeom prst="rect">
             <a:avLst/>
@@ -13953,7 +13887,7 @@
                 <a:ea typeface="Trebuchet MS" pitchFamily="34" charset="-122"/>
                 <a:cs typeface="Trebuchet MS" pitchFamily="34" charset="-120"/>
               </a:rPr>
-              <a:t>fort</a:t>
+              <a:t>ished</a:t>
             </a:r>
             <a:endParaRPr lang="en-US" sz="1400" dirty="0"/>
           </a:p>
@@ -13961,224 +13895,80 @@
       </p:sp>
       <p:sp>
         <p:nvSpPr>
-          <p:cNvPr id="36" name="Text 34"/>
-          <p:cNvSpPr/>
-          <p:nvPr/>
-        </p:nvSpPr>
-        <p:spPr>
-          <a:xfrm>
-            <a:off x="5806440" y="3364992"/>
-            <a:ext cx="76200" cy="475488"/>
-          </a:xfrm>
-          <a:prstGeom prst="rect">
-            <a:avLst/>
-          </a:prstGeom>
-          <a:noFill/>
-          <a:ln/>
-        </p:spPr>
-        <p:txBody>
-          <a:bodyPr wrap="square" lIns="0" tIns="0" rIns="0" bIns="0" rtlCol="0" anchor="ctr"/>
-          <a:lstStyle/>
-          <a:p>
-            <a:pPr algn="ctr" indent="0" marL="0">
-              <a:buNone/>
-            </a:pPr>
-            <a:r>
-              <a:rPr lang="en-US" sz="1600" b="1" dirty="0">
-                <a:solidFill>
-                  <a:srgbClr val="0D9488"/>
+          <p:cNvPr id="36" name="Shape 34"/>
+          <p:cNvSpPr/>
+          <p:nvPr/>
+        </p:nvSpPr>
+        <p:spPr>
+          <a:xfrm>
+            <a:off x="365760" y="4096512"/>
+            <a:ext cx="1371600" cy="804672"/>
+          </a:xfrm>
+          <a:prstGeom prst="rect">
+            <a:avLst>
+              <a:gd name="adj" fmla="val 6818"/>
+            </a:avLst>
+          </a:prstGeom>
+          <a:solidFill>
+            <a:srgbClr val="E2E8F0"/>
+          </a:solidFill>
+          <a:ln w="12700">
+            <a:solidFill>
+              <a:srgbClr val="E2E8F0"/>
+            </a:solidFill>
+            <a:prstDash val="solid"/>
+          </a:ln>
+        </p:spPr>
+      </p:sp>
+      <p:sp>
+        <p:nvSpPr>
+          <p:cNvPr id="37" name="Text 35"/>
+          <p:cNvSpPr/>
+          <p:nvPr/>
+        </p:nvSpPr>
+        <p:spPr>
+          <a:xfrm>
+            <a:off x="365760" y="4096512"/>
+            <a:ext cx="1371600" cy="804672"/>
+          </a:xfrm>
+          <a:prstGeom prst="rect">
+            <a:avLst/>
+          </a:prstGeom>
+          <a:noFill/>
+          <a:ln/>
+        </p:spPr>
+        <p:txBody>
+          <a:bodyPr wrap="square" lIns="0" tIns="0" rIns="0" bIns="0" rtlCol="0" anchor="ctr"/>
+          <a:lstStyle/>
+          <a:p>
+            <a:pPr algn="ctr" indent="0" marL="0">
+              <a:buNone/>
+            </a:pPr>
+            <a:r>
+              <a:rPr lang="en-US" sz="1100" b="1" dirty="0">
+                <a:solidFill>
+                  <a:srgbClr val="475569"/>
                 </a:solidFill>
                 <a:latin typeface="Trebuchet MS" pitchFamily="34" charset="0"/>
                 <a:ea typeface="Trebuchet MS" pitchFamily="34" charset="-122"/>
                 <a:cs typeface="Trebuchet MS" pitchFamily="34" charset="-120"/>
               </a:rPr>
-              <a:t>·</a:t>
-            </a:r>
-            <a:endParaRPr lang="en-US" sz="1600" dirty="0"/>
-          </a:p>
-        </p:txBody>
-      </p:sp>
-      <p:sp>
-        <p:nvSpPr>
-          <p:cNvPr id="37" name="Shape 35"/>
-          <p:cNvSpPr/>
-          <p:nvPr/>
-        </p:nvSpPr>
-        <p:spPr>
-          <a:xfrm>
-            <a:off x="5882640" y="3364992"/>
-            <a:ext cx="1225296" cy="475488"/>
-          </a:xfrm>
-          <a:prstGeom prst="rect">
-            <a:avLst>
-              <a:gd name="adj" fmla="val 9615"/>
-            </a:avLst>
-          </a:prstGeom>
-          <a:solidFill>
-            <a:srgbClr val="FFFFFF"/>
-          </a:solidFill>
-          <a:ln w="12700">
-            <a:solidFill>
-              <a:srgbClr val="0D9488"/>
-            </a:solidFill>
-            <a:prstDash val="solid"/>
-          </a:ln>
-        </p:spPr>
-      </p:sp>
-      <p:sp>
-        <p:nvSpPr>
-          <p:cNvPr id="38" name="Text 36"/>
-          <p:cNvSpPr/>
-          <p:nvPr/>
-        </p:nvSpPr>
-        <p:spPr>
-          <a:xfrm>
-            <a:off x="5882640" y="3364992"/>
-            <a:ext cx="1225296" cy="475488"/>
-          </a:xfrm>
-          <a:prstGeom prst="rect">
-            <a:avLst/>
-          </a:prstGeom>
-          <a:noFill/>
-          <a:ln/>
-        </p:spPr>
-        <p:txBody>
-          <a:bodyPr wrap="square" lIns="0" tIns="0" rIns="0" bIns="0" rtlCol="0" anchor="ctr"/>
-          <a:lstStyle/>
-          <a:p>
-            <a:pPr algn="ctr" indent="0" marL="0">
-              <a:buNone/>
-            </a:pPr>
-            <a:r>
-              <a:rPr lang="en-US" sz="1400" b="1" dirty="0">
-                <a:solidFill>
-                  <a:srgbClr val="0D9488"/>
-                </a:solidFill>
-                <a:latin typeface="Trebuchet MS" pitchFamily="34" charset="0"/>
-                <a:ea typeface="Trebuchet MS" pitchFamily="34" charset="-122"/>
-                <a:cs typeface="Trebuchet MS" pitchFamily="34" charset="-120"/>
-              </a:rPr>
-              <a:t>a</a:t>
-            </a:r>
-            <a:endParaRPr lang="en-US" sz="1400" dirty="0"/>
-          </a:p>
-        </p:txBody>
-      </p:sp>
-      <p:sp>
-        <p:nvSpPr>
-          <p:cNvPr id="39" name="Text 37"/>
-          <p:cNvSpPr/>
-          <p:nvPr/>
-        </p:nvSpPr>
-        <p:spPr>
-          <a:xfrm>
-            <a:off x="7107936" y="3364992"/>
-            <a:ext cx="76200" cy="475488"/>
-          </a:xfrm>
-          <a:prstGeom prst="rect">
-            <a:avLst/>
-          </a:prstGeom>
-          <a:noFill/>
-          <a:ln/>
-        </p:spPr>
-        <p:txBody>
-          <a:bodyPr wrap="square" lIns="0" tIns="0" rIns="0" bIns="0" rtlCol="0" anchor="ctr"/>
-          <a:lstStyle/>
-          <a:p>
-            <a:pPr algn="ctr" indent="0" marL="0">
-              <a:buNone/>
-            </a:pPr>
-            <a:r>
-              <a:rPr lang="en-US" sz="1600" b="1" dirty="0">
-                <a:solidFill>
-                  <a:srgbClr val="0D9488"/>
-                </a:solidFill>
-                <a:latin typeface="Trebuchet MS" pitchFamily="34" charset="0"/>
-                <a:ea typeface="Trebuchet MS" pitchFamily="34" charset="-122"/>
-                <a:cs typeface="Trebuchet MS" pitchFamily="34" charset="-120"/>
-              </a:rPr>
-              <a:t>·</a:t>
-            </a:r>
-            <a:endParaRPr lang="en-US" sz="1600" dirty="0"/>
-          </a:p>
-        </p:txBody>
-      </p:sp>
-      <p:sp>
-        <p:nvSpPr>
-          <p:cNvPr id="40" name="Shape 38"/>
-          <p:cNvSpPr/>
-          <p:nvPr/>
-        </p:nvSpPr>
-        <p:spPr>
-          <a:xfrm>
-            <a:off x="7184136" y="3364992"/>
-            <a:ext cx="1225296" cy="475488"/>
-          </a:xfrm>
-          <a:prstGeom prst="rect">
-            <a:avLst>
-              <a:gd name="adj" fmla="val 9615"/>
-            </a:avLst>
-          </a:prstGeom>
-          <a:solidFill>
-            <a:srgbClr val="FFFFFF"/>
-          </a:solidFill>
-          <a:ln w="12700">
-            <a:solidFill>
-              <a:srgbClr val="0D9488"/>
-            </a:solidFill>
-            <a:prstDash val="solid"/>
-          </a:ln>
-        </p:spPr>
-      </p:sp>
-      <p:sp>
-        <p:nvSpPr>
-          <p:cNvPr id="41" name="Text 39"/>
-          <p:cNvSpPr/>
-          <p:nvPr/>
-        </p:nvSpPr>
-        <p:spPr>
-          <a:xfrm>
-            <a:off x="7184136" y="3364992"/>
-            <a:ext cx="1225296" cy="475488"/>
-          </a:xfrm>
-          <a:prstGeom prst="rect">
-            <a:avLst/>
-          </a:prstGeom>
-          <a:noFill/>
-          <a:ln/>
-        </p:spPr>
-        <p:txBody>
-          <a:bodyPr wrap="square" lIns="0" tIns="0" rIns="0" bIns="0" rtlCol="0" anchor="ctr"/>
-          <a:lstStyle/>
-          <a:p>
-            <a:pPr algn="ctr" indent="0" marL="0">
-              <a:buNone/>
-            </a:pPr>
-            <a:r>
-              <a:rPr lang="en-US" sz="1400" b="1" dirty="0">
-                <a:solidFill>
-                  <a:srgbClr val="0D9488"/>
-                </a:solidFill>
-                <a:latin typeface="Trebuchet MS" pitchFamily="34" charset="0"/>
-                <a:ea typeface="Trebuchet MS" pitchFamily="34" charset="-122"/>
-                <a:cs typeface="Trebuchet MS" pitchFamily="34" charset="-120"/>
-              </a:rPr>
-              <a:t>ble</a:t>
-            </a:r>
-            <a:endParaRPr lang="en-US" sz="1400" dirty="0"/>
-          </a:p>
-        </p:txBody>
-      </p:sp>
-      <p:sp>
-        <p:nvSpPr>
-          <p:cNvPr id="42" name="Shape 40"/>
-          <p:cNvSpPr/>
-          <p:nvPr/>
-        </p:nvSpPr>
-        <p:spPr>
-          <a:xfrm>
-            <a:off x="365760" y="4096512"/>
-            <a:ext cx="1371600" cy="804672"/>
+              <a:t>Phonemes</a:t>
+            </a:r>
+            <a:endParaRPr lang="en-US" sz="1100" dirty="0"/>
+          </a:p>
+        </p:txBody>
+      </p:sp>
+      <p:sp>
+        <p:nvSpPr>
+          <p:cNvPr id="38" name="Shape 36"/>
+          <p:cNvSpPr/>
+          <p:nvPr/>
+        </p:nvSpPr>
+        <p:spPr>
+          <a:xfrm>
+            <a:off x="1874520" y="4096512"/>
+            <a:ext cx="6903720" cy="804672"/>
           </a:xfrm>
           <a:prstGeom prst="rect">
             <a:avLst>
@@ -14186,85 +13976,19 @@
             </a:avLst>
           </a:prstGeom>
           <a:solidFill>
-            <a:srgbClr val="E2E8F0"/>
+            <a:srgbClr val="F8FAFC"/>
           </a:solidFill>
           <a:ln w="12700">
             <a:solidFill>
               <a:srgbClr val="E2E8F0"/>
             </a:solidFill>
-            <a:prstDash val="solid"/>
-          </a:ln>
-        </p:spPr>
-      </p:sp>
-      <p:sp>
-        <p:nvSpPr>
-          <p:cNvPr id="43" name="Text 41"/>
-          <p:cNvSpPr/>
-          <p:nvPr/>
-        </p:nvSpPr>
-        <p:spPr>
-          <a:xfrm>
-            <a:off x="365760" y="4096512"/>
-            <a:ext cx="1371600" cy="804672"/>
-          </a:xfrm>
-          <a:prstGeom prst="rect">
-            <a:avLst/>
-          </a:prstGeom>
-          <a:noFill/>
-          <a:ln/>
-        </p:spPr>
-        <p:txBody>
-          <a:bodyPr wrap="square" lIns="0" tIns="0" rIns="0" bIns="0" rtlCol="0" anchor="ctr"/>
-          <a:lstStyle/>
-          <a:p>
-            <a:pPr algn="ctr" indent="0" marL="0">
-              <a:buNone/>
-            </a:pPr>
-            <a:r>
-              <a:rPr lang="en-US" sz="1100" b="1" dirty="0">
-                <a:solidFill>
-                  <a:srgbClr val="475569"/>
-                </a:solidFill>
-                <a:latin typeface="Trebuchet MS" pitchFamily="34" charset="0"/>
-                <a:ea typeface="Trebuchet MS" pitchFamily="34" charset="-122"/>
-                <a:cs typeface="Trebuchet MS" pitchFamily="34" charset="-120"/>
-              </a:rPr>
-              <a:t>Phonemes</a:t>
-            </a:r>
-            <a:endParaRPr lang="en-US" sz="1100" dirty="0"/>
-          </a:p>
-        </p:txBody>
-      </p:sp>
-      <p:sp>
-        <p:nvSpPr>
-          <p:cNvPr id="44" name="Shape 42"/>
-          <p:cNvSpPr/>
-          <p:nvPr/>
-        </p:nvSpPr>
-        <p:spPr>
-          <a:xfrm>
-            <a:off x="1874520" y="4096512"/>
-            <a:ext cx="6903720" cy="804672"/>
-          </a:xfrm>
-          <a:prstGeom prst="rect">
-            <a:avLst>
-              <a:gd name="adj" fmla="val 6818"/>
-            </a:avLst>
-          </a:prstGeom>
-          <a:solidFill>
-            <a:srgbClr val="F8FAFC"/>
-          </a:solidFill>
-          <a:ln w="12700">
-            <a:solidFill>
-              <a:srgbClr val="E2E8F0"/>
-            </a:solidFill>
             <a:prstDash val="dash"/>
           </a:ln>
         </p:spPr>
       </p:sp>
       <p:sp>
         <p:nvSpPr>
-          <p:cNvPr id="45" name="Text 43"/>
+          <p:cNvPr id="39" name="Text 37"/>
           <p:cNvSpPr/>
           <p:nvPr/>
         </p:nvSpPr>
@@ -14991,7 +14715,7 @@
                 <a:ea typeface="Trebuchet MS" pitchFamily="34" charset="-122"/>
                 <a:cs typeface="Trebuchet MS" pitchFamily="34" charset="-120"/>
               </a:rPr>
-              <a:t>uncomfortable</a:t>
+              <a:t>unfinished</a:t>
             </a:r>
             <a:endParaRPr lang="en-US" sz="2800" dirty="0"/>
           </a:p>
@@ -15242,7 +14966,7 @@
                 <a:ea typeface="Trebuchet MS" pitchFamily="34" charset="-122"/>
                 <a:cs typeface="Trebuchet MS" pitchFamily="34" charset="-120"/>
               </a:rPr>
-              <a:t>comfort</a:t>
+              <a:t>finish</a:t>
             </a:r>
             <a:endParaRPr lang="en-US" sz="1300" dirty="0"/>
           </a:p>
@@ -15281,7 +15005,7 @@
                 <a:ea typeface="Calibri" pitchFamily="34" charset="-122"/>
                 <a:cs typeface="Calibri" pitchFamily="34" charset="-120"/>
               </a:rPr>
-              <a:t>a feeling of ease</a:t>
+              <a:t>to complete</a:t>
             </a:r>
             <a:endParaRPr lang="en-US" sz="850" dirty="0"/>
           </a:p>
@@ -15354,7 +15078,7 @@
                 <a:ea typeface="Trebuchet MS" pitchFamily="34" charset="-122"/>
                 <a:cs typeface="Trebuchet MS" pitchFamily="34" charset="-120"/>
               </a:rPr>
-              <a:t>able</a:t>
+              <a:t>ed</a:t>
             </a:r>
             <a:endParaRPr lang="en-US" sz="1300" dirty="0"/>
           </a:p>
@@ -15393,7 +15117,7 @@
                 <a:ea typeface="Calibri" pitchFamily="34" charset="-122"/>
                 <a:cs typeface="Calibri" pitchFamily="34" charset="-120"/>
               </a:rPr>
-              <a:t>able to be</a:t>
+              <a:t>past tense</a:t>
             </a:r>
             <a:endParaRPr lang="en-US" sz="850" dirty="0"/>
           </a:p>
@@ -15500,8 +15224,8 @@
         </p:nvSpPr>
         <p:spPr>
           <a:xfrm>
-            <a:off x="1978152" y="3364992"/>
-            <a:ext cx="1225296" cy="475488"/>
+            <a:off x="2313432" y="3364992"/>
+            <a:ext cx="1645920" cy="475488"/>
           </a:xfrm>
           <a:prstGeom prst="rect">
             <a:avLst>
@@ -15527,8 +15251,8 @@
         </p:nvSpPr>
         <p:spPr>
           <a:xfrm>
-            <a:off x="1978152" y="3364992"/>
-            <a:ext cx="1225296" cy="475488"/>
+            <a:off x="2313432" y="3364992"/>
+            <a:ext cx="1645920" cy="475488"/>
           </a:xfrm>
           <a:prstGeom prst="rect">
             <a:avLst/>
@@ -15566,8 +15290,8 @@
         </p:nvSpPr>
         <p:spPr>
           <a:xfrm>
-            <a:off x="3203448" y="3364992"/>
-            <a:ext cx="76200" cy="475488"/>
+            <a:off x="3959352" y="3364992"/>
+            <a:ext cx="411480" cy="475488"/>
           </a:xfrm>
           <a:prstGeom prst="rect">
             <a:avLst/>
@@ -15605,8 +15329,8 @@
         </p:nvSpPr>
         <p:spPr>
           <a:xfrm>
-            <a:off x="3279648" y="3364992"/>
-            <a:ext cx="1225296" cy="475488"/>
+            <a:off x="4370832" y="3364992"/>
+            <a:ext cx="1645920" cy="475488"/>
           </a:xfrm>
           <a:prstGeom prst="rect">
             <a:avLst>
@@ -15632,8 +15356,8 @@
         </p:nvSpPr>
         <p:spPr>
           <a:xfrm>
-            <a:off x="3279648" y="3364992"/>
-            <a:ext cx="1225296" cy="475488"/>
+            <a:off x="4370832" y="3364992"/>
+            <a:ext cx="1645920" cy="475488"/>
           </a:xfrm>
           <a:prstGeom prst="rect">
             <a:avLst/>
@@ -15657,7 +15381,7 @@
                 <a:ea typeface="Trebuchet MS" pitchFamily="34" charset="-122"/>
                 <a:cs typeface="Trebuchet MS" pitchFamily="34" charset="-120"/>
               </a:rPr>
-              <a:t>com</a:t>
+              <a:t>fin</a:t>
             </a:r>
             <a:endParaRPr lang="en-US" sz="1400" dirty="0"/>
           </a:p>
@@ -15671,8 +15395,8 @@
         </p:nvSpPr>
         <p:spPr>
           <a:xfrm>
-            <a:off x="4504944" y="3364992"/>
-            <a:ext cx="76200" cy="475488"/>
+            <a:off x="6016752" y="3364992"/>
+            <a:ext cx="411480" cy="475488"/>
           </a:xfrm>
           <a:prstGeom prst="rect">
             <a:avLst/>
@@ -15710,8 +15434,8 @@
         </p:nvSpPr>
         <p:spPr>
           <a:xfrm>
-            <a:off x="4581144" y="3364992"/>
-            <a:ext cx="1225296" cy="475488"/>
+            <a:off x="6428232" y="3364992"/>
+            <a:ext cx="1645920" cy="475488"/>
           </a:xfrm>
           <a:prstGeom prst="rect">
             <a:avLst>
@@ -15737,8 +15461,8 @@
         </p:nvSpPr>
         <p:spPr>
           <a:xfrm>
-            <a:off x="4581144" y="3364992"/>
-            <a:ext cx="1225296" cy="475488"/>
+            <a:off x="6428232" y="3364992"/>
+            <a:ext cx="1645920" cy="475488"/>
           </a:xfrm>
           <a:prstGeom prst="rect">
             <a:avLst/>
@@ -15762,7 +15486,7 @@
                 <a:ea typeface="Trebuchet MS" pitchFamily="34" charset="-122"/>
                 <a:cs typeface="Trebuchet MS" pitchFamily="34" charset="-120"/>
               </a:rPr>
-              <a:t>fort</a:t>
+              <a:t>ished</a:t>
             </a:r>
             <a:endParaRPr lang="en-US" sz="1400" dirty="0"/>
           </a:p>
@@ -15770,162 +15494,243 @@
       </p:sp>
       <p:sp>
         <p:nvSpPr>
-          <p:cNvPr id="36" name="Text 34"/>
-          <p:cNvSpPr/>
-          <p:nvPr/>
-        </p:nvSpPr>
-        <p:spPr>
-          <a:xfrm>
-            <a:off x="5806440" y="3364992"/>
-            <a:ext cx="76200" cy="475488"/>
-          </a:xfrm>
-          <a:prstGeom prst="rect">
-            <a:avLst/>
-          </a:prstGeom>
-          <a:noFill/>
-          <a:ln/>
-        </p:spPr>
-        <p:txBody>
-          <a:bodyPr wrap="square" lIns="0" tIns="0" rIns="0" bIns="0" rtlCol="0" anchor="ctr"/>
-          <a:lstStyle/>
-          <a:p>
-            <a:pPr algn="ctr" indent="0" marL="0">
-              <a:buNone/>
-            </a:pPr>
-            <a:r>
-              <a:rPr lang="en-US" sz="1600" b="1" dirty="0">
-                <a:solidFill>
-                  <a:srgbClr val="0D9488"/>
+          <p:cNvPr id="36" name="Shape 34"/>
+          <p:cNvSpPr/>
+          <p:nvPr/>
+        </p:nvSpPr>
+        <p:spPr>
+          <a:xfrm>
+            <a:off x="365760" y="4096512"/>
+            <a:ext cx="1371600" cy="804672"/>
+          </a:xfrm>
+          <a:prstGeom prst="rect">
+            <a:avLst>
+              <a:gd name="adj" fmla="val 6818"/>
+            </a:avLst>
+          </a:prstGeom>
+          <a:solidFill>
+            <a:srgbClr val="E2E8F0"/>
+          </a:solidFill>
+          <a:ln w="12700">
+            <a:solidFill>
+              <a:srgbClr val="E2E8F0"/>
+            </a:solidFill>
+            <a:prstDash val="solid"/>
+          </a:ln>
+        </p:spPr>
+      </p:sp>
+      <p:sp>
+        <p:nvSpPr>
+          <p:cNvPr id="37" name="Text 35"/>
+          <p:cNvSpPr/>
+          <p:nvPr/>
+        </p:nvSpPr>
+        <p:spPr>
+          <a:xfrm>
+            <a:off x="365760" y="4096512"/>
+            <a:ext cx="1371600" cy="804672"/>
+          </a:xfrm>
+          <a:prstGeom prst="rect">
+            <a:avLst/>
+          </a:prstGeom>
+          <a:noFill/>
+          <a:ln/>
+        </p:spPr>
+        <p:txBody>
+          <a:bodyPr wrap="square" lIns="0" tIns="0" rIns="0" bIns="0" rtlCol="0" anchor="ctr"/>
+          <a:lstStyle/>
+          <a:p>
+            <a:pPr algn="ctr" indent="0" marL="0">
+              <a:buNone/>
+            </a:pPr>
+            <a:r>
+              <a:rPr lang="en-US" sz="1100" b="1" dirty="0">
+                <a:solidFill>
+                  <a:srgbClr val="475569"/>
                 </a:solidFill>
                 <a:latin typeface="Trebuchet MS" pitchFamily="34" charset="0"/>
                 <a:ea typeface="Trebuchet MS" pitchFamily="34" charset="-122"/>
                 <a:cs typeface="Trebuchet MS" pitchFamily="34" charset="-120"/>
               </a:rPr>
-              <a:t>·</a:t>
-            </a:r>
-            <a:endParaRPr lang="en-US" sz="1600" dirty="0"/>
-          </a:p>
-        </p:txBody>
-      </p:sp>
-      <p:sp>
-        <p:nvSpPr>
-          <p:cNvPr id="37" name="Shape 35"/>
-          <p:cNvSpPr/>
-          <p:nvPr/>
-        </p:nvSpPr>
-        <p:spPr>
-          <a:xfrm>
-            <a:off x="5882640" y="3364992"/>
-            <a:ext cx="1225296" cy="475488"/>
+              <a:t>Phonemes</a:t>
+            </a:r>
+            <a:endParaRPr lang="en-US" sz="1100" dirty="0"/>
+          </a:p>
+        </p:txBody>
+      </p:sp>
+      <p:sp>
+        <p:nvSpPr>
+          <p:cNvPr id="38" name="Shape 36"/>
+          <p:cNvSpPr/>
+          <p:nvPr/>
+        </p:nvSpPr>
+        <p:spPr>
+          <a:xfrm>
+            <a:off x="1874520" y="4096512"/>
+            <a:ext cx="6903720" cy="658368"/>
           </a:xfrm>
           <a:prstGeom prst="rect">
             <a:avLst>
-              <a:gd name="adj" fmla="val 9615"/>
+              <a:gd name="adj" fmla="val 8333"/>
             </a:avLst>
           </a:prstGeom>
           <a:solidFill>
+            <a:srgbClr val="FCE7F3"/>
+          </a:solidFill>
+          <a:ln w="12700">
+            <a:solidFill>
+              <a:srgbClr val="DB2777"/>
+            </a:solidFill>
+            <a:prstDash val="solid"/>
+          </a:ln>
+        </p:spPr>
+      </p:sp>
+      <p:sp>
+        <p:nvSpPr>
+          <p:cNvPr id="39" name="Shape 37"/>
+          <p:cNvSpPr/>
+          <p:nvPr/>
+        </p:nvSpPr>
+        <p:spPr>
+          <a:xfrm>
+            <a:off x="1951330" y="4169664"/>
+            <a:ext cx="676656" cy="475488"/>
+          </a:xfrm>
+          <a:prstGeom prst="rect">
+            <a:avLst>
+              <a:gd name="adj" fmla="val 7692"/>
+            </a:avLst>
+          </a:prstGeom>
+          <a:solidFill>
             <a:srgbClr val="FFFFFF"/>
           </a:solidFill>
           <a:ln w="12700">
             <a:solidFill>
-              <a:srgbClr val="0D9488"/>
-            </a:solidFill>
-            <a:prstDash val="solid"/>
-          </a:ln>
-        </p:spPr>
-      </p:sp>
-      <p:sp>
-        <p:nvSpPr>
-          <p:cNvPr id="38" name="Text 36"/>
-          <p:cNvSpPr/>
-          <p:nvPr/>
-        </p:nvSpPr>
-        <p:spPr>
-          <a:xfrm>
-            <a:off x="5882640" y="3364992"/>
-            <a:ext cx="1225296" cy="475488"/>
-          </a:xfrm>
-          <a:prstGeom prst="rect">
-            <a:avLst/>
-          </a:prstGeom>
-          <a:noFill/>
-          <a:ln/>
-        </p:spPr>
-        <p:txBody>
-          <a:bodyPr wrap="square" lIns="0" tIns="0" rIns="0" bIns="0" rtlCol="0" anchor="ctr"/>
-          <a:lstStyle/>
-          <a:p>
-            <a:pPr algn="ctr" indent="0" marL="0">
-              <a:buNone/>
-            </a:pPr>
-            <a:r>
-              <a:rPr lang="en-US" sz="1400" b="1" dirty="0">
-                <a:solidFill>
-                  <a:srgbClr val="0D9488"/>
+              <a:srgbClr val="DB2777"/>
+            </a:solidFill>
+            <a:prstDash val="solid"/>
+          </a:ln>
+        </p:spPr>
+      </p:sp>
+      <p:sp>
+        <p:nvSpPr>
+          <p:cNvPr id="40" name="Text 38"/>
+          <p:cNvSpPr/>
+          <p:nvPr/>
+        </p:nvSpPr>
+        <p:spPr>
+          <a:xfrm>
+            <a:off x="1951330" y="4169664"/>
+            <a:ext cx="676656" cy="475488"/>
+          </a:xfrm>
+          <a:prstGeom prst="rect">
+            <a:avLst/>
+          </a:prstGeom>
+          <a:noFill/>
+          <a:ln/>
+        </p:spPr>
+        <p:txBody>
+          <a:bodyPr wrap="square" lIns="0" tIns="0" rIns="0" bIns="0" rtlCol="0" anchor="ctr"/>
+          <a:lstStyle/>
+          <a:p>
+            <a:pPr algn="ctr" indent="0" marL="0">
+              <a:buNone/>
+            </a:pPr>
+            <a:r>
+              <a:rPr lang="en-US" sz="900" b="1" dirty="0">
+                <a:solidFill>
+                  <a:srgbClr val="9D174D"/>
                 </a:solidFill>
                 <a:latin typeface="Trebuchet MS" pitchFamily="34" charset="0"/>
                 <a:ea typeface="Trebuchet MS" pitchFamily="34" charset="-122"/>
                 <a:cs typeface="Trebuchet MS" pitchFamily="34" charset="-120"/>
               </a:rPr>
-              <a:t>a</a:t>
-            </a:r>
-            <a:endParaRPr lang="en-US" sz="1400" dirty="0"/>
-          </a:p>
-        </p:txBody>
-      </p:sp>
-      <p:sp>
-        <p:nvSpPr>
-          <p:cNvPr id="39" name="Text 37"/>
-          <p:cNvSpPr/>
-          <p:nvPr/>
-        </p:nvSpPr>
-        <p:spPr>
-          <a:xfrm>
-            <a:off x="7107936" y="3364992"/>
-            <a:ext cx="76200" cy="475488"/>
-          </a:xfrm>
-          <a:prstGeom prst="rect">
-            <a:avLst/>
-          </a:prstGeom>
-          <a:noFill/>
-          <a:ln/>
-        </p:spPr>
-        <p:txBody>
-          <a:bodyPr wrap="square" lIns="0" tIns="0" rIns="0" bIns="0" rtlCol="0" anchor="ctr"/>
-          <a:lstStyle/>
-          <a:p>
-            <a:pPr algn="ctr" indent="0" marL="0">
-              <a:buNone/>
-            </a:pPr>
-            <a:r>
-              <a:rPr lang="en-US" sz="1600" b="1" dirty="0">
-                <a:solidFill>
-                  <a:srgbClr val="0D9488"/>
+              <a:t>u</a:t>
+            </a:r>
+            <a:endParaRPr lang="en-US" sz="900" dirty="0"/>
+          </a:p>
+        </p:txBody>
+      </p:sp>
+      <p:sp>
+        <p:nvSpPr>
+          <p:cNvPr id="41" name="Shape 39"/>
+          <p:cNvSpPr/>
+          <p:nvPr/>
+        </p:nvSpPr>
+        <p:spPr>
+          <a:xfrm>
+            <a:off x="2677363" y="4169664"/>
+            <a:ext cx="676656" cy="475488"/>
+          </a:xfrm>
+          <a:prstGeom prst="rect">
+            <a:avLst>
+              <a:gd name="adj" fmla="val 7692"/>
+            </a:avLst>
+          </a:prstGeom>
+          <a:solidFill>
+            <a:srgbClr val="FFFFFF"/>
+          </a:solidFill>
+          <a:ln w="12700">
+            <a:solidFill>
+              <a:srgbClr val="DB2777"/>
+            </a:solidFill>
+            <a:prstDash val="solid"/>
+          </a:ln>
+        </p:spPr>
+      </p:sp>
+      <p:sp>
+        <p:nvSpPr>
+          <p:cNvPr id="42" name="Text 40"/>
+          <p:cNvSpPr/>
+          <p:nvPr/>
+        </p:nvSpPr>
+        <p:spPr>
+          <a:xfrm>
+            <a:off x="2677363" y="4169664"/>
+            <a:ext cx="676656" cy="475488"/>
+          </a:xfrm>
+          <a:prstGeom prst="rect">
+            <a:avLst/>
+          </a:prstGeom>
+          <a:noFill/>
+          <a:ln/>
+        </p:spPr>
+        <p:txBody>
+          <a:bodyPr wrap="square" lIns="0" tIns="0" rIns="0" bIns="0" rtlCol="0" anchor="ctr"/>
+          <a:lstStyle/>
+          <a:p>
+            <a:pPr algn="ctr" indent="0" marL="0">
+              <a:buNone/>
+            </a:pPr>
+            <a:r>
+              <a:rPr lang="en-US" sz="900" b="1" dirty="0">
+                <a:solidFill>
+                  <a:srgbClr val="9D174D"/>
                 </a:solidFill>
                 <a:latin typeface="Trebuchet MS" pitchFamily="34" charset="0"/>
                 <a:ea typeface="Trebuchet MS" pitchFamily="34" charset="-122"/>
                 <a:cs typeface="Trebuchet MS" pitchFamily="34" charset="-120"/>
               </a:rPr>
-              <a:t>·</a:t>
-            </a:r>
-            <a:endParaRPr lang="en-US" sz="1600" dirty="0"/>
-          </a:p>
-        </p:txBody>
-      </p:sp>
-      <p:sp>
-        <p:nvSpPr>
-          <p:cNvPr id="40" name="Shape 38"/>
-          <p:cNvSpPr/>
-          <p:nvPr/>
-        </p:nvSpPr>
-        <p:spPr>
-          <a:xfrm>
-            <a:off x="7184136" y="3364992"/>
-            <a:ext cx="1225296" cy="475488"/>
+              <a:t>n</a:t>
+            </a:r>
+            <a:endParaRPr lang="en-US" sz="900" dirty="0"/>
+          </a:p>
+        </p:txBody>
+      </p:sp>
+      <p:sp>
+        <p:nvSpPr>
+          <p:cNvPr id="43" name="Shape 41"/>
+          <p:cNvSpPr/>
+          <p:nvPr/>
+        </p:nvSpPr>
+        <p:spPr>
+          <a:xfrm>
+            <a:off x="3403397" y="4169664"/>
+            <a:ext cx="676656" cy="475488"/>
           </a:xfrm>
           <a:prstGeom prst="rect">
             <a:avLst>
-              <a:gd name="adj" fmla="val 9615"/>
+              <a:gd name="adj" fmla="val 7692"/>
             </a:avLst>
           </a:prstGeom>
           <a:solidFill>
@@ -15933,154 +15738,127 @@
           </a:solidFill>
           <a:ln w="12700">
             <a:solidFill>
-              <a:srgbClr val="0D9488"/>
-            </a:solidFill>
-            <a:prstDash val="solid"/>
-          </a:ln>
-        </p:spPr>
-      </p:sp>
-      <p:sp>
-        <p:nvSpPr>
-          <p:cNvPr id="41" name="Text 39"/>
-          <p:cNvSpPr/>
-          <p:nvPr/>
-        </p:nvSpPr>
-        <p:spPr>
-          <a:xfrm>
-            <a:off x="7184136" y="3364992"/>
-            <a:ext cx="1225296" cy="475488"/>
-          </a:xfrm>
-          <a:prstGeom prst="rect">
-            <a:avLst/>
-          </a:prstGeom>
-          <a:noFill/>
-          <a:ln/>
-        </p:spPr>
-        <p:txBody>
-          <a:bodyPr wrap="square" lIns="0" tIns="0" rIns="0" bIns="0" rtlCol="0" anchor="ctr"/>
-          <a:lstStyle/>
-          <a:p>
-            <a:pPr algn="ctr" indent="0" marL="0">
-              <a:buNone/>
-            </a:pPr>
-            <a:r>
-              <a:rPr lang="en-US" sz="1400" b="1" dirty="0">
-                <a:solidFill>
-                  <a:srgbClr val="0D9488"/>
+              <a:srgbClr val="DB2777"/>
+            </a:solidFill>
+            <a:prstDash val="solid"/>
+          </a:ln>
+        </p:spPr>
+      </p:sp>
+      <p:sp>
+        <p:nvSpPr>
+          <p:cNvPr id="44" name="Text 42"/>
+          <p:cNvSpPr/>
+          <p:nvPr/>
+        </p:nvSpPr>
+        <p:spPr>
+          <a:xfrm>
+            <a:off x="3403397" y="4169664"/>
+            <a:ext cx="676656" cy="475488"/>
+          </a:xfrm>
+          <a:prstGeom prst="rect">
+            <a:avLst/>
+          </a:prstGeom>
+          <a:noFill/>
+          <a:ln/>
+        </p:spPr>
+        <p:txBody>
+          <a:bodyPr wrap="square" lIns="0" tIns="0" rIns="0" bIns="0" rtlCol="0" anchor="ctr"/>
+          <a:lstStyle/>
+          <a:p>
+            <a:pPr algn="ctr" indent="0" marL="0">
+              <a:buNone/>
+            </a:pPr>
+            <a:r>
+              <a:rPr lang="en-US" sz="900" b="1" dirty="0">
+                <a:solidFill>
+                  <a:srgbClr val="9D174D"/>
                 </a:solidFill>
                 <a:latin typeface="Trebuchet MS" pitchFamily="34" charset="0"/>
                 <a:ea typeface="Trebuchet MS" pitchFamily="34" charset="-122"/>
                 <a:cs typeface="Trebuchet MS" pitchFamily="34" charset="-120"/>
               </a:rPr>
-              <a:t>ble</a:t>
-            </a:r>
-            <a:endParaRPr lang="en-US" sz="1400" dirty="0"/>
-          </a:p>
-        </p:txBody>
-      </p:sp>
-      <p:sp>
-        <p:nvSpPr>
-          <p:cNvPr id="42" name="Shape 40"/>
-          <p:cNvSpPr/>
-          <p:nvPr/>
-        </p:nvSpPr>
-        <p:spPr>
-          <a:xfrm>
-            <a:off x="365760" y="4096512"/>
-            <a:ext cx="1371600" cy="804672"/>
+              <a:t>f</a:t>
+            </a:r>
+            <a:endParaRPr lang="en-US" sz="900" dirty="0"/>
+          </a:p>
+        </p:txBody>
+      </p:sp>
+      <p:sp>
+        <p:nvSpPr>
+          <p:cNvPr id="45" name="Shape 43"/>
+          <p:cNvSpPr/>
+          <p:nvPr/>
+        </p:nvSpPr>
+        <p:spPr>
+          <a:xfrm>
+            <a:off x="4129430" y="4169664"/>
+            <a:ext cx="676656" cy="475488"/>
           </a:xfrm>
           <a:prstGeom prst="rect">
             <a:avLst>
-              <a:gd name="adj" fmla="val 6818"/>
+              <a:gd name="adj" fmla="val 7692"/>
             </a:avLst>
           </a:prstGeom>
           <a:solidFill>
-            <a:srgbClr val="E2E8F0"/>
-          </a:solidFill>
-          <a:ln w="12700">
-            <a:solidFill>
-              <a:srgbClr val="E2E8F0"/>
-            </a:solidFill>
-            <a:prstDash val="solid"/>
-          </a:ln>
-        </p:spPr>
-      </p:sp>
-      <p:sp>
-        <p:nvSpPr>
-          <p:cNvPr id="43" name="Text 41"/>
-          <p:cNvSpPr/>
-          <p:nvPr/>
-        </p:nvSpPr>
-        <p:spPr>
-          <a:xfrm>
-            <a:off x="365760" y="4096512"/>
-            <a:ext cx="1371600" cy="804672"/>
-          </a:xfrm>
-          <a:prstGeom prst="rect">
-            <a:avLst/>
-          </a:prstGeom>
-          <a:noFill/>
-          <a:ln/>
-        </p:spPr>
-        <p:txBody>
-          <a:bodyPr wrap="square" lIns="0" tIns="0" rIns="0" bIns="0" rtlCol="0" anchor="ctr"/>
-          <a:lstStyle/>
-          <a:p>
-            <a:pPr algn="ctr" indent="0" marL="0">
-              <a:buNone/>
-            </a:pPr>
-            <a:r>
-              <a:rPr lang="en-US" sz="1100" b="1" dirty="0">
-                <a:solidFill>
-                  <a:srgbClr val="475569"/>
+            <a:srgbClr val="FFFFFF"/>
+          </a:solidFill>
+          <a:ln w="12700">
+            <a:solidFill>
+              <a:srgbClr val="DB2777"/>
+            </a:solidFill>
+            <a:prstDash val="solid"/>
+          </a:ln>
+        </p:spPr>
+      </p:sp>
+      <p:sp>
+        <p:nvSpPr>
+          <p:cNvPr id="46" name="Text 44"/>
+          <p:cNvSpPr/>
+          <p:nvPr/>
+        </p:nvSpPr>
+        <p:spPr>
+          <a:xfrm>
+            <a:off x="4129430" y="4169664"/>
+            <a:ext cx="676656" cy="475488"/>
+          </a:xfrm>
+          <a:prstGeom prst="rect">
+            <a:avLst/>
+          </a:prstGeom>
+          <a:noFill/>
+          <a:ln/>
+        </p:spPr>
+        <p:txBody>
+          <a:bodyPr wrap="square" lIns="0" tIns="0" rIns="0" bIns="0" rtlCol="0" anchor="ctr"/>
+          <a:lstStyle/>
+          <a:p>
+            <a:pPr algn="ctr" indent="0" marL="0">
+              <a:buNone/>
+            </a:pPr>
+            <a:r>
+              <a:rPr lang="en-US" sz="900" b="1" dirty="0">
+                <a:solidFill>
+                  <a:srgbClr val="9D174D"/>
                 </a:solidFill>
                 <a:latin typeface="Trebuchet MS" pitchFamily="34" charset="0"/>
                 <a:ea typeface="Trebuchet MS" pitchFamily="34" charset="-122"/>
                 <a:cs typeface="Trebuchet MS" pitchFamily="34" charset="-120"/>
               </a:rPr>
-              <a:t>Phonemes</a:t>
-            </a:r>
-            <a:endParaRPr lang="en-US" sz="1100" dirty="0"/>
-          </a:p>
-        </p:txBody>
-      </p:sp>
-      <p:sp>
-        <p:nvSpPr>
-          <p:cNvPr id="44" name="Shape 42"/>
-          <p:cNvSpPr/>
-          <p:nvPr/>
-        </p:nvSpPr>
-        <p:spPr>
-          <a:xfrm>
-            <a:off x="1874520" y="4096512"/>
-            <a:ext cx="6903720" cy="658368"/>
-          </a:xfrm>
-          <a:prstGeom prst="rect">
-            <a:avLst>
-              <a:gd name="adj" fmla="val 8333"/>
-            </a:avLst>
-          </a:prstGeom>
-          <a:solidFill>
-            <a:srgbClr val="FCE7F3"/>
-          </a:solidFill>
-          <a:ln w="12700">
-            <a:solidFill>
-              <a:srgbClr val="DB2777"/>
-            </a:solidFill>
-            <a:prstDash val="solid"/>
-          </a:ln>
-        </p:spPr>
-      </p:sp>
-      <p:sp>
-        <p:nvSpPr>
-          <p:cNvPr id="45" name="Shape 43"/>
-          <p:cNvSpPr/>
-          <p:nvPr/>
-        </p:nvSpPr>
-        <p:spPr>
-          <a:xfrm>
-            <a:off x="1952244" y="4169664"/>
-            <a:ext cx="543652" cy="475488"/>
+              <a:t>i</a:t>
+            </a:r>
+            <a:endParaRPr lang="en-US" sz="900" dirty="0"/>
+          </a:p>
+        </p:txBody>
+      </p:sp>
+      <p:sp>
+        <p:nvSpPr>
+          <p:cNvPr id="47" name="Shape 45"/>
+          <p:cNvSpPr/>
+          <p:nvPr/>
+        </p:nvSpPr>
+        <p:spPr>
+          <a:xfrm>
+            <a:off x="4855464" y="4169664"/>
+            <a:ext cx="676656" cy="475488"/>
           </a:xfrm>
           <a:prstGeom prst="rect">
             <a:avLst>
@@ -16100,14 +15878,14 @@
       </p:sp>
       <p:sp>
         <p:nvSpPr>
-          <p:cNvPr id="46" name="Text 44"/>
-          <p:cNvSpPr/>
-          <p:nvPr/>
-        </p:nvSpPr>
-        <p:spPr>
-          <a:xfrm>
-            <a:off x="1952244" y="4169664"/>
-            <a:ext cx="543652" cy="475488"/>
+          <p:cNvPr id="48" name="Text 46"/>
+          <p:cNvSpPr/>
+          <p:nvPr/>
+        </p:nvSpPr>
+        <p:spPr>
+          <a:xfrm>
+            <a:off x="4855464" y="4169664"/>
+            <a:ext cx="676656" cy="475488"/>
           </a:xfrm>
           <a:prstGeom prst="rect">
             <a:avLst/>
@@ -16131,7 +15909,7 @@
                 <a:ea typeface="Trebuchet MS" pitchFamily="34" charset="-122"/>
                 <a:cs typeface="Trebuchet MS" pitchFamily="34" charset="-120"/>
               </a:rPr>
-              <a:t>u</a:t>
+              <a:t>n</a:t>
             </a:r>
             <a:endParaRPr lang="en-US" sz="900" dirty="0"/>
           </a:p>
@@ -16139,14 +15917,14 @@
       </p:sp>
       <p:sp>
         <p:nvSpPr>
-          <p:cNvPr id="47" name="Shape 45"/>
-          <p:cNvSpPr/>
-          <p:nvPr/>
-        </p:nvSpPr>
-        <p:spPr>
-          <a:xfrm>
-            <a:off x="2546188" y="4169664"/>
-            <a:ext cx="543652" cy="475488"/>
+          <p:cNvPr id="49" name="Shape 47"/>
+          <p:cNvSpPr/>
+          <p:nvPr/>
+        </p:nvSpPr>
+        <p:spPr>
+          <a:xfrm>
+            <a:off x="5581498" y="4169664"/>
+            <a:ext cx="676656" cy="475488"/>
           </a:xfrm>
           <a:prstGeom prst="rect">
             <a:avLst>
@@ -16166,14 +15944,14 @@
       </p:sp>
       <p:sp>
         <p:nvSpPr>
-          <p:cNvPr id="48" name="Text 46"/>
-          <p:cNvSpPr/>
-          <p:nvPr/>
-        </p:nvSpPr>
-        <p:spPr>
-          <a:xfrm>
-            <a:off x="2546188" y="4169664"/>
-            <a:ext cx="543652" cy="475488"/>
+          <p:cNvPr id="50" name="Text 48"/>
+          <p:cNvSpPr/>
+          <p:nvPr/>
+        </p:nvSpPr>
+        <p:spPr>
+          <a:xfrm>
+            <a:off x="5581498" y="4169664"/>
+            <a:ext cx="676656" cy="475488"/>
           </a:xfrm>
           <a:prstGeom prst="rect">
             <a:avLst/>
@@ -16197,7 +15975,7 @@
                 <a:ea typeface="Trebuchet MS" pitchFamily="34" charset="-122"/>
                 <a:cs typeface="Trebuchet MS" pitchFamily="34" charset="-120"/>
               </a:rPr>
-              <a:t>n</a:t>
+              <a:t>i</a:t>
             </a:r>
             <a:endParaRPr lang="en-US" sz="900" dirty="0"/>
           </a:p>
@@ -16205,14 +15983,14 @@
       </p:sp>
       <p:sp>
         <p:nvSpPr>
-          <p:cNvPr id="49" name="Shape 47"/>
-          <p:cNvSpPr/>
-          <p:nvPr/>
-        </p:nvSpPr>
-        <p:spPr>
-          <a:xfrm>
-            <a:off x="3140133" y="4169664"/>
-            <a:ext cx="543652" cy="475488"/>
+          <p:cNvPr id="51" name="Shape 49"/>
+          <p:cNvSpPr/>
+          <p:nvPr/>
+        </p:nvSpPr>
+        <p:spPr>
+          <a:xfrm>
+            <a:off x="6307531" y="4169664"/>
+            <a:ext cx="676656" cy="475488"/>
           </a:xfrm>
           <a:prstGeom prst="rect">
             <a:avLst>
@@ -16232,14 +16010,14 @@
       </p:sp>
       <p:sp>
         <p:nvSpPr>
-          <p:cNvPr id="50" name="Text 48"/>
-          <p:cNvSpPr/>
-          <p:nvPr/>
-        </p:nvSpPr>
-        <p:spPr>
-          <a:xfrm>
-            <a:off x="3140133" y="4169664"/>
-            <a:ext cx="543652" cy="475488"/>
+          <p:cNvPr id="52" name="Text 50"/>
+          <p:cNvSpPr/>
+          <p:nvPr/>
+        </p:nvSpPr>
+        <p:spPr>
+          <a:xfrm>
+            <a:off x="6307531" y="4169664"/>
+            <a:ext cx="676656" cy="475488"/>
           </a:xfrm>
           <a:prstGeom prst="rect">
             <a:avLst/>
@@ -16263,7 +16041,7 @@
                 <a:ea typeface="Trebuchet MS" pitchFamily="34" charset="-122"/>
                 <a:cs typeface="Trebuchet MS" pitchFamily="34" charset="-120"/>
               </a:rPr>
-              <a:t>c</a:t>
+              <a:t>sh</a:t>
             </a:r>
             <a:endParaRPr lang="en-US" sz="900" dirty="0"/>
           </a:p>
@@ -16271,14 +16049,14 @@
       </p:sp>
       <p:sp>
         <p:nvSpPr>
-          <p:cNvPr id="51" name="Shape 49"/>
-          <p:cNvSpPr/>
-          <p:nvPr/>
-        </p:nvSpPr>
-        <p:spPr>
-          <a:xfrm>
-            <a:off x="3734077" y="4169664"/>
-            <a:ext cx="543652" cy="475488"/>
+          <p:cNvPr id="53" name="Shape 51"/>
+          <p:cNvSpPr/>
+          <p:nvPr/>
+        </p:nvSpPr>
+        <p:spPr>
+          <a:xfrm>
+            <a:off x="7033565" y="4169664"/>
+            <a:ext cx="676656" cy="475488"/>
           </a:xfrm>
           <a:prstGeom prst="rect">
             <a:avLst>
@@ -16298,14 +16076,14 @@
       </p:sp>
       <p:sp>
         <p:nvSpPr>
-          <p:cNvPr id="52" name="Text 50"/>
-          <p:cNvSpPr/>
-          <p:nvPr/>
-        </p:nvSpPr>
-        <p:spPr>
-          <a:xfrm>
-            <a:off x="3734077" y="4169664"/>
-            <a:ext cx="543652" cy="475488"/>
+          <p:cNvPr id="54" name="Text 52"/>
+          <p:cNvSpPr/>
+          <p:nvPr/>
+        </p:nvSpPr>
+        <p:spPr>
+          <a:xfrm>
+            <a:off x="7033565" y="4169664"/>
+            <a:ext cx="676656" cy="475488"/>
           </a:xfrm>
           <a:prstGeom prst="rect">
             <a:avLst/>
@@ -16329,7 +16107,7 @@
                 <a:ea typeface="Trebuchet MS" pitchFamily="34" charset="-122"/>
                 <a:cs typeface="Trebuchet MS" pitchFamily="34" charset="-120"/>
               </a:rPr>
-              <a:t>o</a:t>
+              <a:t>e</a:t>
             </a:r>
             <a:endParaRPr lang="en-US" sz="900" dirty="0"/>
           </a:p>
@@ -16337,14 +16115,14 @@
       </p:sp>
       <p:sp>
         <p:nvSpPr>
-          <p:cNvPr id="53" name="Shape 51"/>
-          <p:cNvSpPr/>
-          <p:nvPr/>
-        </p:nvSpPr>
-        <p:spPr>
-          <a:xfrm>
-            <a:off x="4328021" y="4169664"/>
-            <a:ext cx="543652" cy="475488"/>
+          <p:cNvPr id="55" name="Shape 53"/>
+          <p:cNvSpPr/>
+          <p:nvPr/>
+        </p:nvSpPr>
+        <p:spPr>
+          <a:xfrm>
+            <a:off x="7759598" y="4169664"/>
+            <a:ext cx="676656" cy="475488"/>
           </a:xfrm>
           <a:prstGeom prst="rect">
             <a:avLst>
@@ -16364,14 +16142,14 @@
       </p:sp>
       <p:sp>
         <p:nvSpPr>
-          <p:cNvPr id="54" name="Text 52"/>
-          <p:cNvSpPr/>
-          <p:nvPr/>
-        </p:nvSpPr>
-        <p:spPr>
-          <a:xfrm>
-            <a:off x="4328021" y="4169664"/>
-            <a:ext cx="543652" cy="475488"/>
+          <p:cNvPr id="56" name="Text 54"/>
+          <p:cNvSpPr/>
+          <p:nvPr/>
+        </p:nvSpPr>
+        <p:spPr>
+          <a:xfrm>
+            <a:off x="7759598" y="4169664"/>
+            <a:ext cx="676656" cy="475488"/>
           </a:xfrm>
           <a:prstGeom prst="rect">
             <a:avLst/>
@@ -16395,403 +16173,7 @@
                 <a:ea typeface="Trebuchet MS" pitchFamily="34" charset="-122"/>
                 <a:cs typeface="Trebuchet MS" pitchFamily="34" charset="-120"/>
               </a:rPr>
-              <a:t>m</a:t>
-            </a:r>
-            <a:endParaRPr lang="en-US" sz="900" dirty="0"/>
-          </a:p>
-        </p:txBody>
-      </p:sp>
-      <p:sp>
-        <p:nvSpPr>
-          <p:cNvPr id="55" name="Shape 53"/>
-          <p:cNvSpPr/>
-          <p:nvPr/>
-        </p:nvSpPr>
-        <p:spPr>
-          <a:xfrm>
-            <a:off x="4921966" y="4169664"/>
-            <a:ext cx="543652" cy="475488"/>
-          </a:xfrm>
-          <a:prstGeom prst="rect">
-            <a:avLst>
-              <a:gd name="adj" fmla="val 7692"/>
-            </a:avLst>
-          </a:prstGeom>
-          <a:solidFill>
-            <a:srgbClr val="FFFFFF"/>
-          </a:solidFill>
-          <a:ln w="12700">
-            <a:solidFill>
-              <a:srgbClr val="DB2777"/>
-            </a:solidFill>
-            <a:prstDash val="solid"/>
-          </a:ln>
-        </p:spPr>
-      </p:sp>
-      <p:sp>
-        <p:nvSpPr>
-          <p:cNvPr id="56" name="Text 54"/>
-          <p:cNvSpPr/>
-          <p:nvPr/>
-        </p:nvSpPr>
-        <p:spPr>
-          <a:xfrm>
-            <a:off x="4921966" y="4169664"/>
-            <a:ext cx="543652" cy="475488"/>
-          </a:xfrm>
-          <a:prstGeom prst="rect">
-            <a:avLst/>
-          </a:prstGeom>
-          <a:noFill/>
-          <a:ln/>
-        </p:spPr>
-        <p:txBody>
-          <a:bodyPr wrap="square" lIns="0" tIns="0" rIns="0" bIns="0" rtlCol="0" anchor="ctr"/>
-          <a:lstStyle/>
-          <a:p>
-            <a:pPr algn="ctr" indent="0" marL="0">
-              <a:buNone/>
-            </a:pPr>
-            <a:r>
-              <a:rPr lang="en-US" sz="900" b="1" dirty="0">
-                <a:solidFill>
-                  <a:srgbClr val="9D174D"/>
-                </a:solidFill>
-                <a:latin typeface="Trebuchet MS" pitchFamily="34" charset="0"/>
-                <a:ea typeface="Trebuchet MS" pitchFamily="34" charset="-122"/>
-                <a:cs typeface="Trebuchet MS" pitchFamily="34" charset="-120"/>
-              </a:rPr>
-              <a:t>f</a:t>
-            </a:r>
-            <a:endParaRPr lang="en-US" sz="900" dirty="0"/>
-          </a:p>
-        </p:txBody>
-      </p:sp>
-      <p:sp>
-        <p:nvSpPr>
-          <p:cNvPr id="57" name="Shape 55"/>
-          <p:cNvSpPr/>
-          <p:nvPr/>
-        </p:nvSpPr>
-        <p:spPr>
-          <a:xfrm>
-            <a:off x="5515910" y="4169664"/>
-            <a:ext cx="543652" cy="475488"/>
-          </a:xfrm>
-          <a:prstGeom prst="rect">
-            <a:avLst>
-              <a:gd name="adj" fmla="val 7692"/>
-            </a:avLst>
-          </a:prstGeom>
-          <a:solidFill>
-            <a:srgbClr val="FFFFFF"/>
-          </a:solidFill>
-          <a:ln w="12700">
-            <a:solidFill>
-              <a:srgbClr val="DB2777"/>
-            </a:solidFill>
-            <a:prstDash val="solid"/>
-          </a:ln>
-        </p:spPr>
-      </p:sp>
-      <p:sp>
-        <p:nvSpPr>
-          <p:cNvPr id="58" name="Text 56"/>
-          <p:cNvSpPr/>
-          <p:nvPr/>
-        </p:nvSpPr>
-        <p:spPr>
-          <a:xfrm>
-            <a:off x="5515910" y="4169664"/>
-            <a:ext cx="543652" cy="475488"/>
-          </a:xfrm>
-          <a:prstGeom prst="rect">
-            <a:avLst/>
-          </a:prstGeom>
-          <a:noFill/>
-          <a:ln/>
-        </p:spPr>
-        <p:txBody>
-          <a:bodyPr wrap="square" lIns="0" tIns="0" rIns="0" bIns="0" rtlCol="0" anchor="ctr"/>
-          <a:lstStyle/>
-          <a:p>
-            <a:pPr algn="ctr" indent="0" marL="0">
-              <a:buNone/>
-            </a:pPr>
-            <a:r>
-              <a:rPr lang="en-US" sz="900" b="1" dirty="0">
-                <a:solidFill>
-                  <a:srgbClr val="9D174D"/>
-                </a:solidFill>
-                <a:latin typeface="Trebuchet MS" pitchFamily="34" charset="0"/>
-                <a:ea typeface="Trebuchet MS" pitchFamily="34" charset="-122"/>
-                <a:cs typeface="Trebuchet MS" pitchFamily="34" charset="-120"/>
-              </a:rPr>
-              <a:t>or</a:t>
-            </a:r>
-            <a:endParaRPr lang="en-US" sz="900" dirty="0"/>
-          </a:p>
-        </p:txBody>
-      </p:sp>
-      <p:sp>
-        <p:nvSpPr>
-          <p:cNvPr id="59" name="Shape 57"/>
-          <p:cNvSpPr/>
-          <p:nvPr/>
-        </p:nvSpPr>
-        <p:spPr>
-          <a:xfrm>
-            <a:off x="6109855" y="4169664"/>
-            <a:ext cx="543652" cy="475488"/>
-          </a:xfrm>
-          <a:prstGeom prst="rect">
-            <a:avLst>
-              <a:gd name="adj" fmla="val 7692"/>
-            </a:avLst>
-          </a:prstGeom>
-          <a:solidFill>
-            <a:srgbClr val="FFFFFF"/>
-          </a:solidFill>
-          <a:ln w="12700">
-            <a:solidFill>
-              <a:srgbClr val="DB2777"/>
-            </a:solidFill>
-            <a:prstDash val="solid"/>
-          </a:ln>
-        </p:spPr>
-      </p:sp>
-      <p:sp>
-        <p:nvSpPr>
-          <p:cNvPr id="60" name="Text 58"/>
-          <p:cNvSpPr/>
-          <p:nvPr/>
-        </p:nvSpPr>
-        <p:spPr>
-          <a:xfrm>
-            <a:off x="6109855" y="4169664"/>
-            <a:ext cx="543652" cy="475488"/>
-          </a:xfrm>
-          <a:prstGeom prst="rect">
-            <a:avLst/>
-          </a:prstGeom>
-          <a:noFill/>
-          <a:ln/>
-        </p:spPr>
-        <p:txBody>
-          <a:bodyPr wrap="square" lIns="0" tIns="0" rIns="0" bIns="0" rtlCol="0" anchor="ctr"/>
-          <a:lstStyle/>
-          <a:p>
-            <a:pPr algn="ctr" indent="0" marL="0">
-              <a:buNone/>
-            </a:pPr>
-            <a:r>
-              <a:rPr lang="en-US" sz="900" b="1" dirty="0">
-                <a:solidFill>
-                  <a:srgbClr val="9D174D"/>
-                </a:solidFill>
-                <a:latin typeface="Trebuchet MS" pitchFamily="34" charset="0"/>
-                <a:ea typeface="Trebuchet MS" pitchFamily="34" charset="-122"/>
-                <a:cs typeface="Trebuchet MS" pitchFamily="34" charset="-120"/>
-              </a:rPr>
-              <a:t>t</a:t>
-            </a:r>
-            <a:endParaRPr lang="en-US" sz="900" dirty="0"/>
-          </a:p>
-        </p:txBody>
-      </p:sp>
-      <p:sp>
-        <p:nvSpPr>
-          <p:cNvPr id="61" name="Shape 59"/>
-          <p:cNvSpPr/>
-          <p:nvPr/>
-        </p:nvSpPr>
-        <p:spPr>
-          <a:xfrm>
-            <a:off x="6703799" y="4169664"/>
-            <a:ext cx="543652" cy="475488"/>
-          </a:xfrm>
-          <a:prstGeom prst="rect">
-            <a:avLst>
-              <a:gd name="adj" fmla="val 7692"/>
-            </a:avLst>
-          </a:prstGeom>
-          <a:solidFill>
-            <a:srgbClr val="FFFFFF"/>
-          </a:solidFill>
-          <a:ln w="12700">
-            <a:solidFill>
-              <a:srgbClr val="DB2777"/>
-            </a:solidFill>
-            <a:prstDash val="solid"/>
-          </a:ln>
-        </p:spPr>
-      </p:sp>
-      <p:sp>
-        <p:nvSpPr>
-          <p:cNvPr id="62" name="Text 60"/>
-          <p:cNvSpPr/>
-          <p:nvPr/>
-        </p:nvSpPr>
-        <p:spPr>
-          <a:xfrm>
-            <a:off x="6703799" y="4169664"/>
-            <a:ext cx="543652" cy="475488"/>
-          </a:xfrm>
-          <a:prstGeom prst="rect">
-            <a:avLst/>
-          </a:prstGeom>
-          <a:noFill/>
-          <a:ln/>
-        </p:spPr>
-        <p:txBody>
-          <a:bodyPr wrap="square" lIns="0" tIns="0" rIns="0" bIns="0" rtlCol="0" anchor="ctr"/>
-          <a:lstStyle/>
-          <a:p>
-            <a:pPr algn="ctr" indent="0" marL="0">
-              <a:buNone/>
-            </a:pPr>
-            <a:r>
-              <a:rPr lang="en-US" sz="900" b="1" dirty="0">
-                <a:solidFill>
-                  <a:srgbClr val="9D174D"/>
-                </a:solidFill>
-                <a:latin typeface="Trebuchet MS" pitchFamily="34" charset="0"/>
-                <a:ea typeface="Trebuchet MS" pitchFamily="34" charset="-122"/>
-                <a:cs typeface="Trebuchet MS" pitchFamily="34" charset="-120"/>
-              </a:rPr>
-              <a:t>a</a:t>
-            </a:r>
-            <a:endParaRPr lang="en-US" sz="900" dirty="0"/>
-          </a:p>
-        </p:txBody>
-      </p:sp>
-      <p:sp>
-        <p:nvSpPr>
-          <p:cNvPr id="63" name="Shape 61"/>
-          <p:cNvSpPr/>
-          <p:nvPr/>
-        </p:nvSpPr>
-        <p:spPr>
-          <a:xfrm>
-            <a:off x="7297743" y="4169664"/>
-            <a:ext cx="543652" cy="475488"/>
-          </a:xfrm>
-          <a:prstGeom prst="rect">
-            <a:avLst>
-              <a:gd name="adj" fmla="val 7692"/>
-            </a:avLst>
-          </a:prstGeom>
-          <a:solidFill>
-            <a:srgbClr val="FFFFFF"/>
-          </a:solidFill>
-          <a:ln w="12700">
-            <a:solidFill>
-              <a:srgbClr val="DB2777"/>
-            </a:solidFill>
-            <a:prstDash val="solid"/>
-          </a:ln>
-        </p:spPr>
-      </p:sp>
-      <p:sp>
-        <p:nvSpPr>
-          <p:cNvPr id="64" name="Text 62"/>
-          <p:cNvSpPr/>
-          <p:nvPr/>
-        </p:nvSpPr>
-        <p:spPr>
-          <a:xfrm>
-            <a:off x="7297743" y="4169664"/>
-            <a:ext cx="543652" cy="475488"/>
-          </a:xfrm>
-          <a:prstGeom prst="rect">
-            <a:avLst/>
-          </a:prstGeom>
-          <a:noFill/>
-          <a:ln/>
-        </p:spPr>
-        <p:txBody>
-          <a:bodyPr wrap="square" lIns="0" tIns="0" rIns="0" bIns="0" rtlCol="0" anchor="ctr"/>
-          <a:lstStyle/>
-          <a:p>
-            <a:pPr algn="ctr" indent="0" marL="0">
-              <a:buNone/>
-            </a:pPr>
-            <a:r>
-              <a:rPr lang="en-US" sz="900" b="1" dirty="0">
-                <a:solidFill>
-                  <a:srgbClr val="9D174D"/>
-                </a:solidFill>
-                <a:latin typeface="Trebuchet MS" pitchFamily="34" charset="0"/>
-                <a:ea typeface="Trebuchet MS" pitchFamily="34" charset="-122"/>
-                <a:cs typeface="Trebuchet MS" pitchFamily="34" charset="-120"/>
-              </a:rPr>
-              <a:t>b</a:t>
-            </a:r>
-            <a:endParaRPr lang="en-US" sz="900" dirty="0"/>
-          </a:p>
-        </p:txBody>
-      </p:sp>
-      <p:sp>
-        <p:nvSpPr>
-          <p:cNvPr id="65" name="Shape 63"/>
-          <p:cNvSpPr/>
-          <p:nvPr/>
-        </p:nvSpPr>
-        <p:spPr>
-          <a:xfrm>
-            <a:off x="7891688" y="4169664"/>
-            <a:ext cx="543652" cy="475488"/>
-          </a:xfrm>
-          <a:prstGeom prst="rect">
-            <a:avLst>
-              <a:gd name="adj" fmla="val 7692"/>
-            </a:avLst>
-          </a:prstGeom>
-          <a:solidFill>
-            <a:srgbClr val="FFFFFF"/>
-          </a:solidFill>
-          <a:ln w="12700">
-            <a:solidFill>
-              <a:srgbClr val="DB2777"/>
-            </a:solidFill>
-            <a:prstDash val="solid"/>
-          </a:ln>
-        </p:spPr>
-      </p:sp>
-      <p:sp>
-        <p:nvSpPr>
-          <p:cNvPr id="66" name="Text 64"/>
-          <p:cNvSpPr/>
-          <p:nvPr/>
-        </p:nvSpPr>
-        <p:spPr>
-          <a:xfrm>
-            <a:off x="7891688" y="4169664"/>
-            <a:ext cx="543652" cy="475488"/>
-          </a:xfrm>
-          <a:prstGeom prst="rect">
-            <a:avLst/>
-          </a:prstGeom>
-          <a:noFill/>
-          <a:ln/>
-        </p:spPr>
-        <p:txBody>
-          <a:bodyPr wrap="square" lIns="0" tIns="0" rIns="0" bIns="0" rtlCol="0" anchor="ctr"/>
-          <a:lstStyle/>
-          <a:p>
-            <a:pPr algn="ctr" indent="0" marL="0">
-              <a:buNone/>
-            </a:pPr>
-            <a:r>
-              <a:rPr lang="en-US" sz="900" b="1" dirty="0">
-                <a:solidFill>
-                  <a:srgbClr val="9D174D"/>
-                </a:solidFill>
-                <a:latin typeface="Trebuchet MS" pitchFamily="34" charset="0"/>
-                <a:ea typeface="Trebuchet MS" pitchFamily="34" charset="-122"/>
-                <a:cs typeface="Trebuchet MS" pitchFamily="34" charset="-120"/>
-              </a:rPr>
-              <a:t>le</a:t>
+              <a:t>d</a:t>
             </a:r>
             <a:endParaRPr lang="en-US" sz="900" dirty="0"/>
           </a:p>
@@ -18117,7 +17499,7 @@
                 <a:ea typeface="Calibri" pitchFamily="34" charset="-122"/>
                 <a:cs typeface="Calibri" pitchFamily="34" charset="-120"/>
               </a:rPr>
-              <a:t>She felt </a:t>
+              <a:t>It was </a:t>
             </a:r>
             <a:pPr algn="l" indent="0" marL="0">
               <a:buNone/>
@@ -18134,7 +17516,7 @@
                 <a:ea typeface="Calibri" pitchFamily="34" charset="-122"/>
                 <a:cs typeface="Calibri" pitchFamily="34" charset="-120"/>
               </a:rPr>
-              <a:t>unhappy</a:t>
+              <a:t>unkind</a:t>
             </a:r>
             <a:pPr algn="l" indent="0" marL="0">
               <a:buNone/>
@@ -18165,7 +17547,7 @@
                 <a:ea typeface="Calibri" pitchFamily="34" charset="-122"/>
                 <a:cs typeface="Calibri" pitchFamily="34" charset="-120"/>
               </a:rPr>
-              <a:t>unsure</a:t>
+              <a:t>unfair</a:t>
             </a:r>
             <a:pPr algn="l" indent="0" marL="0">
               <a:buNone/>
@@ -18179,7 +17561,7 @@
                 <a:ea typeface="Calibri" pitchFamily="34" charset="-122"/>
                 <a:cs typeface="Calibri" pitchFamily="34" charset="-120"/>
               </a:rPr>
-              <a:t>, but </a:t>
+              <a:t> to leave the </a:t>
             </a:r>
             <a:pPr algn="l" indent="0" marL="0">
               <a:buNone/>
@@ -18196,7 +17578,7 @@
                 <a:ea typeface="Calibri" pitchFamily="34" charset="-122"/>
                 <a:cs typeface="Calibri" pitchFamily="34" charset="-120"/>
               </a:rPr>
-              <a:t>unpacking</a:t>
+              <a:t>uncomfortable</a:t>
             </a:r>
             <a:pPr algn="l" indent="0" marL="0">
               <a:buNone/>
@@ -18210,7 +17592,7 @@
                 <a:ea typeface="Calibri" pitchFamily="34" charset="-122"/>
                 <a:cs typeface="Calibri" pitchFamily="34" charset="-120"/>
               </a:rPr>
-              <a:t> her things helped her settle in.</a:t>
+              <a:t> puppy outside in the cold rain.</a:t>
             </a:r>
             <a:endParaRPr lang="en-US" sz="1800" dirty="0"/>
           </a:p>
@@ -18365,7 +17747,7 @@
                 <a:ea typeface="Trebuchet MS" pitchFamily="34" charset="-122"/>
                 <a:cs typeface="Trebuchet MS" pitchFamily="34" charset="-120"/>
               </a:rPr>
-              <a:t>unhappy</a:t>
+              <a:t>unkind</a:t>
             </a:r>
             <a:endParaRPr lang="en-US" sz="1400" dirty="0"/>
           </a:p>
@@ -18493,7 +17875,7 @@
                 <a:ea typeface="Trebuchet MS" pitchFamily="34" charset="-122"/>
                 <a:cs typeface="Trebuchet MS" pitchFamily="34" charset="-120"/>
               </a:rPr>
-              <a:t>unsure</a:t>
+              <a:t>unfair</a:t>
             </a:r>
             <a:endParaRPr lang="en-US" sz="1400" dirty="0"/>
           </a:p>
@@ -18621,7 +18003,7 @@
                 <a:ea typeface="Trebuchet MS" pitchFamily="34" charset="-122"/>
                 <a:cs typeface="Trebuchet MS" pitchFamily="34" charset="-120"/>
               </a:rPr>
-              <a:t>unpacking</a:t>
+              <a:t>uncomfortable</a:t>
             </a:r>
             <a:endParaRPr lang="en-US" sz="1400" dirty="0"/>
           </a:p>
@@ -19091,7 +18473,7 @@
                 <a:ea typeface="Trebuchet MS" pitchFamily="34" charset="-122"/>
                 <a:cs typeface="Trebuchet MS" pitchFamily="34" charset="-120"/>
               </a:rPr>
-              <a:t>unhappy</a:t>
+              <a:t>unkind</a:t>
             </a:r>
             <a:endParaRPr lang="en-US" sz="2800" dirty="0"/>
           </a:p>
@@ -19918,7 +19300,7 @@
                 <a:ea typeface="Trebuchet MS" pitchFamily="34" charset="-122"/>
                 <a:cs typeface="Trebuchet MS" pitchFamily="34" charset="-120"/>
               </a:rPr>
-              <a:t>unhappy</a:t>
+              <a:t>unkind</a:t>
             </a:r>
             <a:endParaRPr lang="en-US" sz="2800" dirty="0"/>
           </a:p>
@@ -19998,7 +19380,7 @@
         </p:nvSpPr>
         <p:spPr>
           <a:xfrm>
-            <a:off x="2221992" y="2258568"/>
+            <a:off x="2938272" y="2258568"/>
             <a:ext cx="1828800" cy="292608"/>
           </a:xfrm>
           <a:prstGeom prst="rect">
@@ -20032,7 +19414,7 @@
         </p:nvSpPr>
         <p:spPr>
           <a:xfrm>
-            <a:off x="2221992" y="2258568"/>
+            <a:off x="2938272" y="2258568"/>
             <a:ext cx="1828800" cy="292608"/>
           </a:xfrm>
           <a:prstGeom prst="rect">
@@ -20071,7 +19453,7 @@
         </p:nvSpPr>
         <p:spPr>
           <a:xfrm>
-            <a:off x="2221992" y="2569464"/>
+            <a:off x="2938272" y="2569464"/>
             <a:ext cx="1828800" cy="201168"/>
           </a:xfrm>
           <a:prstGeom prst="rect">
@@ -20110,7 +19492,7 @@
         </p:nvSpPr>
         <p:spPr>
           <a:xfrm>
-            <a:off x="4370832" y="2258568"/>
+            <a:off x="5803392" y="2258568"/>
             <a:ext cx="1828800" cy="292608"/>
           </a:xfrm>
           <a:prstGeom prst="rect">
@@ -20144,7 +19526,7 @@
         </p:nvSpPr>
         <p:spPr>
           <a:xfrm>
-            <a:off x="4370832" y="2258568"/>
+            <a:off x="5803392" y="2258568"/>
             <a:ext cx="1828800" cy="292608"/>
           </a:xfrm>
           <a:prstGeom prst="rect">
@@ -20169,7 +19551,7 @@
                 <a:ea typeface="Trebuchet MS" pitchFamily="34" charset="-122"/>
                 <a:cs typeface="Trebuchet MS" pitchFamily="34" charset="-120"/>
               </a:rPr>
-              <a:t>happ</a:t>
+              <a:t>kind</a:t>
             </a:r>
             <a:endParaRPr lang="en-US" sz="1300" dirty="0"/>
           </a:p>
@@ -20183,7 +19565,7 @@
         </p:nvSpPr>
         <p:spPr>
           <a:xfrm>
-            <a:off x="4370832" y="2569464"/>
+            <a:off x="5803392" y="2569464"/>
             <a:ext cx="1828800" cy="201168"/>
           </a:xfrm>
           <a:prstGeom prst="rect">
@@ -20208,7 +19590,7 @@
                 <a:ea typeface="Calibri" pitchFamily="34" charset="-122"/>
                 <a:cs typeface="Calibri" pitchFamily="34" charset="-120"/>
               </a:rPr>
-              <a:t>lucky, fortunate</a:t>
+              <a:t>gentle and caring</a:t>
             </a:r>
             <a:endParaRPr lang="en-US" sz="850" dirty="0"/>
           </a:p>
@@ -20222,30 +19604,23 @@
         </p:nvSpPr>
         <p:spPr>
           <a:xfrm>
-            <a:off x="6519672" y="2258568"/>
-            <a:ext cx="1828800" cy="292608"/>
+            <a:off x="365760" y="3273552"/>
+            <a:ext cx="1371600" cy="658368"/>
           </a:xfrm>
           <a:prstGeom prst="rect">
             <a:avLst>
-              <a:gd name="adj" fmla="val 25000"/>
+              <a:gd name="adj" fmla="val 8333"/>
             </a:avLst>
           </a:prstGeom>
           <a:solidFill>
-            <a:srgbClr val="FCE7F3"/>
-          </a:solidFill>
-          <a:ln w="19050">
-            <a:solidFill>
-              <a:srgbClr val="DB2777"/>
-            </a:solidFill>
-            <a:prstDash val="solid"/>
-          </a:ln>
-          <a:effectLst>
-            <a:outerShdw sx="100000" sy="100000" kx="0" ky="0" algn="bl" rotWithShape="0" blurRad="101600" dist="38100" dir="8100000">
-              <a:srgbClr val="000000">
-                <a:alpha val="12000"/>
-              </a:srgbClr>
-            </a:outerShdw>
-          </a:effectLst>
+            <a:srgbClr val="E2E8F0"/>
+          </a:solidFill>
+          <a:ln w="12700">
+            <a:solidFill>
+              <a:srgbClr val="E2E8F0"/>
+            </a:solidFill>
+            <a:prstDash val="solid"/>
+          </a:ln>
         </p:spPr>
       </p:sp>
       <p:sp>
@@ -20256,112 +19631,100 @@
         </p:nvSpPr>
         <p:spPr>
           <a:xfrm>
-            <a:off x="6519672" y="2258568"/>
-            <a:ext cx="1828800" cy="292608"/>
-          </a:xfrm>
-          <a:prstGeom prst="rect">
-            <a:avLst/>
-          </a:prstGeom>
-          <a:noFill/>
-          <a:ln/>
-        </p:spPr>
-        <p:txBody>
-          <a:bodyPr wrap="square" lIns="0" tIns="0" rIns="0" bIns="0" rtlCol="0" anchor="ctr"/>
-          <a:lstStyle/>
-          <a:p>
-            <a:pPr algn="ctr" indent="0" marL="0">
-              <a:buNone/>
-            </a:pPr>
-            <a:r>
-              <a:rPr lang="en-US" sz="1300" b="1" dirty="0">
-                <a:solidFill>
-                  <a:srgbClr val="9D174D"/>
+            <a:off x="365760" y="3273552"/>
+            <a:ext cx="1371600" cy="658368"/>
+          </a:xfrm>
+          <a:prstGeom prst="rect">
+            <a:avLst/>
+          </a:prstGeom>
+          <a:noFill/>
+          <a:ln/>
+        </p:spPr>
+        <p:txBody>
+          <a:bodyPr wrap="square" lIns="0" tIns="0" rIns="0" bIns="0" rtlCol="0" anchor="ctr"/>
+          <a:lstStyle/>
+          <a:p>
+            <a:pPr algn="ctr" indent="0" marL="0">
+              <a:buNone/>
+            </a:pPr>
+            <a:r>
+              <a:rPr lang="en-US" sz="1100" b="1" dirty="0">
+                <a:solidFill>
+                  <a:srgbClr val="475569"/>
                 </a:solidFill>
                 <a:latin typeface="Trebuchet MS" pitchFamily="34" charset="0"/>
                 <a:ea typeface="Trebuchet MS" pitchFamily="34" charset="-122"/>
                 <a:cs typeface="Trebuchet MS" pitchFamily="34" charset="-120"/>
               </a:rPr>
-              <a:t>y</a:t>
-            </a:r>
-            <a:endParaRPr lang="en-US" sz="1300" dirty="0"/>
-          </a:p>
-        </p:txBody>
-      </p:sp>
-      <p:sp>
-        <p:nvSpPr>
-          <p:cNvPr id="24" name="Text 22"/>
-          <p:cNvSpPr/>
-          <p:nvPr/>
-        </p:nvSpPr>
-        <p:spPr>
-          <a:xfrm>
-            <a:off x="6519672" y="2569464"/>
-            <a:ext cx="1828800" cy="201168"/>
-          </a:xfrm>
-          <a:prstGeom prst="rect">
-            <a:avLst/>
-          </a:prstGeom>
-          <a:noFill/>
-          <a:ln/>
-        </p:spPr>
-        <p:txBody>
-          <a:bodyPr wrap="square" lIns="0" tIns="0" rIns="0" bIns="0" rtlCol="0" anchor="t"/>
-          <a:lstStyle/>
-          <a:p>
-            <a:pPr algn="ctr" indent="0" marL="0">
-              <a:buNone/>
-            </a:pPr>
-            <a:r>
-              <a:rPr lang="en-US" sz="850" dirty="0">
-                <a:solidFill>
-                  <a:srgbClr val="475569"/>
+              <a:t>Syllables</a:t>
+            </a:r>
+            <a:endParaRPr lang="en-US" sz="1100" dirty="0"/>
+          </a:p>
+        </p:txBody>
+      </p:sp>
+      <p:sp>
+        <p:nvSpPr>
+          <p:cNvPr id="24" name="Shape 22"/>
+          <p:cNvSpPr/>
+          <p:nvPr/>
+        </p:nvSpPr>
+        <p:spPr>
+          <a:xfrm>
+            <a:off x="1874520" y="3273552"/>
+            <a:ext cx="6903720" cy="658368"/>
+          </a:xfrm>
+          <a:prstGeom prst="rect">
+            <a:avLst>
+              <a:gd name="adj" fmla="val 8333"/>
+            </a:avLst>
+          </a:prstGeom>
+          <a:solidFill>
+            <a:srgbClr val="F8FAFC"/>
+          </a:solidFill>
+          <a:ln w="12700">
+            <a:solidFill>
+              <a:srgbClr val="E2E8F0"/>
+            </a:solidFill>
+            <a:prstDash val="dash"/>
+          </a:ln>
+        </p:spPr>
+      </p:sp>
+      <p:sp>
+        <p:nvSpPr>
+          <p:cNvPr id="25" name="Text 23"/>
+          <p:cNvSpPr/>
+          <p:nvPr/>
+        </p:nvSpPr>
+        <p:spPr>
+          <a:xfrm>
+            <a:off x="1874520" y="3273552"/>
+            <a:ext cx="6903720" cy="658368"/>
+          </a:xfrm>
+          <a:prstGeom prst="rect">
+            <a:avLst/>
+          </a:prstGeom>
+          <a:noFill/>
+          <a:ln/>
+        </p:spPr>
+        <p:txBody>
+          <a:bodyPr wrap="square" rtlCol="0" anchor="ctr"/>
+          <a:lstStyle/>
+          <a:p>
+            <a:pPr algn="ctr" indent="0" marL="0">
+              <a:buNone/>
+            </a:pPr>
+            <a:r>
+              <a:rPr lang="en-US" sz="1100" i="1" dirty="0">
+                <a:solidFill>
+                  <a:srgbClr val="CBD5E1"/>
                 </a:solidFill>
                 <a:latin typeface="Calibri" pitchFamily="34" charset="0"/>
                 <a:ea typeface="Calibri" pitchFamily="34" charset="-122"/>
                 <a:cs typeface="Calibri" pitchFamily="34" charset="-120"/>
               </a:rPr>
-              <a:t>having the quality of</a:t>
-            </a:r>
-            <a:endParaRPr lang="en-US" sz="850" dirty="0"/>
-          </a:p>
-        </p:txBody>
-      </p:sp>
-      <p:sp>
-        <p:nvSpPr>
-          <p:cNvPr id="25" name="Text 23"/>
-          <p:cNvSpPr/>
-          <p:nvPr/>
-        </p:nvSpPr>
-        <p:spPr>
-          <a:xfrm>
-            <a:off x="6519672" y="2752344"/>
-            <a:ext cx="1828800" cy="182880"/>
-          </a:xfrm>
-          <a:prstGeom prst="rect">
-            <a:avLst/>
-          </a:prstGeom>
-          <a:noFill/>
-          <a:ln/>
-        </p:spPr>
-        <p:txBody>
-          <a:bodyPr wrap="square" lIns="0" tIns="0" rIns="0" bIns="0" rtlCol="0" anchor="t"/>
-          <a:lstStyle/>
-          <a:p>
-            <a:pPr algn="ctr" indent="0" marL="0">
-              <a:buNone/>
-            </a:pPr>
-            <a:r>
-              <a:rPr lang="en-US" sz="700" i="1" dirty="0">
-                <a:solidFill>
-                  <a:srgbClr val="94A3B8"/>
-                </a:solidFill>
-                <a:latin typeface="Calibri" pitchFamily="34" charset="0"/>
-                <a:ea typeface="Calibri" pitchFamily="34" charset="-122"/>
-                <a:cs typeface="Calibri" pitchFamily="34" charset="-120"/>
-              </a:rPr>
-              <a:t>'y' added to base; 'i' before 'y' rule does not apply here</a:t>
-            </a:r>
-            <a:endParaRPr lang="en-US" sz="700" dirty="0"/>
+              <a:t>Write here...</a:t>
+            </a:r>
+            <a:endParaRPr lang="en-US" sz="1100" dirty="0"/>
           </a:p>
         </p:txBody>
       </p:sp>
@@ -20373,12 +19736,12 @@
         </p:nvSpPr>
         <p:spPr>
           <a:xfrm>
-            <a:off x="365760" y="3273552"/>
-            <a:ext cx="1371600" cy="658368"/>
+            <a:off x="365760" y="4096512"/>
+            <a:ext cx="1371600" cy="804672"/>
           </a:xfrm>
           <a:prstGeom prst="rect">
             <a:avLst>
-              <a:gd name="adj" fmla="val 8333"/>
+              <a:gd name="adj" fmla="val 6818"/>
             </a:avLst>
           </a:prstGeom>
           <a:solidFill>
@@ -20400,8 +19763,8 @@
         </p:nvSpPr>
         <p:spPr>
           <a:xfrm>
-            <a:off x="365760" y="3273552"/>
-            <a:ext cx="1371600" cy="658368"/>
+            <a:off x="365760" y="4096512"/>
+            <a:ext cx="1371600" cy="804672"/>
           </a:xfrm>
           <a:prstGeom prst="rect">
             <a:avLst/>
@@ -20425,7 +19788,7 @@
                 <a:ea typeface="Trebuchet MS" pitchFamily="34" charset="-122"/>
                 <a:cs typeface="Trebuchet MS" pitchFamily="34" charset="-120"/>
               </a:rPr>
-              <a:t>Syllables</a:t>
+              <a:t>Phonemes</a:t>
             </a:r>
             <a:endParaRPr lang="en-US" sz="1100" dirty="0"/>
           </a:p>
@@ -20439,74 +19802,8 @@
         </p:nvSpPr>
         <p:spPr>
           <a:xfrm>
-            <a:off x="1874520" y="3273552"/>
-            <a:ext cx="6903720" cy="658368"/>
-          </a:xfrm>
-          <a:prstGeom prst="rect">
-            <a:avLst>
-              <a:gd name="adj" fmla="val 8333"/>
-            </a:avLst>
-          </a:prstGeom>
-          <a:solidFill>
-            <a:srgbClr val="F8FAFC"/>
-          </a:solidFill>
-          <a:ln w="12700">
-            <a:solidFill>
-              <a:srgbClr val="E2E8F0"/>
-            </a:solidFill>
-            <a:prstDash val="dash"/>
-          </a:ln>
-        </p:spPr>
-      </p:sp>
-      <p:sp>
-        <p:nvSpPr>
-          <p:cNvPr id="29" name="Text 27"/>
-          <p:cNvSpPr/>
-          <p:nvPr/>
-        </p:nvSpPr>
-        <p:spPr>
-          <a:xfrm>
-            <a:off x="1874520" y="3273552"/>
-            <a:ext cx="6903720" cy="658368"/>
-          </a:xfrm>
-          <a:prstGeom prst="rect">
-            <a:avLst/>
-          </a:prstGeom>
-          <a:noFill/>
-          <a:ln/>
-        </p:spPr>
-        <p:txBody>
-          <a:bodyPr wrap="square" rtlCol="0" anchor="ctr"/>
-          <a:lstStyle/>
-          <a:p>
-            <a:pPr algn="ctr" indent="0" marL="0">
-              <a:buNone/>
-            </a:pPr>
-            <a:r>
-              <a:rPr lang="en-US" sz="1100" i="1" dirty="0">
-                <a:solidFill>
-                  <a:srgbClr val="CBD5E1"/>
-                </a:solidFill>
-                <a:latin typeface="Calibri" pitchFamily="34" charset="0"/>
-                <a:ea typeface="Calibri" pitchFamily="34" charset="-122"/>
-                <a:cs typeface="Calibri" pitchFamily="34" charset="-120"/>
-              </a:rPr>
-              <a:t>Write here...</a:t>
-            </a:r>
-            <a:endParaRPr lang="en-US" sz="1100" dirty="0"/>
-          </a:p>
-        </p:txBody>
-      </p:sp>
-      <p:sp>
-        <p:nvSpPr>
-          <p:cNvPr id="30" name="Shape 28"/>
-          <p:cNvSpPr/>
-          <p:nvPr/>
-        </p:nvSpPr>
-        <p:spPr>
-          <a:xfrm>
-            <a:off x="365760" y="4096512"/>
-            <a:ext cx="1371600" cy="804672"/>
+            <a:off x="1874520" y="4096512"/>
+            <a:ext cx="6903720" cy="804672"/>
           </a:xfrm>
           <a:prstGeom prst="rect">
             <a:avLst>
@@ -20514,85 +19811,19 @@
             </a:avLst>
           </a:prstGeom>
           <a:solidFill>
-            <a:srgbClr val="E2E8F0"/>
+            <a:srgbClr val="F8FAFC"/>
           </a:solidFill>
           <a:ln w="12700">
             <a:solidFill>
               <a:srgbClr val="E2E8F0"/>
             </a:solidFill>
-            <a:prstDash val="solid"/>
-          </a:ln>
-        </p:spPr>
-      </p:sp>
-      <p:sp>
-        <p:nvSpPr>
-          <p:cNvPr id="31" name="Text 29"/>
-          <p:cNvSpPr/>
-          <p:nvPr/>
-        </p:nvSpPr>
-        <p:spPr>
-          <a:xfrm>
-            <a:off x="365760" y="4096512"/>
-            <a:ext cx="1371600" cy="804672"/>
-          </a:xfrm>
-          <a:prstGeom prst="rect">
-            <a:avLst/>
-          </a:prstGeom>
-          <a:noFill/>
-          <a:ln/>
-        </p:spPr>
-        <p:txBody>
-          <a:bodyPr wrap="square" lIns="0" tIns="0" rIns="0" bIns="0" rtlCol="0" anchor="ctr"/>
-          <a:lstStyle/>
-          <a:p>
-            <a:pPr algn="ctr" indent="0" marL="0">
-              <a:buNone/>
-            </a:pPr>
-            <a:r>
-              <a:rPr lang="en-US" sz="1100" b="1" dirty="0">
-                <a:solidFill>
-                  <a:srgbClr val="475569"/>
-                </a:solidFill>
-                <a:latin typeface="Trebuchet MS" pitchFamily="34" charset="0"/>
-                <a:ea typeface="Trebuchet MS" pitchFamily="34" charset="-122"/>
-                <a:cs typeface="Trebuchet MS" pitchFamily="34" charset="-120"/>
-              </a:rPr>
-              <a:t>Phonemes</a:t>
-            </a:r>
-            <a:endParaRPr lang="en-US" sz="1100" dirty="0"/>
-          </a:p>
-        </p:txBody>
-      </p:sp>
-      <p:sp>
-        <p:nvSpPr>
-          <p:cNvPr id="32" name="Shape 30"/>
-          <p:cNvSpPr/>
-          <p:nvPr/>
-        </p:nvSpPr>
-        <p:spPr>
-          <a:xfrm>
-            <a:off x="1874520" y="4096512"/>
-            <a:ext cx="6903720" cy="804672"/>
-          </a:xfrm>
-          <a:prstGeom prst="rect">
-            <a:avLst>
-              <a:gd name="adj" fmla="val 6818"/>
-            </a:avLst>
-          </a:prstGeom>
-          <a:solidFill>
-            <a:srgbClr val="F8FAFC"/>
-          </a:solidFill>
-          <a:ln w="12700">
-            <a:solidFill>
-              <a:srgbClr val="E2E8F0"/>
-            </a:solidFill>
             <a:prstDash val="dash"/>
           </a:ln>
         </p:spPr>
       </p:sp>
       <p:sp>
         <p:nvSpPr>
-          <p:cNvPr id="33" name="Text 31"/>
+          <p:cNvPr id="29" name="Text 27"/>
           <p:cNvSpPr/>
           <p:nvPr/>
         </p:nvSpPr>
@@ -21054,7 +20285,7 @@
                 <a:ea typeface="Trebuchet MS" pitchFamily="34" charset="-122"/>
                 <a:cs typeface="Trebuchet MS" pitchFamily="34" charset="-120"/>
               </a:rPr>
-              <a:t>unhappy</a:t>
+              <a:t>unkind</a:t>
             </a:r>
             <a:endParaRPr lang="en-US" sz="2800" dirty="0"/>
           </a:p>
@@ -21134,7 +20365,7 @@
         </p:nvSpPr>
         <p:spPr>
           <a:xfrm>
-            <a:off x="2221992" y="2258568"/>
+            <a:off x="2938272" y="2258568"/>
             <a:ext cx="1828800" cy="292608"/>
           </a:xfrm>
           <a:prstGeom prst="rect">
@@ -21168,7 +20399,7 @@
         </p:nvSpPr>
         <p:spPr>
           <a:xfrm>
-            <a:off x="2221992" y="2258568"/>
+            <a:off x="2938272" y="2258568"/>
             <a:ext cx="1828800" cy="292608"/>
           </a:xfrm>
           <a:prstGeom prst="rect">
@@ -21207,7 +20438,7 @@
         </p:nvSpPr>
         <p:spPr>
           <a:xfrm>
-            <a:off x="2221992" y="2569464"/>
+            <a:off x="2938272" y="2569464"/>
             <a:ext cx="1828800" cy="201168"/>
           </a:xfrm>
           <a:prstGeom prst="rect">
@@ -21246,7 +20477,7 @@
         </p:nvSpPr>
         <p:spPr>
           <a:xfrm>
-            <a:off x="4370832" y="2258568"/>
+            <a:off x="5803392" y="2258568"/>
             <a:ext cx="1828800" cy="292608"/>
           </a:xfrm>
           <a:prstGeom prst="rect">
@@ -21280,7 +20511,7 @@
         </p:nvSpPr>
         <p:spPr>
           <a:xfrm>
-            <a:off x="4370832" y="2258568"/>
+            <a:off x="5803392" y="2258568"/>
             <a:ext cx="1828800" cy="292608"/>
           </a:xfrm>
           <a:prstGeom prst="rect">
@@ -21305,7 +20536,7 @@
                 <a:ea typeface="Trebuchet MS" pitchFamily="34" charset="-122"/>
                 <a:cs typeface="Trebuchet MS" pitchFamily="34" charset="-120"/>
               </a:rPr>
-              <a:t>happ</a:t>
+              <a:t>kind</a:t>
             </a:r>
             <a:endParaRPr lang="en-US" sz="1300" dirty="0"/>
           </a:p>
@@ -21319,7 +20550,7 @@
         </p:nvSpPr>
         <p:spPr>
           <a:xfrm>
-            <a:off x="4370832" y="2569464"/>
+            <a:off x="5803392" y="2569464"/>
             <a:ext cx="1828800" cy="201168"/>
           </a:xfrm>
           <a:prstGeom prst="rect">
@@ -21344,7 +20575,7 @@
                 <a:ea typeface="Calibri" pitchFamily="34" charset="-122"/>
                 <a:cs typeface="Calibri" pitchFamily="34" charset="-120"/>
               </a:rPr>
-              <a:t>lucky, fortunate</a:t>
+              <a:t>gentle and caring</a:t>
             </a:r>
             <a:endParaRPr lang="en-US" sz="850" dirty="0"/>
           </a:p>
@@ -21358,30 +20589,23 @@
         </p:nvSpPr>
         <p:spPr>
           <a:xfrm>
-            <a:off x="6519672" y="2258568"/>
-            <a:ext cx="1828800" cy="292608"/>
+            <a:off x="365760" y="3273552"/>
+            <a:ext cx="1371600" cy="658368"/>
           </a:xfrm>
           <a:prstGeom prst="rect">
             <a:avLst>
-              <a:gd name="adj" fmla="val 25000"/>
+              <a:gd name="adj" fmla="val 8333"/>
             </a:avLst>
           </a:prstGeom>
           <a:solidFill>
-            <a:srgbClr val="FCE7F3"/>
-          </a:solidFill>
-          <a:ln w="19050">
-            <a:solidFill>
-              <a:srgbClr val="DB2777"/>
-            </a:solidFill>
-            <a:prstDash val="solid"/>
-          </a:ln>
-          <a:effectLst>
-            <a:outerShdw sx="100000" sy="100000" kx="0" ky="0" algn="bl" rotWithShape="0" blurRad="101600" dist="38100" dir="8100000">
-              <a:srgbClr val="000000">
-                <a:alpha val="12000"/>
-              </a:srgbClr>
-            </a:outerShdw>
-          </a:effectLst>
+            <a:srgbClr val="E2E8F0"/>
+          </a:solidFill>
+          <a:ln w="12700">
+            <a:solidFill>
+              <a:srgbClr val="E2E8F0"/>
+            </a:solidFill>
+            <a:prstDash val="solid"/>
+          </a:ln>
         </p:spPr>
       </p:sp>
       <p:sp>
@@ -21392,125 +20616,47 @@
         </p:nvSpPr>
         <p:spPr>
           <a:xfrm>
-            <a:off x="6519672" y="2258568"/>
-            <a:ext cx="1828800" cy="292608"/>
-          </a:xfrm>
-          <a:prstGeom prst="rect">
-            <a:avLst/>
-          </a:prstGeom>
-          <a:noFill/>
-          <a:ln/>
-        </p:spPr>
-        <p:txBody>
-          <a:bodyPr wrap="square" lIns="0" tIns="0" rIns="0" bIns="0" rtlCol="0" anchor="ctr"/>
-          <a:lstStyle/>
-          <a:p>
-            <a:pPr algn="ctr" indent="0" marL="0">
-              <a:buNone/>
-            </a:pPr>
-            <a:r>
-              <a:rPr lang="en-US" sz="1300" b="1" dirty="0">
-                <a:solidFill>
-                  <a:srgbClr val="9D174D"/>
+            <a:off x="365760" y="3273552"/>
+            <a:ext cx="1371600" cy="658368"/>
+          </a:xfrm>
+          <a:prstGeom prst="rect">
+            <a:avLst/>
+          </a:prstGeom>
+          <a:noFill/>
+          <a:ln/>
+        </p:spPr>
+        <p:txBody>
+          <a:bodyPr wrap="square" lIns="0" tIns="0" rIns="0" bIns="0" rtlCol="0" anchor="ctr"/>
+          <a:lstStyle/>
+          <a:p>
+            <a:pPr algn="ctr" indent="0" marL="0">
+              <a:buNone/>
+            </a:pPr>
+            <a:r>
+              <a:rPr lang="en-US" sz="1100" b="1" dirty="0">
+                <a:solidFill>
+                  <a:srgbClr val="475569"/>
                 </a:solidFill>
                 <a:latin typeface="Trebuchet MS" pitchFamily="34" charset="0"/>
                 <a:ea typeface="Trebuchet MS" pitchFamily="34" charset="-122"/>
                 <a:cs typeface="Trebuchet MS" pitchFamily="34" charset="-120"/>
               </a:rPr>
-              <a:t>y</a:t>
-            </a:r>
-            <a:endParaRPr lang="en-US" sz="1300" dirty="0"/>
-          </a:p>
-        </p:txBody>
-      </p:sp>
-      <p:sp>
-        <p:nvSpPr>
-          <p:cNvPr id="24" name="Text 22"/>
-          <p:cNvSpPr/>
-          <p:nvPr/>
-        </p:nvSpPr>
-        <p:spPr>
-          <a:xfrm>
-            <a:off x="6519672" y="2569464"/>
-            <a:ext cx="1828800" cy="201168"/>
-          </a:xfrm>
-          <a:prstGeom prst="rect">
-            <a:avLst/>
-          </a:prstGeom>
-          <a:noFill/>
-          <a:ln/>
-        </p:spPr>
-        <p:txBody>
-          <a:bodyPr wrap="square" lIns="0" tIns="0" rIns="0" bIns="0" rtlCol="0" anchor="t"/>
-          <a:lstStyle/>
-          <a:p>
-            <a:pPr algn="ctr" indent="0" marL="0">
-              <a:buNone/>
-            </a:pPr>
-            <a:r>
-              <a:rPr lang="en-US" sz="850" dirty="0">
-                <a:solidFill>
-                  <a:srgbClr val="475569"/>
-                </a:solidFill>
-                <a:latin typeface="Calibri" pitchFamily="34" charset="0"/>
-                <a:ea typeface="Calibri" pitchFamily="34" charset="-122"/>
-                <a:cs typeface="Calibri" pitchFamily="34" charset="-120"/>
-              </a:rPr>
-              <a:t>having the quality of</a:t>
-            </a:r>
-            <a:endParaRPr lang="en-US" sz="850" dirty="0"/>
-          </a:p>
-        </p:txBody>
-      </p:sp>
-      <p:sp>
-        <p:nvSpPr>
-          <p:cNvPr id="25" name="Text 23"/>
-          <p:cNvSpPr/>
-          <p:nvPr/>
-        </p:nvSpPr>
-        <p:spPr>
-          <a:xfrm>
-            <a:off x="6519672" y="2752344"/>
-            <a:ext cx="1828800" cy="182880"/>
-          </a:xfrm>
-          <a:prstGeom prst="rect">
-            <a:avLst/>
-          </a:prstGeom>
-          <a:noFill/>
-          <a:ln/>
-        </p:spPr>
-        <p:txBody>
-          <a:bodyPr wrap="square" lIns="0" tIns="0" rIns="0" bIns="0" rtlCol="0" anchor="t"/>
-          <a:lstStyle/>
-          <a:p>
-            <a:pPr algn="ctr" indent="0" marL="0">
-              <a:buNone/>
-            </a:pPr>
-            <a:r>
-              <a:rPr lang="en-US" sz="700" i="1" dirty="0">
-                <a:solidFill>
-                  <a:srgbClr val="94A3B8"/>
-                </a:solidFill>
-                <a:latin typeface="Calibri" pitchFamily="34" charset="0"/>
-                <a:ea typeface="Calibri" pitchFamily="34" charset="-122"/>
-                <a:cs typeface="Calibri" pitchFamily="34" charset="-120"/>
-              </a:rPr>
-              <a:t>'y' added to base; 'i' before 'y' rule does not apply here</a:t>
-            </a:r>
-            <a:endParaRPr lang="en-US" sz="700" dirty="0"/>
-          </a:p>
-        </p:txBody>
-      </p:sp>
-      <p:sp>
-        <p:nvSpPr>
-          <p:cNvPr id="26" name="Shape 24"/>
-          <p:cNvSpPr/>
-          <p:nvPr/>
-        </p:nvSpPr>
-        <p:spPr>
-          <a:xfrm>
-            <a:off x="365760" y="3273552"/>
-            <a:ext cx="1371600" cy="658368"/>
+              <a:t>Syllables</a:t>
+            </a:r>
+            <a:endParaRPr lang="en-US" sz="1100" dirty="0"/>
+          </a:p>
+        </p:txBody>
+      </p:sp>
+      <p:sp>
+        <p:nvSpPr>
+          <p:cNvPr id="24" name="Shape 22"/>
+          <p:cNvSpPr/>
+          <p:nvPr/>
+        </p:nvSpPr>
+        <p:spPr>
+          <a:xfrm>
+            <a:off x="1874520" y="3273552"/>
+            <a:ext cx="6903720" cy="658368"/>
           </a:xfrm>
           <a:prstGeom prst="rect">
             <a:avLst>
@@ -21518,52 +20664,118 @@
             </a:avLst>
           </a:prstGeom>
           <a:solidFill>
-            <a:srgbClr val="E2E8F0"/>
-          </a:solidFill>
-          <a:ln w="12700">
-            <a:solidFill>
-              <a:srgbClr val="E2E8F0"/>
-            </a:solidFill>
-            <a:prstDash val="solid"/>
-          </a:ln>
-        </p:spPr>
-      </p:sp>
-      <p:sp>
-        <p:nvSpPr>
-          <p:cNvPr id="27" name="Text 25"/>
-          <p:cNvSpPr/>
-          <p:nvPr/>
-        </p:nvSpPr>
-        <p:spPr>
-          <a:xfrm>
-            <a:off x="365760" y="3273552"/>
-            <a:ext cx="1371600" cy="658368"/>
-          </a:xfrm>
-          <a:prstGeom prst="rect">
-            <a:avLst/>
-          </a:prstGeom>
-          <a:noFill/>
-          <a:ln/>
-        </p:spPr>
-        <p:txBody>
-          <a:bodyPr wrap="square" lIns="0" tIns="0" rIns="0" bIns="0" rtlCol="0" anchor="ctr"/>
-          <a:lstStyle/>
-          <a:p>
-            <a:pPr algn="ctr" indent="0" marL="0">
-              <a:buNone/>
-            </a:pPr>
-            <a:r>
-              <a:rPr lang="en-US" sz="1100" b="1" dirty="0">
-                <a:solidFill>
-                  <a:srgbClr val="475569"/>
+            <a:srgbClr val="CCFBF1"/>
+          </a:solidFill>
+          <a:ln w="12700">
+            <a:solidFill>
+              <a:srgbClr val="0D9488"/>
+            </a:solidFill>
+            <a:prstDash val="solid"/>
+          </a:ln>
+        </p:spPr>
+      </p:sp>
+      <p:sp>
+        <p:nvSpPr>
+          <p:cNvPr id="25" name="Shape 23"/>
+          <p:cNvSpPr/>
+          <p:nvPr/>
+        </p:nvSpPr>
+        <p:spPr>
+          <a:xfrm>
+            <a:off x="2999232" y="3364992"/>
+            <a:ext cx="1645920" cy="475488"/>
+          </a:xfrm>
+          <a:prstGeom prst="rect">
+            <a:avLst>
+              <a:gd name="adj" fmla="val 9615"/>
+            </a:avLst>
+          </a:prstGeom>
+          <a:solidFill>
+            <a:srgbClr val="FFFFFF"/>
+          </a:solidFill>
+          <a:ln w="12700">
+            <a:solidFill>
+              <a:srgbClr val="0D9488"/>
+            </a:solidFill>
+            <a:prstDash val="solid"/>
+          </a:ln>
+        </p:spPr>
+      </p:sp>
+      <p:sp>
+        <p:nvSpPr>
+          <p:cNvPr id="26" name="Text 24"/>
+          <p:cNvSpPr/>
+          <p:nvPr/>
+        </p:nvSpPr>
+        <p:spPr>
+          <a:xfrm>
+            <a:off x="2999232" y="3364992"/>
+            <a:ext cx="1645920" cy="475488"/>
+          </a:xfrm>
+          <a:prstGeom prst="rect">
+            <a:avLst/>
+          </a:prstGeom>
+          <a:noFill/>
+          <a:ln/>
+        </p:spPr>
+        <p:txBody>
+          <a:bodyPr wrap="square" lIns="0" tIns="0" rIns="0" bIns="0" rtlCol="0" anchor="ctr"/>
+          <a:lstStyle/>
+          <a:p>
+            <a:pPr algn="ctr" indent="0" marL="0">
+              <a:buNone/>
+            </a:pPr>
+            <a:r>
+              <a:rPr lang="en-US" sz="1400" b="1" dirty="0">
+                <a:solidFill>
+                  <a:srgbClr val="0D9488"/>
                 </a:solidFill>
                 <a:latin typeface="Trebuchet MS" pitchFamily="34" charset="0"/>
                 <a:ea typeface="Trebuchet MS" pitchFamily="34" charset="-122"/>
                 <a:cs typeface="Trebuchet MS" pitchFamily="34" charset="-120"/>
               </a:rPr>
-              <a:t>Syllables</a:t>
-            </a:r>
-            <a:endParaRPr lang="en-US" sz="1100" dirty="0"/>
+              <a:t>un</a:t>
+            </a:r>
+            <a:endParaRPr lang="en-US" sz="1400" dirty="0"/>
+          </a:p>
+        </p:txBody>
+      </p:sp>
+      <p:sp>
+        <p:nvSpPr>
+          <p:cNvPr id="27" name="Text 25"/>
+          <p:cNvSpPr/>
+          <p:nvPr/>
+        </p:nvSpPr>
+        <p:spPr>
+          <a:xfrm>
+            <a:off x="4645152" y="3364992"/>
+            <a:ext cx="1097280" cy="475488"/>
+          </a:xfrm>
+          <a:prstGeom prst="rect">
+            <a:avLst/>
+          </a:prstGeom>
+          <a:noFill/>
+          <a:ln/>
+        </p:spPr>
+        <p:txBody>
+          <a:bodyPr wrap="square" lIns="0" tIns="0" rIns="0" bIns="0" rtlCol="0" anchor="ctr"/>
+          <a:lstStyle/>
+          <a:p>
+            <a:pPr algn="ctr" indent="0" marL="0">
+              <a:buNone/>
+            </a:pPr>
+            <a:r>
+              <a:rPr lang="en-US" sz="1600" b="1" dirty="0">
+                <a:solidFill>
+                  <a:srgbClr val="0D9488"/>
+                </a:solidFill>
+                <a:latin typeface="Trebuchet MS" pitchFamily="34" charset="0"/>
+                <a:ea typeface="Trebuchet MS" pitchFamily="34" charset="-122"/>
+                <a:cs typeface="Trebuchet MS" pitchFamily="34" charset="-120"/>
+              </a:rPr>
+              <a:t>·</a:t>
+            </a:r>
+            <a:endParaRPr lang="en-US" sz="1600" dirty="0"/>
           </a:p>
         </p:txBody>
       </p:sp>
@@ -21575,34 +20787,7 @@
         </p:nvSpPr>
         <p:spPr>
           <a:xfrm>
-            <a:off x="1874520" y="3273552"/>
-            <a:ext cx="6903720" cy="658368"/>
-          </a:xfrm>
-          <a:prstGeom prst="rect">
-            <a:avLst>
-              <a:gd name="adj" fmla="val 8333"/>
-            </a:avLst>
-          </a:prstGeom>
-          <a:solidFill>
-            <a:srgbClr val="CCFBF1"/>
-          </a:solidFill>
-          <a:ln w="12700">
-            <a:solidFill>
-              <a:srgbClr val="0D9488"/>
-            </a:solidFill>
-            <a:prstDash val="solid"/>
-          </a:ln>
-        </p:spPr>
-      </p:sp>
-      <p:sp>
-        <p:nvSpPr>
-          <p:cNvPr id="29" name="Shape 27"/>
-          <p:cNvSpPr/>
-          <p:nvPr/>
-        </p:nvSpPr>
-        <p:spPr>
-          <a:xfrm>
-            <a:off x="2313432" y="3364992"/>
+            <a:off x="5742432" y="3364992"/>
             <a:ext cx="1645920" cy="475488"/>
           </a:xfrm>
           <a:prstGeom prst="rect">
@@ -21623,13 +20808,13 @@
       </p:sp>
       <p:sp>
         <p:nvSpPr>
-          <p:cNvPr id="30" name="Text 28"/>
-          <p:cNvSpPr/>
-          <p:nvPr/>
-        </p:nvSpPr>
-        <p:spPr>
-          <a:xfrm>
-            <a:off x="2313432" y="3364992"/>
+          <p:cNvPr id="29" name="Text 27"/>
+          <p:cNvSpPr/>
+          <p:nvPr/>
+        </p:nvSpPr>
+        <p:spPr>
+          <a:xfrm>
+            <a:off x="5742432" y="3364992"/>
             <a:ext cx="1645920" cy="475488"/>
           </a:xfrm>
           <a:prstGeom prst="rect">
@@ -21654,7 +20839,7 @@
                 <a:ea typeface="Trebuchet MS" pitchFamily="34" charset="-122"/>
                 <a:cs typeface="Trebuchet MS" pitchFamily="34" charset="-120"/>
               </a:rPr>
-              <a:t>un</a:t>
+              <a:t>kind</a:t>
             </a:r>
             <a:endParaRPr lang="en-US" sz="1400" dirty="0"/>
           </a:p>
@@ -21662,40 +20847,67 @@
       </p:sp>
       <p:sp>
         <p:nvSpPr>
+          <p:cNvPr id="30" name="Shape 28"/>
+          <p:cNvSpPr/>
+          <p:nvPr/>
+        </p:nvSpPr>
+        <p:spPr>
+          <a:xfrm>
+            <a:off x="365760" y="4096512"/>
+            <a:ext cx="1371600" cy="804672"/>
+          </a:xfrm>
+          <a:prstGeom prst="rect">
+            <a:avLst>
+              <a:gd name="adj" fmla="val 6818"/>
+            </a:avLst>
+          </a:prstGeom>
+          <a:solidFill>
+            <a:srgbClr val="E2E8F0"/>
+          </a:solidFill>
+          <a:ln w="12700">
+            <a:solidFill>
+              <a:srgbClr val="E2E8F0"/>
+            </a:solidFill>
+            <a:prstDash val="solid"/>
+          </a:ln>
+        </p:spPr>
+      </p:sp>
+      <p:sp>
+        <p:nvSpPr>
           <p:cNvPr id="31" name="Text 29"/>
           <p:cNvSpPr/>
           <p:nvPr/>
         </p:nvSpPr>
         <p:spPr>
           <a:xfrm>
-            <a:off x="3959352" y="3364992"/>
-            <a:ext cx="411480" cy="475488"/>
-          </a:xfrm>
-          <a:prstGeom prst="rect">
-            <a:avLst/>
-          </a:prstGeom>
-          <a:noFill/>
-          <a:ln/>
-        </p:spPr>
-        <p:txBody>
-          <a:bodyPr wrap="square" lIns="0" tIns="0" rIns="0" bIns="0" rtlCol="0" anchor="ctr"/>
-          <a:lstStyle/>
-          <a:p>
-            <a:pPr algn="ctr" indent="0" marL="0">
-              <a:buNone/>
-            </a:pPr>
-            <a:r>
-              <a:rPr lang="en-US" sz="1600" b="1" dirty="0">
-                <a:solidFill>
-                  <a:srgbClr val="0D9488"/>
+            <a:off x="365760" y="4096512"/>
+            <a:ext cx="1371600" cy="804672"/>
+          </a:xfrm>
+          <a:prstGeom prst="rect">
+            <a:avLst/>
+          </a:prstGeom>
+          <a:noFill/>
+          <a:ln/>
+        </p:spPr>
+        <p:txBody>
+          <a:bodyPr wrap="square" lIns="0" tIns="0" rIns="0" bIns="0" rtlCol="0" anchor="ctr"/>
+          <a:lstStyle/>
+          <a:p>
+            <a:pPr algn="ctr" indent="0" marL="0">
+              <a:buNone/>
+            </a:pPr>
+            <a:r>
+              <a:rPr lang="en-US" sz="1100" b="1" dirty="0">
+                <a:solidFill>
+                  <a:srgbClr val="475569"/>
                 </a:solidFill>
                 <a:latin typeface="Trebuchet MS" pitchFamily="34" charset="0"/>
                 <a:ea typeface="Trebuchet MS" pitchFamily="34" charset="-122"/>
                 <a:cs typeface="Trebuchet MS" pitchFamily="34" charset="-120"/>
               </a:rPr>
-              <a:t>·</a:t>
-            </a:r>
-            <a:endParaRPr lang="en-US" sz="1600" dirty="0"/>
+              <a:t>Phonemes</a:t>
+            </a:r>
+            <a:endParaRPr lang="en-US" sz="1100" dirty="0"/>
           </a:p>
         </p:txBody>
       </p:sp>
@@ -21707,179 +20919,8 @@
         </p:nvSpPr>
         <p:spPr>
           <a:xfrm>
-            <a:off x="4370832" y="3364992"/>
-            <a:ext cx="1645920" cy="475488"/>
-          </a:xfrm>
-          <a:prstGeom prst="rect">
-            <a:avLst>
-              <a:gd name="adj" fmla="val 9615"/>
-            </a:avLst>
-          </a:prstGeom>
-          <a:solidFill>
-            <a:srgbClr val="FFFFFF"/>
-          </a:solidFill>
-          <a:ln w="12700">
-            <a:solidFill>
-              <a:srgbClr val="0D9488"/>
-            </a:solidFill>
-            <a:prstDash val="solid"/>
-          </a:ln>
-        </p:spPr>
-      </p:sp>
-      <p:sp>
-        <p:nvSpPr>
-          <p:cNvPr id="33" name="Text 31"/>
-          <p:cNvSpPr/>
-          <p:nvPr/>
-        </p:nvSpPr>
-        <p:spPr>
-          <a:xfrm>
-            <a:off x="4370832" y="3364992"/>
-            <a:ext cx="1645920" cy="475488"/>
-          </a:xfrm>
-          <a:prstGeom prst="rect">
-            <a:avLst/>
-          </a:prstGeom>
-          <a:noFill/>
-          <a:ln/>
-        </p:spPr>
-        <p:txBody>
-          <a:bodyPr wrap="square" lIns="0" tIns="0" rIns="0" bIns="0" rtlCol="0" anchor="ctr"/>
-          <a:lstStyle/>
-          <a:p>
-            <a:pPr algn="ctr" indent="0" marL="0">
-              <a:buNone/>
-            </a:pPr>
-            <a:r>
-              <a:rPr lang="en-US" sz="1400" b="1" dirty="0">
-                <a:solidFill>
-                  <a:srgbClr val="0D9488"/>
-                </a:solidFill>
-                <a:latin typeface="Trebuchet MS" pitchFamily="34" charset="0"/>
-                <a:ea typeface="Trebuchet MS" pitchFamily="34" charset="-122"/>
-                <a:cs typeface="Trebuchet MS" pitchFamily="34" charset="-120"/>
-              </a:rPr>
-              <a:t>hap</a:t>
-            </a:r>
-            <a:endParaRPr lang="en-US" sz="1400" dirty="0"/>
-          </a:p>
-        </p:txBody>
-      </p:sp>
-      <p:sp>
-        <p:nvSpPr>
-          <p:cNvPr id="34" name="Text 32"/>
-          <p:cNvSpPr/>
-          <p:nvPr/>
-        </p:nvSpPr>
-        <p:spPr>
-          <a:xfrm>
-            <a:off x="6016752" y="3364992"/>
-            <a:ext cx="411480" cy="475488"/>
-          </a:xfrm>
-          <a:prstGeom prst="rect">
-            <a:avLst/>
-          </a:prstGeom>
-          <a:noFill/>
-          <a:ln/>
-        </p:spPr>
-        <p:txBody>
-          <a:bodyPr wrap="square" lIns="0" tIns="0" rIns="0" bIns="0" rtlCol="0" anchor="ctr"/>
-          <a:lstStyle/>
-          <a:p>
-            <a:pPr algn="ctr" indent="0" marL="0">
-              <a:buNone/>
-            </a:pPr>
-            <a:r>
-              <a:rPr lang="en-US" sz="1600" b="1" dirty="0">
-                <a:solidFill>
-                  <a:srgbClr val="0D9488"/>
-                </a:solidFill>
-                <a:latin typeface="Trebuchet MS" pitchFamily="34" charset="0"/>
-                <a:ea typeface="Trebuchet MS" pitchFamily="34" charset="-122"/>
-                <a:cs typeface="Trebuchet MS" pitchFamily="34" charset="-120"/>
-              </a:rPr>
-              <a:t>·</a:t>
-            </a:r>
-            <a:endParaRPr lang="en-US" sz="1600" dirty="0"/>
-          </a:p>
-        </p:txBody>
-      </p:sp>
-      <p:sp>
-        <p:nvSpPr>
-          <p:cNvPr id="35" name="Shape 33"/>
-          <p:cNvSpPr/>
-          <p:nvPr/>
-        </p:nvSpPr>
-        <p:spPr>
-          <a:xfrm>
-            <a:off x="6428232" y="3364992"/>
-            <a:ext cx="1645920" cy="475488"/>
-          </a:xfrm>
-          <a:prstGeom prst="rect">
-            <a:avLst>
-              <a:gd name="adj" fmla="val 9615"/>
-            </a:avLst>
-          </a:prstGeom>
-          <a:solidFill>
-            <a:srgbClr val="FFFFFF"/>
-          </a:solidFill>
-          <a:ln w="12700">
-            <a:solidFill>
-              <a:srgbClr val="0D9488"/>
-            </a:solidFill>
-            <a:prstDash val="solid"/>
-          </a:ln>
-        </p:spPr>
-      </p:sp>
-      <p:sp>
-        <p:nvSpPr>
-          <p:cNvPr id="36" name="Text 34"/>
-          <p:cNvSpPr/>
-          <p:nvPr/>
-        </p:nvSpPr>
-        <p:spPr>
-          <a:xfrm>
-            <a:off x="6428232" y="3364992"/>
-            <a:ext cx="1645920" cy="475488"/>
-          </a:xfrm>
-          <a:prstGeom prst="rect">
-            <a:avLst/>
-          </a:prstGeom>
-          <a:noFill/>
-          <a:ln/>
-        </p:spPr>
-        <p:txBody>
-          <a:bodyPr wrap="square" lIns="0" tIns="0" rIns="0" bIns="0" rtlCol="0" anchor="ctr"/>
-          <a:lstStyle/>
-          <a:p>
-            <a:pPr algn="ctr" indent="0" marL="0">
-              <a:buNone/>
-            </a:pPr>
-            <a:r>
-              <a:rPr lang="en-US" sz="1400" b="1" dirty="0">
-                <a:solidFill>
-                  <a:srgbClr val="0D9488"/>
-                </a:solidFill>
-                <a:latin typeface="Trebuchet MS" pitchFamily="34" charset="0"/>
-                <a:ea typeface="Trebuchet MS" pitchFamily="34" charset="-122"/>
-                <a:cs typeface="Trebuchet MS" pitchFamily="34" charset="-120"/>
-              </a:rPr>
-              <a:t>py</a:t>
-            </a:r>
-            <a:endParaRPr lang="en-US" sz="1400" dirty="0"/>
-          </a:p>
-        </p:txBody>
-      </p:sp>
-      <p:sp>
-        <p:nvSpPr>
-          <p:cNvPr id="37" name="Shape 35"/>
-          <p:cNvSpPr/>
-          <p:nvPr/>
-        </p:nvSpPr>
-        <p:spPr>
-          <a:xfrm>
-            <a:off x="365760" y="4096512"/>
-            <a:ext cx="1371600" cy="804672"/>
+            <a:off x="1874520" y="4096512"/>
+            <a:ext cx="6903720" cy="804672"/>
           </a:xfrm>
           <a:prstGeom prst="rect">
             <a:avLst>
@@ -21887,85 +20928,19 @@
             </a:avLst>
           </a:prstGeom>
           <a:solidFill>
-            <a:srgbClr val="E2E8F0"/>
+            <a:srgbClr val="F8FAFC"/>
           </a:solidFill>
           <a:ln w="12700">
             <a:solidFill>
               <a:srgbClr val="E2E8F0"/>
             </a:solidFill>
-            <a:prstDash val="solid"/>
-          </a:ln>
-        </p:spPr>
-      </p:sp>
-      <p:sp>
-        <p:nvSpPr>
-          <p:cNvPr id="38" name="Text 36"/>
-          <p:cNvSpPr/>
-          <p:nvPr/>
-        </p:nvSpPr>
-        <p:spPr>
-          <a:xfrm>
-            <a:off x="365760" y="4096512"/>
-            <a:ext cx="1371600" cy="804672"/>
-          </a:xfrm>
-          <a:prstGeom prst="rect">
-            <a:avLst/>
-          </a:prstGeom>
-          <a:noFill/>
-          <a:ln/>
-        </p:spPr>
-        <p:txBody>
-          <a:bodyPr wrap="square" lIns="0" tIns="0" rIns="0" bIns="0" rtlCol="0" anchor="ctr"/>
-          <a:lstStyle/>
-          <a:p>
-            <a:pPr algn="ctr" indent="0" marL="0">
-              <a:buNone/>
-            </a:pPr>
-            <a:r>
-              <a:rPr lang="en-US" sz="1100" b="1" dirty="0">
-                <a:solidFill>
-                  <a:srgbClr val="475569"/>
-                </a:solidFill>
-                <a:latin typeface="Trebuchet MS" pitchFamily="34" charset="0"/>
-                <a:ea typeface="Trebuchet MS" pitchFamily="34" charset="-122"/>
-                <a:cs typeface="Trebuchet MS" pitchFamily="34" charset="-120"/>
-              </a:rPr>
-              <a:t>Phonemes</a:t>
-            </a:r>
-            <a:endParaRPr lang="en-US" sz="1100" dirty="0"/>
-          </a:p>
-        </p:txBody>
-      </p:sp>
-      <p:sp>
-        <p:nvSpPr>
-          <p:cNvPr id="39" name="Shape 37"/>
-          <p:cNvSpPr/>
-          <p:nvPr/>
-        </p:nvSpPr>
-        <p:spPr>
-          <a:xfrm>
-            <a:off x="1874520" y="4096512"/>
-            <a:ext cx="6903720" cy="804672"/>
-          </a:xfrm>
-          <a:prstGeom prst="rect">
-            <a:avLst>
-              <a:gd name="adj" fmla="val 6818"/>
-            </a:avLst>
-          </a:prstGeom>
-          <a:solidFill>
-            <a:srgbClr val="F8FAFC"/>
-          </a:solidFill>
-          <a:ln w="12700">
-            <a:solidFill>
-              <a:srgbClr val="E2E8F0"/>
-            </a:solidFill>
             <a:prstDash val="dash"/>
           </a:ln>
         </p:spPr>
       </p:sp>
       <p:sp>
         <p:nvSpPr>
-          <p:cNvPr id="40" name="Text 38"/>
+          <p:cNvPr id="33" name="Text 31"/>
           <p:cNvSpPr/>
           <p:nvPr/>
         </p:nvSpPr>
@@ -22427,7 +21402,7 @@
                 <a:ea typeface="Trebuchet MS" pitchFamily="34" charset="-122"/>
                 <a:cs typeface="Trebuchet MS" pitchFamily="34" charset="-120"/>
               </a:rPr>
-              <a:t>unhappy</a:t>
+              <a:t>unkind</a:t>
             </a:r>
             <a:endParaRPr lang="en-US" sz="2800" dirty="0"/>
           </a:p>
@@ -22507,7 +21482,7 @@
         </p:nvSpPr>
         <p:spPr>
           <a:xfrm>
-            <a:off x="2221992" y="2258568"/>
+            <a:off x="2938272" y="2258568"/>
             <a:ext cx="1828800" cy="292608"/>
           </a:xfrm>
           <a:prstGeom prst="rect">
@@ -22541,7 +21516,7 @@
         </p:nvSpPr>
         <p:spPr>
           <a:xfrm>
-            <a:off x="2221992" y="2258568"/>
+            <a:off x="2938272" y="2258568"/>
             <a:ext cx="1828800" cy="292608"/>
           </a:xfrm>
           <a:prstGeom prst="rect">
@@ -22580,7 +21555,7 @@
         </p:nvSpPr>
         <p:spPr>
           <a:xfrm>
-            <a:off x="2221992" y="2569464"/>
+            <a:off x="2938272" y="2569464"/>
             <a:ext cx="1828800" cy="201168"/>
           </a:xfrm>
           <a:prstGeom prst="rect">
@@ -22619,7 +21594,7 @@
         </p:nvSpPr>
         <p:spPr>
           <a:xfrm>
-            <a:off x="4370832" y="2258568"/>
+            <a:off x="5803392" y="2258568"/>
             <a:ext cx="1828800" cy="292608"/>
           </a:xfrm>
           <a:prstGeom prst="rect">
@@ -22653,7 +21628,7 @@
         </p:nvSpPr>
         <p:spPr>
           <a:xfrm>
-            <a:off x="4370832" y="2258568"/>
+            <a:off x="5803392" y="2258568"/>
             <a:ext cx="1828800" cy="292608"/>
           </a:xfrm>
           <a:prstGeom prst="rect">
@@ -22678,7 +21653,7 @@
                 <a:ea typeface="Trebuchet MS" pitchFamily="34" charset="-122"/>
                 <a:cs typeface="Trebuchet MS" pitchFamily="34" charset="-120"/>
               </a:rPr>
-              <a:t>happ</a:t>
+              <a:t>kind</a:t>
             </a:r>
             <a:endParaRPr lang="en-US" sz="1300" dirty="0"/>
           </a:p>
@@ -22692,7 +21667,7 @@
         </p:nvSpPr>
         <p:spPr>
           <a:xfrm>
-            <a:off x="4370832" y="2569464"/>
+            <a:off x="5803392" y="2569464"/>
             <a:ext cx="1828800" cy="201168"/>
           </a:xfrm>
           <a:prstGeom prst="rect">
@@ -22717,7 +21692,7 @@
                 <a:ea typeface="Calibri" pitchFamily="34" charset="-122"/>
                 <a:cs typeface="Calibri" pitchFamily="34" charset="-120"/>
               </a:rPr>
-              <a:t>lucky, fortunate</a:t>
+              <a:t>gentle and caring</a:t>
             </a:r>
             <a:endParaRPr lang="en-US" sz="850" dirty="0"/>
           </a:p>
@@ -22731,30 +21706,23 @@
         </p:nvSpPr>
         <p:spPr>
           <a:xfrm>
-            <a:off x="6519672" y="2258568"/>
-            <a:ext cx="1828800" cy="292608"/>
+            <a:off x="365760" y="3273552"/>
+            <a:ext cx="1371600" cy="658368"/>
           </a:xfrm>
           <a:prstGeom prst="rect">
             <a:avLst>
-              <a:gd name="adj" fmla="val 25000"/>
+              <a:gd name="adj" fmla="val 8333"/>
             </a:avLst>
           </a:prstGeom>
           <a:solidFill>
-            <a:srgbClr val="FCE7F3"/>
-          </a:solidFill>
-          <a:ln w="19050">
-            <a:solidFill>
-              <a:srgbClr val="DB2777"/>
-            </a:solidFill>
-            <a:prstDash val="solid"/>
-          </a:ln>
-          <a:effectLst>
-            <a:outerShdw sx="100000" sy="100000" kx="0" ky="0" algn="bl" rotWithShape="0" blurRad="101600" dist="38100" dir="8100000">
-              <a:srgbClr val="000000">
-                <a:alpha val="12000"/>
-              </a:srgbClr>
-            </a:outerShdw>
-          </a:effectLst>
+            <a:srgbClr val="E2E8F0"/>
+          </a:solidFill>
+          <a:ln w="12700">
+            <a:solidFill>
+              <a:srgbClr val="E2E8F0"/>
+            </a:solidFill>
+            <a:prstDash val="solid"/>
+          </a:ln>
         </p:spPr>
       </p:sp>
       <p:sp>
@@ -22765,125 +21733,47 @@
         </p:nvSpPr>
         <p:spPr>
           <a:xfrm>
-            <a:off x="6519672" y="2258568"/>
-            <a:ext cx="1828800" cy="292608"/>
-          </a:xfrm>
-          <a:prstGeom prst="rect">
-            <a:avLst/>
-          </a:prstGeom>
-          <a:noFill/>
-          <a:ln/>
-        </p:spPr>
-        <p:txBody>
-          <a:bodyPr wrap="square" lIns="0" tIns="0" rIns="0" bIns="0" rtlCol="0" anchor="ctr"/>
-          <a:lstStyle/>
-          <a:p>
-            <a:pPr algn="ctr" indent="0" marL="0">
-              <a:buNone/>
-            </a:pPr>
-            <a:r>
-              <a:rPr lang="en-US" sz="1300" b="1" dirty="0">
-                <a:solidFill>
-                  <a:srgbClr val="9D174D"/>
+            <a:off x="365760" y="3273552"/>
+            <a:ext cx="1371600" cy="658368"/>
+          </a:xfrm>
+          <a:prstGeom prst="rect">
+            <a:avLst/>
+          </a:prstGeom>
+          <a:noFill/>
+          <a:ln/>
+        </p:spPr>
+        <p:txBody>
+          <a:bodyPr wrap="square" lIns="0" tIns="0" rIns="0" bIns="0" rtlCol="0" anchor="ctr"/>
+          <a:lstStyle/>
+          <a:p>
+            <a:pPr algn="ctr" indent="0" marL="0">
+              <a:buNone/>
+            </a:pPr>
+            <a:r>
+              <a:rPr lang="en-US" sz="1100" b="1" dirty="0">
+                <a:solidFill>
+                  <a:srgbClr val="475569"/>
                 </a:solidFill>
                 <a:latin typeface="Trebuchet MS" pitchFamily="34" charset="0"/>
                 <a:ea typeface="Trebuchet MS" pitchFamily="34" charset="-122"/>
                 <a:cs typeface="Trebuchet MS" pitchFamily="34" charset="-120"/>
               </a:rPr>
-              <a:t>y</a:t>
-            </a:r>
-            <a:endParaRPr lang="en-US" sz="1300" dirty="0"/>
-          </a:p>
-        </p:txBody>
-      </p:sp>
-      <p:sp>
-        <p:nvSpPr>
-          <p:cNvPr id="24" name="Text 22"/>
-          <p:cNvSpPr/>
-          <p:nvPr/>
-        </p:nvSpPr>
-        <p:spPr>
-          <a:xfrm>
-            <a:off x="6519672" y="2569464"/>
-            <a:ext cx="1828800" cy="201168"/>
-          </a:xfrm>
-          <a:prstGeom prst="rect">
-            <a:avLst/>
-          </a:prstGeom>
-          <a:noFill/>
-          <a:ln/>
-        </p:spPr>
-        <p:txBody>
-          <a:bodyPr wrap="square" lIns="0" tIns="0" rIns="0" bIns="0" rtlCol="0" anchor="t"/>
-          <a:lstStyle/>
-          <a:p>
-            <a:pPr algn="ctr" indent="0" marL="0">
-              <a:buNone/>
-            </a:pPr>
-            <a:r>
-              <a:rPr lang="en-US" sz="850" dirty="0">
-                <a:solidFill>
-                  <a:srgbClr val="475569"/>
-                </a:solidFill>
-                <a:latin typeface="Calibri" pitchFamily="34" charset="0"/>
-                <a:ea typeface="Calibri" pitchFamily="34" charset="-122"/>
-                <a:cs typeface="Calibri" pitchFamily="34" charset="-120"/>
-              </a:rPr>
-              <a:t>having the quality of</a:t>
-            </a:r>
-            <a:endParaRPr lang="en-US" sz="850" dirty="0"/>
-          </a:p>
-        </p:txBody>
-      </p:sp>
-      <p:sp>
-        <p:nvSpPr>
-          <p:cNvPr id="25" name="Text 23"/>
-          <p:cNvSpPr/>
-          <p:nvPr/>
-        </p:nvSpPr>
-        <p:spPr>
-          <a:xfrm>
-            <a:off x="6519672" y="2752344"/>
-            <a:ext cx="1828800" cy="182880"/>
-          </a:xfrm>
-          <a:prstGeom prst="rect">
-            <a:avLst/>
-          </a:prstGeom>
-          <a:noFill/>
-          <a:ln/>
-        </p:spPr>
-        <p:txBody>
-          <a:bodyPr wrap="square" lIns="0" tIns="0" rIns="0" bIns="0" rtlCol="0" anchor="t"/>
-          <a:lstStyle/>
-          <a:p>
-            <a:pPr algn="ctr" indent="0" marL="0">
-              <a:buNone/>
-            </a:pPr>
-            <a:r>
-              <a:rPr lang="en-US" sz="700" i="1" dirty="0">
-                <a:solidFill>
-                  <a:srgbClr val="94A3B8"/>
-                </a:solidFill>
-                <a:latin typeface="Calibri" pitchFamily="34" charset="0"/>
-                <a:ea typeface="Calibri" pitchFamily="34" charset="-122"/>
-                <a:cs typeface="Calibri" pitchFamily="34" charset="-120"/>
-              </a:rPr>
-              <a:t>'y' added to base; 'i' before 'y' rule does not apply here</a:t>
-            </a:r>
-            <a:endParaRPr lang="en-US" sz="700" dirty="0"/>
-          </a:p>
-        </p:txBody>
-      </p:sp>
-      <p:sp>
-        <p:nvSpPr>
-          <p:cNvPr id="26" name="Shape 24"/>
-          <p:cNvSpPr/>
-          <p:nvPr/>
-        </p:nvSpPr>
-        <p:spPr>
-          <a:xfrm>
-            <a:off x="365760" y="3273552"/>
-            <a:ext cx="1371600" cy="658368"/>
+              <a:t>Syllables</a:t>
+            </a:r>
+            <a:endParaRPr lang="en-US" sz="1100" dirty="0"/>
+          </a:p>
+        </p:txBody>
+      </p:sp>
+      <p:sp>
+        <p:nvSpPr>
+          <p:cNvPr id="24" name="Shape 22"/>
+          <p:cNvSpPr/>
+          <p:nvPr/>
+        </p:nvSpPr>
+        <p:spPr>
+          <a:xfrm>
+            <a:off x="1874520" y="3273552"/>
+            <a:ext cx="6903720" cy="658368"/>
           </a:xfrm>
           <a:prstGeom prst="rect">
             <a:avLst>
@@ -22891,50 +21781,248 @@
             </a:avLst>
           </a:prstGeom>
           <a:solidFill>
-            <a:srgbClr val="E2E8F0"/>
-          </a:solidFill>
-          <a:ln w="12700">
-            <a:solidFill>
-              <a:srgbClr val="E2E8F0"/>
-            </a:solidFill>
-            <a:prstDash val="solid"/>
-          </a:ln>
-        </p:spPr>
-      </p:sp>
-      <p:sp>
-        <p:nvSpPr>
-          <p:cNvPr id="27" name="Text 25"/>
-          <p:cNvSpPr/>
-          <p:nvPr/>
-        </p:nvSpPr>
-        <p:spPr>
-          <a:xfrm>
-            <a:off x="365760" y="3273552"/>
-            <a:ext cx="1371600" cy="658368"/>
-          </a:xfrm>
-          <a:prstGeom prst="rect">
-            <a:avLst/>
-          </a:prstGeom>
-          <a:noFill/>
-          <a:ln/>
-        </p:spPr>
-        <p:txBody>
-          <a:bodyPr wrap="square" lIns="0" tIns="0" rIns="0" bIns="0" rtlCol="0" anchor="ctr"/>
-          <a:lstStyle/>
-          <a:p>
-            <a:pPr algn="ctr" indent="0" marL="0">
-              <a:buNone/>
-            </a:pPr>
-            <a:r>
-              <a:rPr lang="en-US" sz="1100" b="1" dirty="0">
-                <a:solidFill>
-                  <a:srgbClr val="475569"/>
+            <a:srgbClr val="CCFBF1"/>
+          </a:solidFill>
+          <a:ln w="12700">
+            <a:solidFill>
+              <a:srgbClr val="0D9488"/>
+            </a:solidFill>
+            <a:prstDash val="solid"/>
+          </a:ln>
+        </p:spPr>
+      </p:sp>
+      <p:sp>
+        <p:nvSpPr>
+          <p:cNvPr id="25" name="Shape 23"/>
+          <p:cNvSpPr/>
+          <p:nvPr/>
+        </p:nvSpPr>
+        <p:spPr>
+          <a:xfrm>
+            <a:off x="2999232" y="3364992"/>
+            <a:ext cx="1645920" cy="475488"/>
+          </a:xfrm>
+          <a:prstGeom prst="rect">
+            <a:avLst>
+              <a:gd name="adj" fmla="val 9615"/>
+            </a:avLst>
+          </a:prstGeom>
+          <a:solidFill>
+            <a:srgbClr val="FFFFFF"/>
+          </a:solidFill>
+          <a:ln w="12700">
+            <a:solidFill>
+              <a:srgbClr val="0D9488"/>
+            </a:solidFill>
+            <a:prstDash val="solid"/>
+          </a:ln>
+        </p:spPr>
+      </p:sp>
+      <p:sp>
+        <p:nvSpPr>
+          <p:cNvPr id="26" name="Text 24"/>
+          <p:cNvSpPr/>
+          <p:nvPr/>
+        </p:nvSpPr>
+        <p:spPr>
+          <a:xfrm>
+            <a:off x="2999232" y="3364992"/>
+            <a:ext cx="1645920" cy="475488"/>
+          </a:xfrm>
+          <a:prstGeom prst="rect">
+            <a:avLst/>
+          </a:prstGeom>
+          <a:noFill/>
+          <a:ln/>
+        </p:spPr>
+        <p:txBody>
+          <a:bodyPr wrap="square" lIns="0" tIns="0" rIns="0" bIns="0" rtlCol="0" anchor="ctr"/>
+          <a:lstStyle/>
+          <a:p>
+            <a:pPr algn="ctr" indent="0" marL="0">
+              <a:buNone/>
+            </a:pPr>
+            <a:r>
+              <a:rPr lang="en-US" sz="1400" b="1" dirty="0">
+                <a:solidFill>
+                  <a:srgbClr val="0D9488"/>
                 </a:solidFill>
                 <a:latin typeface="Trebuchet MS" pitchFamily="34" charset="0"/>
                 <a:ea typeface="Trebuchet MS" pitchFamily="34" charset="-122"/>
                 <a:cs typeface="Trebuchet MS" pitchFamily="34" charset="-120"/>
               </a:rPr>
-              <a:t>Syllables</a:t>
+              <a:t>un</a:t>
+            </a:r>
+            <a:endParaRPr lang="en-US" sz="1400" dirty="0"/>
+          </a:p>
+        </p:txBody>
+      </p:sp>
+      <p:sp>
+        <p:nvSpPr>
+          <p:cNvPr id="27" name="Text 25"/>
+          <p:cNvSpPr/>
+          <p:nvPr/>
+        </p:nvSpPr>
+        <p:spPr>
+          <a:xfrm>
+            <a:off x="4645152" y="3364992"/>
+            <a:ext cx="1097280" cy="475488"/>
+          </a:xfrm>
+          <a:prstGeom prst="rect">
+            <a:avLst/>
+          </a:prstGeom>
+          <a:noFill/>
+          <a:ln/>
+        </p:spPr>
+        <p:txBody>
+          <a:bodyPr wrap="square" lIns="0" tIns="0" rIns="0" bIns="0" rtlCol="0" anchor="ctr"/>
+          <a:lstStyle/>
+          <a:p>
+            <a:pPr algn="ctr" indent="0" marL="0">
+              <a:buNone/>
+            </a:pPr>
+            <a:r>
+              <a:rPr lang="en-US" sz="1600" b="1" dirty="0">
+                <a:solidFill>
+                  <a:srgbClr val="0D9488"/>
+                </a:solidFill>
+                <a:latin typeface="Trebuchet MS" pitchFamily="34" charset="0"/>
+                <a:ea typeface="Trebuchet MS" pitchFamily="34" charset="-122"/>
+                <a:cs typeface="Trebuchet MS" pitchFamily="34" charset="-120"/>
+              </a:rPr>
+              <a:t>·</a:t>
+            </a:r>
+            <a:endParaRPr lang="en-US" sz="1600" dirty="0"/>
+          </a:p>
+        </p:txBody>
+      </p:sp>
+      <p:sp>
+        <p:nvSpPr>
+          <p:cNvPr id="28" name="Shape 26"/>
+          <p:cNvSpPr/>
+          <p:nvPr/>
+        </p:nvSpPr>
+        <p:spPr>
+          <a:xfrm>
+            <a:off x="5742432" y="3364992"/>
+            <a:ext cx="1645920" cy="475488"/>
+          </a:xfrm>
+          <a:prstGeom prst="rect">
+            <a:avLst>
+              <a:gd name="adj" fmla="val 9615"/>
+            </a:avLst>
+          </a:prstGeom>
+          <a:solidFill>
+            <a:srgbClr val="FFFFFF"/>
+          </a:solidFill>
+          <a:ln w="12700">
+            <a:solidFill>
+              <a:srgbClr val="0D9488"/>
+            </a:solidFill>
+            <a:prstDash val="solid"/>
+          </a:ln>
+        </p:spPr>
+      </p:sp>
+      <p:sp>
+        <p:nvSpPr>
+          <p:cNvPr id="29" name="Text 27"/>
+          <p:cNvSpPr/>
+          <p:nvPr/>
+        </p:nvSpPr>
+        <p:spPr>
+          <a:xfrm>
+            <a:off x="5742432" y="3364992"/>
+            <a:ext cx="1645920" cy="475488"/>
+          </a:xfrm>
+          <a:prstGeom prst="rect">
+            <a:avLst/>
+          </a:prstGeom>
+          <a:noFill/>
+          <a:ln/>
+        </p:spPr>
+        <p:txBody>
+          <a:bodyPr wrap="square" lIns="0" tIns="0" rIns="0" bIns="0" rtlCol="0" anchor="ctr"/>
+          <a:lstStyle/>
+          <a:p>
+            <a:pPr algn="ctr" indent="0" marL="0">
+              <a:buNone/>
+            </a:pPr>
+            <a:r>
+              <a:rPr lang="en-US" sz="1400" b="1" dirty="0">
+                <a:solidFill>
+                  <a:srgbClr val="0D9488"/>
+                </a:solidFill>
+                <a:latin typeface="Trebuchet MS" pitchFamily="34" charset="0"/>
+                <a:ea typeface="Trebuchet MS" pitchFamily="34" charset="-122"/>
+                <a:cs typeface="Trebuchet MS" pitchFamily="34" charset="-120"/>
+              </a:rPr>
+              <a:t>kind</a:t>
+            </a:r>
+            <a:endParaRPr lang="en-US" sz="1400" dirty="0"/>
+          </a:p>
+        </p:txBody>
+      </p:sp>
+      <p:sp>
+        <p:nvSpPr>
+          <p:cNvPr id="30" name="Shape 28"/>
+          <p:cNvSpPr/>
+          <p:nvPr/>
+        </p:nvSpPr>
+        <p:spPr>
+          <a:xfrm>
+            <a:off x="365760" y="4096512"/>
+            <a:ext cx="1371600" cy="804672"/>
+          </a:xfrm>
+          <a:prstGeom prst="rect">
+            <a:avLst>
+              <a:gd name="adj" fmla="val 6818"/>
+            </a:avLst>
+          </a:prstGeom>
+          <a:solidFill>
+            <a:srgbClr val="E2E8F0"/>
+          </a:solidFill>
+          <a:ln w="12700">
+            <a:solidFill>
+              <a:srgbClr val="E2E8F0"/>
+            </a:solidFill>
+            <a:prstDash val="solid"/>
+          </a:ln>
+        </p:spPr>
+      </p:sp>
+      <p:sp>
+        <p:nvSpPr>
+          <p:cNvPr id="31" name="Text 29"/>
+          <p:cNvSpPr/>
+          <p:nvPr/>
+        </p:nvSpPr>
+        <p:spPr>
+          <a:xfrm>
+            <a:off x="365760" y="4096512"/>
+            <a:ext cx="1371600" cy="804672"/>
+          </a:xfrm>
+          <a:prstGeom prst="rect">
+            <a:avLst/>
+          </a:prstGeom>
+          <a:noFill/>
+          <a:ln/>
+        </p:spPr>
+        <p:txBody>
+          <a:bodyPr wrap="square" lIns="0" tIns="0" rIns="0" bIns="0" rtlCol="0" anchor="ctr"/>
+          <a:lstStyle/>
+          <a:p>
+            <a:pPr algn="ctr" indent="0" marL="0">
+              <a:buNone/>
+            </a:pPr>
+            <a:r>
+              <a:rPr lang="en-US" sz="1100" b="1" dirty="0">
+                <a:solidFill>
+                  <a:srgbClr val="475569"/>
+                </a:solidFill>
+                <a:latin typeface="Trebuchet MS" pitchFamily="34" charset="0"/>
+                <a:ea typeface="Trebuchet MS" pitchFamily="34" charset="-122"/>
+                <a:cs typeface="Trebuchet MS" pitchFamily="34" charset="-120"/>
+              </a:rPr>
+              <a:t>Phonemes</a:t>
             </a:r>
             <a:endParaRPr lang="en-US" sz="1100" dirty="0"/>
           </a:p>
@@ -22942,13 +22030,13 @@
       </p:sp>
       <p:sp>
         <p:nvSpPr>
-          <p:cNvPr id="28" name="Shape 26"/>
-          <p:cNvSpPr/>
-          <p:nvPr/>
-        </p:nvSpPr>
-        <p:spPr>
-          <a:xfrm>
-            <a:off x="1874520" y="3273552"/>
+          <p:cNvPr id="32" name="Shape 30"/>
+          <p:cNvSpPr/>
+          <p:nvPr/>
+        </p:nvSpPr>
+        <p:spPr>
+          <a:xfrm>
+            <a:off x="1874520" y="4096512"/>
             <a:ext cx="6903720" cy="658368"/>
           </a:xfrm>
           <a:prstGeom prst="rect">
@@ -22957,30 +22045,30 @@
             </a:avLst>
           </a:prstGeom>
           <a:solidFill>
-            <a:srgbClr val="CCFBF1"/>
-          </a:solidFill>
-          <a:ln w="12700">
-            <a:solidFill>
-              <a:srgbClr val="0D9488"/>
-            </a:solidFill>
-            <a:prstDash val="solid"/>
-          </a:ln>
-        </p:spPr>
-      </p:sp>
-      <p:sp>
-        <p:nvSpPr>
-          <p:cNvPr id="29" name="Shape 27"/>
-          <p:cNvSpPr/>
-          <p:nvPr/>
-        </p:nvSpPr>
-        <p:spPr>
-          <a:xfrm>
-            <a:off x="2313432" y="3364992"/>
-            <a:ext cx="1645920" cy="475488"/>
+            <a:srgbClr val="FCE7F3"/>
+          </a:solidFill>
+          <a:ln w="12700">
+            <a:solidFill>
+              <a:srgbClr val="DB2777"/>
+            </a:solidFill>
+            <a:prstDash val="solid"/>
+          </a:ln>
+        </p:spPr>
+      </p:sp>
+      <p:sp>
+        <p:nvSpPr>
+          <p:cNvPr id="33" name="Shape 31"/>
+          <p:cNvSpPr/>
+          <p:nvPr/>
+        </p:nvSpPr>
+        <p:spPr>
+          <a:xfrm>
+            <a:off x="2427732" y="4169664"/>
+            <a:ext cx="685800" cy="475488"/>
           </a:xfrm>
           <a:prstGeom prst="rect">
             <a:avLst>
-              <a:gd name="adj" fmla="val 9615"/>
+              <a:gd name="adj" fmla="val 7692"/>
             </a:avLst>
           </a:prstGeom>
           <a:solidFill>
@@ -22988,104 +22076,131 @@
           </a:solidFill>
           <a:ln w="12700">
             <a:solidFill>
-              <a:srgbClr val="0D9488"/>
-            </a:solidFill>
-            <a:prstDash val="solid"/>
-          </a:ln>
-        </p:spPr>
-      </p:sp>
-      <p:sp>
-        <p:nvSpPr>
-          <p:cNvPr id="30" name="Text 28"/>
-          <p:cNvSpPr/>
-          <p:nvPr/>
-        </p:nvSpPr>
-        <p:spPr>
-          <a:xfrm>
-            <a:off x="2313432" y="3364992"/>
-            <a:ext cx="1645920" cy="475488"/>
-          </a:xfrm>
-          <a:prstGeom prst="rect">
-            <a:avLst/>
-          </a:prstGeom>
-          <a:noFill/>
-          <a:ln/>
-        </p:spPr>
-        <p:txBody>
-          <a:bodyPr wrap="square" lIns="0" tIns="0" rIns="0" bIns="0" rtlCol="0" anchor="ctr"/>
-          <a:lstStyle/>
-          <a:p>
-            <a:pPr algn="ctr" indent="0" marL="0">
-              <a:buNone/>
-            </a:pPr>
-            <a:r>
-              <a:rPr lang="en-US" sz="1400" b="1" dirty="0">
-                <a:solidFill>
-                  <a:srgbClr val="0D9488"/>
+              <a:srgbClr val="DB2777"/>
+            </a:solidFill>
+            <a:prstDash val="solid"/>
+          </a:ln>
+        </p:spPr>
+      </p:sp>
+      <p:sp>
+        <p:nvSpPr>
+          <p:cNvPr id="34" name="Text 32"/>
+          <p:cNvSpPr/>
+          <p:nvPr/>
+        </p:nvSpPr>
+        <p:spPr>
+          <a:xfrm>
+            <a:off x="2427732" y="4169664"/>
+            <a:ext cx="685800" cy="475488"/>
+          </a:xfrm>
+          <a:prstGeom prst="rect">
+            <a:avLst/>
+          </a:prstGeom>
+          <a:noFill/>
+          <a:ln/>
+        </p:spPr>
+        <p:txBody>
+          <a:bodyPr wrap="square" lIns="0" tIns="0" rIns="0" bIns="0" rtlCol="0" anchor="ctr"/>
+          <a:lstStyle/>
+          <a:p>
+            <a:pPr algn="ctr" indent="0" marL="0">
+              <a:buNone/>
+            </a:pPr>
+            <a:r>
+              <a:rPr lang="en-US" sz="900" b="1" dirty="0">
+                <a:solidFill>
+                  <a:srgbClr val="9D174D"/>
                 </a:solidFill>
                 <a:latin typeface="Trebuchet MS" pitchFamily="34" charset="0"/>
                 <a:ea typeface="Trebuchet MS" pitchFamily="34" charset="-122"/>
                 <a:cs typeface="Trebuchet MS" pitchFamily="34" charset="-120"/>
               </a:rPr>
-              <a:t>un</a:t>
-            </a:r>
-            <a:endParaRPr lang="en-US" sz="1400" dirty="0"/>
-          </a:p>
-        </p:txBody>
-      </p:sp>
-      <p:sp>
-        <p:nvSpPr>
-          <p:cNvPr id="31" name="Text 29"/>
-          <p:cNvSpPr/>
-          <p:nvPr/>
-        </p:nvSpPr>
-        <p:spPr>
-          <a:xfrm>
-            <a:off x="3959352" y="3364992"/>
-            <a:ext cx="411480" cy="475488"/>
-          </a:xfrm>
-          <a:prstGeom prst="rect">
-            <a:avLst/>
-          </a:prstGeom>
-          <a:noFill/>
-          <a:ln/>
-        </p:spPr>
-        <p:txBody>
-          <a:bodyPr wrap="square" lIns="0" tIns="0" rIns="0" bIns="0" rtlCol="0" anchor="ctr"/>
-          <a:lstStyle/>
-          <a:p>
-            <a:pPr algn="ctr" indent="0" marL="0">
-              <a:buNone/>
-            </a:pPr>
-            <a:r>
-              <a:rPr lang="en-US" sz="1600" b="1" dirty="0">
-                <a:solidFill>
-                  <a:srgbClr val="0D9488"/>
+              <a:t>u</a:t>
+            </a:r>
+            <a:endParaRPr lang="en-US" sz="900" dirty="0"/>
+          </a:p>
+        </p:txBody>
+      </p:sp>
+      <p:sp>
+        <p:nvSpPr>
+          <p:cNvPr id="35" name="Shape 33"/>
+          <p:cNvSpPr/>
+          <p:nvPr/>
+        </p:nvSpPr>
+        <p:spPr>
+          <a:xfrm>
+            <a:off x="3639312" y="4169664"/>
+            <a:ext cx="685800" cy="475488"/>
+          </a:xfrm>
+          <a:prstGeom prst="rect">
+            <a:avLst>
+              <a:gd name="adj" fmla="val 7692"/>
+            </a:avLst>
+          </a:prstGeom>
+          <a:solidFill>
+            <a:srgbClr val="FFFFFF"/>
+          </a:solidFill>
+          <a:ln w="12700">
+            <a:solidFill>
+              <a:srgbClr val="DB2777"/>
+            </a:solidFill>
+            <a:prstDash val="solid"/>
+          </a:ln>
+        </p:spPr>
+      </p:sp>
+      <p:sp>
+        <p:nvSpPr>
+          <p:cNvPr id="36" name="Text 34"/>
+          <p:cNvSpPr/>
+          <p:nvPr/>
+        </p:nvSpPr>
+        <p:spPr>
+          <a:xfrm>
+            <a:off x="3639312" y="4169664"/>
+            <a:ext cx="685800" cy="475488"/>
+          </a:xfrm>
+          <a:prstGeom prst="rect">
+            <a:avLst/>
+          </a:prstGeom>
+          <a:noFill/>
+          <a:ln/>
+        </p:spPr>
+        <p:txBody>
+          <a:bodyPr wrap="square" lIns="0" tIns="0" rIns="0" bIns="0" rtlCol="0" anchor="ctr"/>
+          <a:lstStyle/>
+          <a:p>
+            <a:pPr algn="ctr" indent="0" marL="0">
+              <a:buNone/>
+            </a:pPr>
+            <a:r>
+              <a:rPr lang="en-US" sz="900" b="1" dirty="0">
+                <a:solidFill>
+                  <a:srgbClr val="9D174D"/>
                 </a:solidFill>
                 <a:latin typeface="Trebuchet MS" pitchFamily="34" charset="0"/>
                 <a:ea typeface="Trebuchet MS" pitchFamily="34" charset="-122"/>
                 <a:cs typeface="Trebuchet MS" pitchFamily="34" charset="-120"/>
               </a:rPr>
-              <a:t>·</a:t>
-            </a:r>
-            <a:endParaRPr lang="en-US" sz="1600" dirty="0"/>
-          </a:p>
-        </p:txBody>
-      </p:sp>
-      <p:sp>
-        <p:nvSpPr>
-          <p:cNvPr id="32" name="Shape 30"/>
-          <p:cNvSpPr/>
-          <p:nvPr/>
-        </p:nvSpPr>
-        <p:spPr>
-          <a:xfrm>
-            <a:off x="4370832" y="3364992"/>
-            <a:ext cx="1645920" cy="475488"/>
+              <a:t>n</a:t>
+            </a:r>
+            <a:endParaRPr lang="en-US" sz="900" dirty="0"/>
+          </a:p>
+        </p:txBody>
+      </p:sp>
+      <p:sp>
+        <p:nvSpPr>
+          <p:cNvPr id="37" name="Shape 35"/>
+          <p:cNvSpPr/>
+          <p:nvPr/>
+        </p:nvSpPr>
+        <p:spPr>
+          <a:xfrm>
+            <a:off x="4850892" y="4169664"/>
+            <a:ext cx="685800" cy="475488"/>
           </a:xfrm>
           <a:prstGeom prst="rect">
             <a:avLst>
-              <a:gd name="adj" fmla="val 9615"/>
+              <a:gd name="adj" fmla="val 7692"/>
             </a:avLst>
           </a:prstGeom>
           <a:solidFill>
@@ -23093,104 +22208,131 @@
           </a:solidFill>
           <a:ln w="12700">
             <a:solidFill>
-              <a:srgbClr val="0D9488"/>
-            </a:solidFill>
-            <a:prstDash val="solid"/>
-          </a:ln>
-        </p:spPr>
-      </p:sp>
-      <p:sp>
-        <p:nvSpPr>
-          <p:cNvPr id="33" name="Text 31"/>
-          <p:cNvSpPr/>
-          <p:nvPr/>
-        </p:nvSpPr>
-        <p:spPr>
-          <a:xfrm>
-            <a:off x="4370832" y="3364992"/>
-            <a:ext cx="1645920" cy="475488"/>
-          </a:xfrm>
-          <a:prstGeom prst="rect">
-            <a:avLst/>
-          </a:prstGeom>
-          <a:noFill/>
-          <a:ln/>
-        </p:spPr>
-        <p:txBody>
-          <a:bodyPr wrap="square" lIns="0" tIns="0" rIns="0" bIns="0" rtlCol="0" anchor="ctr"/>
-          <a:lstStyle/>
-          <a:p>
-            <a:pPr algn="ctr" indent="0" marL="0">
-              <a:buNone/>
-            </a:pPr>
-            <a:r>
-              <a:rPr lang="en-US" sz="1400" b="1" dirty="0">
-                <a:solidFill>
-                  <a:srgbClr val="0D9488"/>
+              <a:srgbClr val="DB2777"/>
+            </a:solidFill>
+            <a:prstDash val="solid"/>
+          </a:ln>
+        </p:spPr>
+      </p:sp>
+      <p:sp>
+        <p:nvSpPr>
+          <p:cNvPr id="38" name="Text 36"/>
+          <p:cNvSpPr/>
+          <p:nvPr/>
+        </p:nvSpPr>
+        <p:spPr>
+          <a:xfrm>
+            <a:off x="4850892" y="4169664"/>
+            <a:ext cx="685800" cy="475488"/>
+          </a:xfrm>
+          <a:prstGeom prst="rect">
+            <a:avLst/>
+          </a:prstGeom>
+          <a:noFill/>
+          <a:ln/>
+        </p:spPr>
+        <p:txBody>
+          <a:bodyPr wrap="square" lIns="0" tIns="0" rIns="0" bIns="0" rtlCol="0" anchor="ctr"/>
+          <a:lstStyle/>
+          <a:p>
+            <a:pPr algn="ctr" indent="0" marL="0">
+              <a:buNone/>
+            </a:pPr>
+            <a:r>
+              <a:rPr lang="en-US" sz="900" b="1" dirty="0">
+                <a:solidFill>
+                  <a:srgbClr val="9D174D"/>
                 </a:solidFill>
                 <a:latin typeface="Trebuchet MS" pitchFamily="34" charset="0"/>
                 <a:ea typeface="Trebuchet MS" pitchFamily="34" charset="-122"/>
                 <a:cs typeface="Trebuchet MS" pitchFamily="34" charset="-120"/>
               </a:rPr>
-              <a:t>hap</a:t>
-            </a:r>
-            <a:endParaRPr lang="en-US" sz="1400" dirty="0"/>
-          </a:p>
-        </p:txBody>
-      </p:sp>
-      <p:sp>
-        <p:nvSpPr>
-          <p:cNvPr id="34" name="Text 32"/>
-          <p:cNvSpPr/>
-          <p:nvPr/>
-        </p:nvSpPr>
-        <p:spPr>
-          <a:xfrm>
-            <a:off x="6016752" y="3364992"/>
-            <a:ext cx="411480" cy="475488"/>
-          </a:xfrm>
-          <a:prstGeom prst="rect">
-            <a:avLst/>
-          </a:prstGeom>
-          <a:noFill/>
-          <a:ln/>
-        </p:spPr>
-        <p:txBody>
-          <a:bodyPr wrap="square" lIns="0" tIns="0" rIns="0" bIns="0" rtlCol="0" anchor="ctr"/>
-          <a:lstStyle/>
-          <a:p>
-            <a:pPr algn="ctr" indent="0" marL="0">
-              <a:buNone/>
-            </a:pPr>
-            <a:r>
-              <a:rPr lang="en-US" sz="1600" b="1" dirty="0">
-                <a:solidFill>
-                  <a:srgbClr val="0D9488"/>
+              <a:t>k</a:t>
+            </a:r>
+            <a:endParaRPr lang="en-US" sz="900" dirty="0"/>
+          </a:p>
+        </p:txBody>
+      </p:sp>
+      <p:sp>
+        <p:nvSpPr>
+          <p:cNvPr id="39" name="Shape 37"/>
+          <p:cNvSpPr/>
+          <p:nvPr/>
+        </p:nvSpPr>
+        <p:spPr>
+          <a:xfrm>
+            <a:off x="6062472" y="4169664"/>
+            <a:ext cx="685800" cy="475488"/>
+          </a:xfrm>
+          <a:prstGeom prst="rect">
+            <a:avLst>
+              <a:gd name="adj" fmla="val 7692"/>
+            </a:avLst>
+          </a:prstGeom>
+          <a:solidFill>
+            <a:srgbClr val="FFFFFF"/>
+          </a:solidFill>
+          <a:ln w="12700">
+            <a:solidFill>
+              <a:srgbClr val="DB2777"/>
+            </a:solidFill>
+            <a:prstDash val="solid"/>
+          </a:ln>
+        </p:spPr>
+      </p:sp>
+      <p:sp>
+        <p:nvSpPr>
+          <p:cNvPr id="40" name="Text 38"/>
+          <p:cNvSpPr/>
+          <p:nvPr/>
+        </p:nvSpPr>
+        <p:spPr>
+          <a:xfrm>
+            <a:off x="6062472" y="4169664"/>
+            <a:ext cx="685800" cy="475488"/>
+          </a:xfrm>
+          <a:prstGeom prst="rect">
+            <a:avLst/>
+          </a:prstGeom>
+          <a:noFill/>
+          <a:ln/>
+        </p:spPr>
+        <p:txBody>
+          <a:bodyPr wrap="square" lIns="0" tIns="0" rIns="0" bIns="0" rtlCol="0" anchor="ctr"/>
+          <a:lstStyle/>
+          <a:p>
+            <a:pPr algn="ctr" indent="0" marL="0">
+              <a:buNone/>
+            </a:pPr>
+            <a:r>
+              <a:rPr lang="en-US" sz="900" b="1" dirty="0">
+                <a:solidFill>
+                  <a:srgbClr val="9D174D"/>
                 </a:solidFill>
                 <a:latin typeface="Trebuchet MS" pitchFamily="34" charset="0"/>
                 <a:ea typeface="Trebuchet MS" pitchFamily="34" charset="-122"/>
                 <a:cs typeface="Trebuchet MS" pitchFamily="34" charset="-120"/>
               </a:rPr>
-              <a:t>·</a:t>
-            </a:r>
-            <a:endParaRPr lang="en-US" sz="1600" dirty="0"/>
-          </a:p>
-        </p:txBody>
-      </p:sp>
-      <p:sp>
-        <p:nvSpPr>
-          <p:cNvPr id="35" name="Shape 33"/>
-          <p:cNvSpPr/>
-          <p:nvPr/>
-        </p:nvSpPr>
-        <p:spPr>
-          <a:xfrm>
-            <a:off x="6428232" y="3364992"/>
-            <a:ext cx="1645920" cy="475488"/>
+              <a:t>i</a:t>
+            </a:r>
+            <a:endParaRPr lang="en-US" sz="900" dirty="0"/>
+          </a:p>
+        </p:txBody>
+      </p:sp>
+      <p:sp>
+        <p:nvSpPr>
+          <p:cNvPr id="41" name="Shape 39"/>
+          <p:cNvSpPr/>
+          <p:nvPr/>
+        </p:nvSpPr>
+        <p:spPr>
+          <a:xfrm>
+            <a:off x="7274052" y="4169664"/>
+            <a:ext cx="685800" cy="475488"/>
           </a:xfrm>
           <a:prstGeom prst="rect">
             <a:avLst>
-              <a:gd name="adj" fmla="val 9615"/>
+              <a:gd name="adj" fmla="val 7692"/>
             </a:avLst>
           </a:prstGeom>
           <a:solidFill>
@@ -23198,535 +22340,46 @@
           </a:solidFill>
           <a:ln w="12700">
             <a:solidFill>
-              <a:srgbClr val="0D9488"/>
-            </a:solidFill>
-            <a:prstDash val="solid"/>
-          </a:ln>
-        </p:spPr>
-      </p:sp>
-      <p:sp>
-        <p:nvSpPr>
-          <p:cNvPr id="36" name="Text 34"/>
-          <p:cNvSpPr/>
-          <p:nvPr/>
-        </p:nvSpPr>
-        <p:spPr>
-          <a:xfrm>
-            <a:off x="6428232" y="3364992"/>
-            <a:ext cx="1645920" cy="475488"/>
-          </a:xfrm>
-          <a:prstGeom prst="rect">
-            <a:avLst/>
-          </a:prstGeom>
-          <a:noFill/>
-          <a:ln/>
-        </p:spPr>
-        <p:txBody>
-          <a:bodyPr wrap="square" lIns="0" tIns="0" rIns="0" bIns="0" rtlCol="0" anchor="ctr"/>
-          <a:lstStyle/>
-          <a:p>
-            <a:pPr algn="ctr" indent="0" marL="0">
-              <a:buNone/>
-            </a:pPr>
-            <a:r>
-              <a:rPr lang="en-US" sz="1400" b="1" dirty="0">
-                <a:solidFill>
-                  <a:srgbClr val="0D9488"/>
+              <a:srgbClr val="DB2777"/>
+            </a:solidFill>
+            <a:prstDash val="solid"/>
+          </a:ln>
+        </p:spPr>
+      </p:sp>
+      <p:sp>
+        <p:nvSpPr>
+          <p:cNvPr id="42" name="Text 40"/>
+          <p:cNvSpPr/>
+          <p:nvPr/>
+        </p:nvSpPr>
+        <p:spPr>
+          <a:xfrm>
+            <a:off x="7274052" y="4169664"/>
+            <a:ext cx="685800" cy="475488"/>
+          </a:xfrm>
+          <a:prstGeom prst="rect">
+            <a:avLst/>
+          </a:prstGeom>
+          <a:noFill/>
+          <a:ln/>
+        </p:spPr>
+        <p:txBody>
+          <a:bodyPr wrap="square" lIns="0" tIns="0" rIns="0" bIns="0" rtlCol="0" anchor="ctr"/>
+          <a:lstStyle/>
+          <a:p>
+            <a:pPr algn="ctr" indent="0" marL="0">
+              <a:buNone/>
+            </a:pPr>
+            <a:r>
+              <a:rPr lang="en-US" sz="900" b="1" dirty="0">
+                <a:solidFill>
+                  <a:srgbClr val="9D174D"/>
                 </a:solidFill>
                 <a:latin typeface="Trebuchet MS" pitchFamily="34" charset="0"/>
                 <a:ea typeface="Trebuchet MS" pitchFamily="34" charset="-122"/>
                 <a:cs typeface="Trebuchet MS" pitchFamily="34" charset="-120"/>
               </a:rPr>
-              <a:t>py</a:t>
-            </a:r>
-            <a:endParaRPr lang="en-US" sz="1400" dirty="0"/>
-          </a:p>
-        </p:txBody>
-      </p:sp>
-      <p:sp>
-        <p:nvSpPr>
-          <p:cNvPr id="37" name="Shape 35"/>
-          <p:cNvSpPr/>
-          <p:nvPr/>
-        </p:nvSpPr>
-        <p:spPr>
-          <a:xfrm>
-            <a:off x="365760" y="4096512"/>
-            <a:ext cx="1371600" cy="804672"/>
-          </a:xfrm>
-          <a:prstGeom prst="rect">
-            <a:avLst>
-              <a:gd name="adj" fmla="val 6818"/>
-            </a:avLst>
-          </a:prstGeom>
-          <a:solidFill>
-            <a:srgbClr val="E2E8F0"/>
-          </a:solidFill>
-          <a:ln w="12700">
-            <a:solidFill>
-              <a:srgbClr val="E2E8F0"/>
-            </a:solidFill>
-            <a:prstDash val="solid"/>
-          </a:ln>
-        </p:spPr>
-      </p:sp>
-      <p:sp>
-        <p:nvSpPr>
-          <p:cNvPr id="38" name="Text 36"/>
-          <p:cNvSpPr/>
-          <p:nvPr/>
-        </p:nvSpPr>
-        <p:spPr>
-          <a:xfrm>
-            <a:off x="365760" y="4096512"/>
-            <a:ext cx="1371600" cy="804672"/>
-          </a:xfrm>
-          <a:prstGeom prst="rect">
-            <a:avLst/>
-          </a:prstGeom>
-          <a:noFill/>
-          <a:ln/>
-        </p:spPr>
-        <p:txBody>
-          <a:bodyPr wrap="square" lIns="0" tIns="0" rIns="0" bIns="0" rtlCol="0" anchor="ctr"/>
-          <a:lstStyle/>
-          <a:p>
-            <a:pPr algn="ctr" indent="0" marL="0">
-              <a:buNone/>
-            </a:pPr>
-            <a:r>
-              <a:rPr lang="en-US" sz="1100" b="1" dirty="0">
-                <a:solidFill>
-                  <a:srgbClr val="475569"/>
-                </a:solidFill>
-                <a:latin typeface="Trebuchet MS" pitchFamily="34" charset="0"/>
-                <a:ea typeface="Trebuchet MS" pitchFamily="34" charset="-122"/>
-                <a:cs typeface="Trebuchet MS" pitchFamily="34" charset="-120"/>
-              </a:rPr>
-              <a:t>Phonemes</a:t>
-            </a:r>
-            <a:endParaRPr lang="en-US" sz="1100" dirty="0"/>
-          </a:p>
-        </p:txBody>
-      </p:sp>
-      <p:sp>
-        <p:nvSpPr>
-          <p:cNvPr id="39" name="Shape 37"/>
-          <p:cNvSpPr/>
-          <p:nvPr/>
-        </p:nvSpPr>
-        <p:spPr>
-          <a:xfrm>
-            <a:off x="1874520" y="4096512"/>
-            <a:ext cx="6903720" cy="658368"/>
-          </a:xfrm>
-          <a:prstGeom prst="rect">
-            <a:avLst>
-              <a:gd name="adj" fmla="val 8333"/>
-            </a:avLst>
-          </a:prstGeom>
-          <a:solidFill>
-            <a:srgbClr val="FCE7F3"/>
-          </a:solidFill>
-          <a:ln w="12700">
-            <a:solidFill>
-              <a:srgbClr val="DB2777"/>
-            </a:solidFill>
-            <a:prstDash val="solid"/>
-          </a:ln>
-        </p:spPr>
-      </p:sp>
-      <p:sp>
-        <p:nvSpPr>
-          <p:cNvPr id="40" name="Shape 38"/>
-          <p:cNvSpPr/>
-          <p:nvPr/>
-        </p:nvSpPr>
-        <p:spPr>
-          <a:xfrm>
-            <a:off x="2254649" y="4169664"/>
-            <a:ext cx="685800" cy="475488"/>
-          </a:xfrm>
-          <a:prstGeom prst="rect">
-            <a:avLst>
-              <a:gd name="adj" fmla="val 7692"/>
-            </a:avLst>
-          </a:prstGeom>
-          <a:solidFill>
-            <a:srgbClr val="FFFFFF"/>
-          </a:solidFill>
-          <a:ln w="12700">
-            <a:solidFill>
-              <a:srgbClr val="DB2777"/>
-            </a:solidFill>
-            <a:prstDash val="solid"/>
-          </a:ln>
-        </p:spPr>
-      </p:sp>
-      <p:sp>
-        <p:nvSpPr>
-          <p:cNvPr id="41" name="Text 39"/>
-          <p:cNvSpPr/>
-          <p:nvPr/>
-        </p:nvSpPr>
-        <p:spPr>
-          <a:xfrm>
-            <a:off x="2254649" y="4169664"/>
-            <a:ext cx="685800" cy="475488"/>
-          </a:xfrm>
-          <a:prstGeom prst="rect">
-            <a:avLst/>
-          </a:prstGeom>
-          <a:noFill/>
-          <a:ln/>
-        </p:spPr>
-        <p:txBody>
-          <a:bodyPr wrap="square" lIns="0" tIns="0" rIns="0" bIns="0" rtlCol="0" anchor="ctr"/>
-          <a:lstStyle/>
-          <a:p>
-            <a:pPr algn="ctr" indent="0" marL="0">
-              <a:buNone/>
-            </a:pPr>
-            <a:r>
-              <a:rPr lang="en-US" sz="900" b="1" dirty="0">
-                <a:solidFill>
-                  <a:srgbClr val="9D174D"/>
-                </a:solidFill>
-                <a:latin typeface="Trebuchet MS" pitchFamily="34" charset="0"/>
-                <a:ea typeface="Trebuchet MS" pitchFamily="34" charset="-122"/>
-                <a:cs typeface="Trebuchet MS" pitchFamily="34" charset="-120"/>
-              </a:rPr>
-              <a:t>u</a:t>
-            </a:r>
-            <a:endParaRPr lang="en-US" sz="900" dirty="0"/>
-          </a:p>
-        </p:txBody>
-      </p:sp>
-      <p:sp>
-        <p:nvSpPr>
-          <p:cNvPr id="42" name="Shape 40"/>
-          <p:cNvSpPr/>
-          <p:nvPr/>
-        </p:nvSpPr>
-        <p:spPr>
-          <a:xfrm>
-            <a:off x="3293146" y="4169664"/>
-            <a:ext cx="685800" cy="475488"/>
-          </a:xfrm>
-          <a:prstGeom prst="rect">
-            <a:avLst>
-              <a:gd name="adj" fmla="val 7692"/>
-            </a:avLst>
-          </a:prstGeom>
-          <a:solidFill>
-            <a:srgbClr val="FFFFFF"/>
-          </a:solidFill>
-          <a:ln w="12700">
-            <a:solidFill>
-              <a:srgbClr val="DB2777"/>
-            </a:solidFill>
-            <a:prstDash val="solid"/>
-          </a:ln>
-        </p:spPr>
-      </p:sp>
-      <p:sp>
-        <p:nvSpPr>
-          <p:cNvPr id="43" name="Text 41"/>
-          <p:cNvSpPr/>
-          <p:nvPr/>
-        </p:nvSpPr>
-        <p:spPr>
-          <a:xfrm>
-            <a:off x="3293146" y="4169664"/>
-            <a:ext cx="685800" cy="475488"/>
-          </a:xfrm>
-          <a:prstGeom prst="rect">
-            <a:avLst/>
-          </a:prstGeom>
-          <a:noFill/>
-          <a:ln/>
-        </p:spPr>
-        <p:txBody>
-          <a:bodyPr wrap="square" lIns="0" tIns="0" rIns="0" bIns="0" rtlCol="0" anchor="ctr"/>
-          <a:lstStyle/>
-          <a:p>
-            <a:pPr algn="ctr" indent="0" marL="0">
-              <a:buNone/>
-            </a:pPr>
-            <a:r>
-              <a:rPr lang="en-US" sz="900" b="1" dirty="0">
-                <a:solidFill>
-                  <a:srgbClr val="9D174D"/>
-                </a:solidFill>
-                <a:latin typeface="Trebuchet MS" pitchFamily="34" charset="0"/>
-                <a:ea typeface="Trebuchet MS" pitchFamily="34" charset="-122"/>
-                <a:cs typeface="Trebuchet MS" pitchFamily="34" charset="-120"/>
-              </a:rPr>
-              <a:t>n</a:t>
-            </a:r>
-            <a:endParaRPr lang="en-US" sz="900" dirty="0"/>
-          </a:p>
-        </p:txBody>
-      </p:sp>
-      <p:sp>
-        <p:nvSpPr>
-          <p:cNvPr id="44" name="Shape 42"/>
-          <p:cNvSpPr/>
-          <p:nvPr/>
-        </p:nvSpPr>
-        <p:spPr>
-          <a:xfrm>
-            <a:off x="4331643" y="4169664"/>
-            <a:ext cx="685800" cy="475488"/>
-          </a:xfrm>
-          <a:prstGeom prst="rect">
-            <a:avLst>
-              <a:gd name="adj" fmla="val 7692"/>
-            </a:avLst>
-          </a:prstGeom>
-          <a:solidFill>
-            <a:srgbClr val="FFFFFF"/>
-          </a:solidFill>
-          <a:ln w="12700">
-            <a:solidFill>
-              <a:srgbClr val="DB2777"/>
-            </a:solidFill>
-            <a:prstDash val="solid"/>
-          </a:ln>
-        </p:spPr>
-      </p:sp>
-      <p:sp>
-        <p:nvSpPr>
-          <p:cNvPr id="45" name="Text 43"/>
-          <p:cNvSpPr/>
-          <p:nvPr/>
-        </p:nvSpPr>
-        <p:spPr>
-          <a:xfrm>
-            <a:off x="4331643" y="4169664"/>
-            <a:ext cx="685800" cy="475488"/>
-          </a:xfrm>
-          <a:prstGeom prst="rect">
-            <a:avLst/>
-          </a:prstGeom>
-          <a:noFill/>
-          <a:ln/>
-        </p:spPr>
-        <p:txBody>
-          <a:bodyPr wrap="square" lIns="0" tIns="0" rIns="0" bIns="0" rtlCol="0" anchor="ctr"/>
-          <a:lstStyle/>
-          <a:p>
-            <a:pPr algn="ctr" indent="0" marL="0">
-              <a:buNone/>
-            </a:pPr>
-            <a:r>
-              <a:rPr lang="en-US" sz="900" b="1" dirty="0">
-                <a:solidFill>
-                  <a:srgbClr val="9D174D"/>
-                </a:solidFill>
-                <a:latin typeface="Trebuchet MS" pitchFamily="34" charset="0"/>
-                <a:ea typeface="Trebuchet MS" pitchFamily="34" charset="-122"/>
-                <a:cs typeface="Trebuchet MS" pitchFamily="34" charset="-120"/>
-              </a:rPr>
-              <a:t>h</a:t>
-            </a:r>
-            <a:endParaRPr lang="en-US" sz="900" dirty="0"/>
-          </a:p>
-        </p:txBody>
-      </p:sp>
-      <p:sp>
-        <p:nvSpPr>
-          <p:cNvPr id="46" name="Shape 44"/>
-          <p:cNvSpPr/>
-          <p:nvPr/>
-        </p:nvSpPr>
-        <p:spPr>
-          <a:xfrm>
-            <a:off x="5370141" y="4169664"/>
-            <a:ext cx="685800" cy="475488"/>
-          </a:xfrm>
-          <a:prstGeom prst="rect">
-            <a:avLst>
-              <a:gd name="adj" fmla="val 7692"/>
-            </a:avLst>
-          </a:prstGeom>
-          <a:solidFill>
-            <a:srgbClr val="FFFFFF"/>
-          </a:solidFill>
-          <a:ln w="12700">
-            <a:solidFill>
-              <a:srgbClr val="DB2777"/>
-            </a:solidFill>
-            <a:prstDash val="solid"/>
-          </a:ln>
-        </p:spPr>
-      </p:sp>
-      <p:sp>
-        <p:nvSpPr>
-          <p:cNvPr id="47" name="Text 45"/>
-          <p:cNvSpPr/>
-          <p:nvPr/>
-        </p:nvSpPr>
-        <p:spPr>
-          <a:xfrm>
-            <a:off x="5370141" y="4169664"/>
-            <a:ext cx="685800" cy="475488"/>
-          </a:xfrm>
-          <a:prstGeom prst="rect">
-            <a:avLst/>
-          </a:prstGeom>
-          <a:noFill/>
-          <a:ln/>
-        </p:spPr>
-        <p:txBody>
-          <a:bodyPr wrap="square" lIns="0" tIns="0" rIns="0" bIns="0" rtlCol="0" anchor="ctr"/>
-          <a:lstStyle/>
-          <a:p>
-            <a:pPr algn="ctr" indent="0" marL="0">
-              <a:buNone/>
-            </a:pPr>
-            <a:r>
-              <a:rPr lang="en-US" sz="900" b="1" dirty="0">
-                <a:solidFill>
-                  <a:srgbClr val="9D174D"/>
-                </a:solidFill>
-                <a:latin typeface="Trebuchet MS" pitchFamily="34" charset="0"/>
-                <a:ea typeface="Trebuchet MS" pitchFamily="34" charset="-122"/>
-                <a:cs typeface="Trebuchet MS" pitchFamily="34" charset="-120"/>
-              </a:rPr>
-              <a:t>a</a:t>
-            </a:r>
-            <a:endParaRPr lang="en-US" sz="900" dirty="0"/>
-          </a:p>
-        </p:txBody>
-      </p:sp>
-      <p:sp>
-        <p:nvSpPr>
-          <p:cNvPr id="48" name="Shape 46"/>
-          <p:cNvSpPr/>
-          <p:nvPr/>
-        </p:nvSpPr>
-        <p:spPr>
-          <a:xfrm>
-            <a:off x="6408638" y="4169664"/>
-            <a:ext cx="685800" cy="475488"/>
-          </a:xfrm>
-          <a:prstGeom prst="rect">
-            <a:avLst>
-              <a:gd name="adj" fmla="val 7692"/>
-            </a:avLst>
-          </a:prstGeom>
-          <a:solidFill>
-            <a:srgbClr val="FFFFFF"/>
-          </a:solidFill>
-          <a:ln w="12700">
-            <a:solidFill>
-              <a:srgbClr val="DB2777"/>
-            </a:solidFill>
-            <a:prstDash val="solid"/>
-          </a:ln>
-        </p:spPr>
-      </p:sp>
-      <p:sp>
-        <p:nvSpPr>
-          <p:cNvPr id="49" name="Text 47"/>
-          <p:cNvSpPr/>
-          <p:nvPr/>
-        </p:nvSpPr>
-        <p:spPr>
-          <a:xfrm>
-            <a:off x="6408638" y="4169664"/>
-            <a:ext cx="685800" cy="475488"/>
-          </a:xfrm>
-          <a:prstGeom prst="rect">
-            <a:avLst/>
-          </a:prstGeom>
-          <a:noFill/>
-          <a:ln/>
-        </p:spPr>
-        <p:txBody>
-          <a:bodyPr wrap="square" lIns="0" tIns="0" rIns="0" bIns="0" rtlCol="0" anchor="ctr"/>
-          <a:lstStyle/>
-          <a:p>
-            <a:pPr algn="ctr" indent="0" marL="0">
-              <a:buNone/>
-            </a:pPr>
-            <a:r>
-              <a:rPr lang="en-US" sz="900" b="1" dirty="0">
-                <a:solidFill>
-                  <a:srgbClr val="9D174D"/>
-                </a:solidFill>
-                <a:latin typeface="Trebuchet MS" pitchFamily="34" charset="0"/>
-                <a:ea typeface="Trebuchet MS" pitchFamily="34" charset="-122"/>
-                <a:cs typeface="Trebuchet MS" pitchFamily="34" charset="-120"/>
-              </a:rPr>
-              <a:t>pp</a:t>
-            </a:r>
-            <a:endParaRPr lang="en-US" sz="900" dirty="0"/>
-          </a:p>
-        </p:txBody>
-      </p:sp>
-      <p:sp>
-        <p:nvSpPr>
-          <p:cNvPr id="50" name="Shape 48"/>
-          <p:cNvSpPr/>
-          <p:nvPr/>
-        </p:nvSpPr>
-        <p:spPr>
-          <a:xfrm>
-            <a:off x="7447135" y="4169664"/>
-            <a:ext cx="685800" cy="475488"/>
-          </a:xfrm>
-          <a:prstGeom prst="rect">
-            <a:avLst>
-              <a:gd name="adj" fmla="val 7692"/>
-            </a:avLst>
-          </a:prstGeom>
-          <a:solidFill>
-            <a:srgbClr val="FFFFFF"/>
-          </a:solidFill>
-          <a:ln w="12700">
-            <a:solidFill>
-              <a:srgbClr val="DB2777"/>
-            </a:solidFill>
-            <a:prstDash val="solid"/>
-          </a:ln>
-        </p:spPr>
-      </p:sp>
-      <p:sp>
-        <p:nvSpPr>
-          <p:cNvPr id="51" name="Text 49"/>
-          <p:cNvSpPr/>
-          <p:nvPr/>
-        </p:nvSpPr>
-        <p:spPr>
-          <a:xfrm>
-            <a:off x="7447135" y="4169664"/>
-            <a:ext cx="685800" cy="475488"/>
-          </a:xfrm>
-          <a:prstGeom prst="rect">
-            <a:avLst/>
-          </a:prstGeom>
-          <a:noFill/>
-          <a:ln/>
-        </p:spPr>
-        <p:txBody>
-          <a:bodyPr wrap="square" lIns="0" tIns="0" rIns="0" bIns="0" rtlCol="0" anchor="ctr"/>
-          <a:lstStyle/>
-          <a:p>
-            <a:pPr algn="ctr" indent="0" marL="0">
-              <a:buNone/>
-            </a:pPr>
-            <a:r>
-              <a:rPr lang="en-US" sz="900" b="1" dirty="0">
-                <a:solidFill>
-                  <a:srgbClr val="9D174D"/>
-                </a:solidFill>
-                <a:latin typeface="Trebuchet MS" pitchFamily="34" charset="0"/>
-                <a:ea typeface="Trebuchet MS" pitchFamily="34" charset="-122"/>
-                <a:cs typeface="Trebuchet MS" pitchFamily="34" charset="-120"/>
-              </a:rPr>
-              <a:t>y</a:t>
+              <a:t>nd</a:t>
             </a:r>
             <a:endParaRPr lang="en-US" sz="900" dirty="0"/>
           </a:p>
@@ -24157,7 +22810,7 @@
                 <a:ea typeface="Trebuchet MS" pitchFamily="34" charset="-122"/>
                 <a:cs typeface="Trebuchet MS" pitchFamily="34" charset="-120"/>
               </a:rPr>
-              <a:t>unsure</a:t>
+              <a:t>unfair</a:t>
             </a:r>
             <a:endParaRPr lang="en-US" sz="2800" dirty="0"/>
           </a:p>
@@ -24984,7 +23637,7 @@
                 <a:ea typeface="Trebuchet MS" pitchFamily="34" charset="-122"/>
                 <a:cs typeface="Trebuchet MS" pitchFamily="34" charset="-120"/>
               </a:rPr>
-              <a:t>unsure</a:t>
+              <a:t>unfair</a:t>
             </a:r>
             <a:endParaRPr lang="en-US" sz="2800" dirty="0"/>
           </a:p>
@@ -25235,7 +23888,7 @@
                 <a:ea typeface="Trebuchet MS" pitchFamily="34" charset="-122"/>
                 <a:cs typeface="Trebuchet MS" pitchFamily="34" charset="-120"/>
               </a:rPr>
-              <a:t>sure</a:t>
+              <a:t>fair</a:t>
             </a:r>
             <a:endParaRPr lang="en-US" sz="1300" dirty="0"/>
           </a:p>
@@ -25274,7 +23927,7 @@
                 <a:ea typeface="Calibri" pitchFamily="34" charset="-122"/>
                 <a:cs typeface="Calibri" pitchFamily="34" charset="-120"/>
               </a:rPr>
-              <a:t>certain or confident</a:t>
+              <a:t>treating everyone equally</a:t>
             </a:r>
             <a:endParaRPr lang="en-US" sz="850" dirty="0"/>
           </a:p>
@@ -26688,7 +25341,7 @@
                 <a:ea typeface="Trebuchet MS" pitchFamily="34" charset="-122"/>
                 <a:cs typeface="Trebuchet MS" pitchFamily="34" charset="-120"/>
               </a:rPr>
-              <a:t>unsure</a:t>
+              <a:t>unfair</a:t>
             </a:r>
             <a:endParaRPr lang="en-US" sz="2800" dirty="0"/>
           </a:p>
@@ -26939,7 +25592,7 @@
                 <a:ea typeface="Trebuchet MS" pitchFamily="34" charset="-122"/>
                 <a:cs typeface="Trebuchet MS" pitchFamily="34" charset="-120"/>
               </a:rPr>
-              <a:t>sure</a:t>
+              <a:t>fair</a:t>
             </a:r>
             <a:endParaRPr lang="en-US" sz="1300" dirty="0"/>
           </a:p>
@@ -26978,7 +25631,7 @@
                 <a:ea typeface="Calibri" pitchFamily="34" charset="-122"/>
                 <a:cs typeface="Calibri" pitchFamily="34" charset="-120"/>
               </a:rPr>
-              <a:t>certain or confident</a:t>
+              <a:t>treating everyone equally</a:t>
             </a:r>
             <a:endParaRPr lang="en-US" sz="850" dirty="0"/>
           </a:p>
@@ -27242,7 +25895,7 @@
                 <a:ea typeface="Trebuchet MS" pitchFamily="34" charset="-122"/>
                 <a:cs typeface="Trebuchet MS" pitchFamily="34" charset="-120"/>
               </a:rPr>
-              <a:t>sure</a:t>
+              <a:t>fair</a:t>
             </a:r>
             <a:endParaRPr lang="en-US" sz="1400" dirty="0"/>
           </a:p>
@@ -27805,7 +26458,7 @@
                 <a:ea typeface="Trebuchet MS" pitchFamily="34" charset="-122"/>
                 <a:cs typeface="Trebuchet MS" pitchFamily="34" charset="-120"/>
               </a:rPr>
-              <a:t>unsure</a:t>
+              <a:t>unfair</a:t>
             </a:r>
             <a:endParaRPr lang="en-US" sz="2800" dirty="0"/>
           </a:p>
@@ -28056,7 +26709,7 @@
                 <a:ea typeface="Trebuchet MS" pitchFamily="34" charset="-122"/>
                 <a:cs typeface="Trebuchet MS" pitchFamily="34" charset="-120"/>
               </a:rPr>
-              <a:t>sure</a:t>
+              <a:t>fair</a:t>
             </a:r>
             <a:endParaRPr lang="en-US" sz="1300" dirty="0"/>
           </a:p>
@@ -28095,7 +26748,7 @@
                 <a:ea typeface="Calibri" pitchFamily="34" charset="-122"/>
                 <a:cs typeface="Calibri" pitchFamily="34" charset="-120"/>
               </a:rPr>
-              <a:t>certain or confident</a:t>
+              <a:t>treating everyone equally</a:t>
             </a:r>
             <a:endParaRPr lang="en-US" sz="850" dirty="0"/>
           </a:p>
@@ -28359,7 +27012,7 @@
                 <a:ea typeface="Trebuchet MS" pitchFamily="34" charset="-122"/>
                 <a:cs typeface="Trebuchet MS" pitchFamily="34" charset="-120"/>
               </a:rPr>
-              <a:t>sure</a:t>
+              <a:t>fair</a:t>
             </a:r>
             <a:endParaRPr lang="en-US" sz="1400" dirty="0"/>
           </a:p>
@@ -28440,11 +27093,11 @@
         <p:spPr>
           <a:xfrm>
             <a:off x="1874520" y="4096512"/>
-            <a:ext cx="6903720" cy="804672"/>
+            <a:ext cx="6903720" cy="658368"/>
           </a:xfrm>
           <a:prstGeom prst="rect">
             <a:avLst>
-              <a:gd name="adj" fmla="val 6818"/>
+              <a:gd name="adj" fmla="val 8333"/>
             </a:avLst>
           </a:prstGeom>
           <a:solidFill>
@@ -28466,12 +27119,12 @@
         </p:nvSpPr>
         <p:spPr>
           <a:xfrm>
-            <a:off x="2427732" y="4169664"/>
-            <a:ext cx="685800" cy="384048"/>
+            <a:off x="2670048" y="4169664"/>
+            <a:ext cx="685800" cy="475488"/>
           </a:xfrm>
           <a:prstGeom prst="rect">
             <a:avLst>
-              <a:gd name="adj" fmla="val 9524"/>
+              <a:gd name="adj" fmla="val 7692"/>
             </a:avLst>
           </a:prstGeom>
           <a:solidFill>
@@ -28493,8 +27146,8 @@
         </p:nvSpPr>
         <p:spPr>
           <a:xfrm>
-            <a:off x="2427732" y="4169664"/>
-            <a:ext cx="685800" cy="384048"/>
+            <a:off x="2670048" y="4169664"/>
+            <a:ext cx="685800" cy="475488"/>
           </a:xfrm>
           <a:prstGeom prst="rect">
             <a:avLst/>
@@ -28532,12 +27185,12 @@
         </p:nvSpPr>
         <p:spPr>
           <a:xfrm>
-            <a:off x="3639312" y="4169664"/>
-            <a:ext cx="685800" cy="384048"/>
+            <a:off x="4123944" y="4169664"/>
+            <a:ext cx="685800" cy="475488"/>
           </a:xfrm>
           <a:prstGeom prst="rect">
             <a:avLst>
-              <a:gd name="adj" fmla="val 9524"/>
+              <a:gd name="adj" fmla="val 7692"/>
             </a:avLst>
           </a:prstGeom>
           <a:solidFill>
@@ -28559,8 +27212,8 @@
         </p:nvSpPr>
         <p:spPr>
           <a:xfrm>
-            <a:off x="3639312" y="4169664"/>
-            <a:ext cx="685800" cy="384048"/>
+            <a:off x="4123944" y="4169664"/>
+            <a:ext cx="685800" cy="475488"/>
           </a:xfrm>
           <a:prstGeom prst="rect">
             <a:avLst/>
@@ -28598,12 +27251,12 @@
         </p:nvSpPr>
         <p:spPr>
           <a:xfrm>
-            <a:off x="4850892" y="4169664"/>
-            <a:ext cx="685800" cy="384048"/>
+            <a:off x="5577840" y="4169664"/>
+            <a:ext cx="685800" cy="475488"/>
           </a:xfrm>
           <a:prstGeom prst="rect">
             <a:avLst>
-              <a:gd name="adj" fmla="val 9524"/>
+              <a:gd name="adj" fmla="val 7692"/>
             </a:avLst>
           </a:prstGeom>
           <a:solidFill>
@@ -28625,8 +27278,8 @@
         </p:nvSpPr>
         <p:spPr>
           <a:xfrm>
-            <a:off x="4850892" y="4169664"/>
-            <a:ext cx="685800" cy="384048"/>
+            <a:off x="5577840" y="4169664"/>
+            <a:ext cx="685800" cy="475488"/>
           </a:xfrm>
           <a:prstGeom prst="rect">
             <a:avLst/>
@@ -28650,7 +27303,7 @@
                 <a:ea typeface="Trebuchet MS" pitchFamily="34" charset="-122"/>
                 <a:cs typeface="Trebuchet MS" pitchFamily="34" charset="-120"/>
               </a:rPr>
-              <a:t>s</a:t>
+              <a:t>f</a:t>
             </a:r>
             <a:endParaRPr lang="en-US" sz="900" dirty="0"/>
           </a:p>
@@ -28658,57 +27311,18 @@
       </p:sp>
       <p:sp>
         <p:nvSpPr>
-          <p:cNvPr id="39" name="Text 37"/>
-          <p:cNvSpPr/>
-          <p:nvPr/>
-        </p:nvSpPr>
-        <p:spPr>
-          <a:xfrm>
-            <a:off x="4850892" y="4572000"/>
-            <a:ext cx="685800" cy="219456"/>
-          </a:xfrm>
-          <a:prstGeom prst="rect">
-            <a:avLst/>
-          </a:prstGeom>
-          <a:noFill/>
-          <a:ln/>
-        </p:spPr>
-        <p:txBody>
-          <a:bodyPr wrap="square" lIns="0" tIns="0" rIns="0" bIns="0" rtlCol="0" anchor="t"/>
-          <a:lstStyle/>
-          <a:p>
-            <a:pPr algn="ctr" indent="0" marL="0">
-              <a:buNone/>
-            </a:pPr>
-            <a:r>
-              <a:rPr lang="en-US" sz="750" i="1" dirty="0">
-                <a:solidFill>
-                  <a:srgbClr val="94A3B8"/>
-                </a:solidFill>
-                <a:latin typeface="Calibri" pitchFamily="34" charset="0"/>
-                <a:ea typeface="Calibri" pitchFamily="34" charset="-122"/>
-                <a:cs typeface="Calibri" pitchFamily="34" charset="-120"/>
-              </a:rPr>
-              <a:t>/sh/</a:t>
-            </a:r>
-            <a:endParaRPr lang="en-US" sz="750" dirty="0"/>
-          </a:p>
-        </p:txBody>
-      </p:sp>
-      <p:sp>
-        <p:nvSpPr>
-          <p:cNvPr id="40" name="Shape 38"/>
-          <p:cNvSpPr/>
-          <p:nvPr/>
-        </p:nvSpPr>
-        <p:spPr>
-          <a:xfrm>
-            <a:off x="6062472" y="4169664"/>
-            <a:ext cx="685800" cy="384048"/>
+          <p:cNvPr id="39" name="Shape 37"/>
+          <p:cNvSpPr/>
+          <p:nvPr/>
+        </p:nvSpPr>
+        <p:spPr>
+          <a:xfrm>
+            <a:off x="7031736" y="4169664"/>
+            <a:ext cx="685800" cy="475488"/>
           </a:xfrm>
           <a:prstGeom prst="rect">
             <a:avLst>
-              <a:gd name="adj" fmla="val 9524"/>
+              <a:gd name="adj" fmla="val 7692"/>
             </a:avLst>
           </a:prstGeom>
           <a:solidFill>
@@ -28724,14 +27338,14 @@
       </p:sp>
       <p:sp>
         <p:nvSpPr>
-          <p:cNvPr id="41" name="Text 39"/>
-          <p:cNvSpPr/>
-          <p:nvPr/>
-        </p:nvSpPr>
-        <p:spPr>
-          <a:xfrm>
-            <a:off x="6062472" y="4169664"/>
-            <a:ext cx="685800" cy="384048"/>
+          <p:cNvPr id="40" name="Text 38"/>
+          <p:cNvSpPr/>
+          <p:nvPr/>
+        </p:nvSpPr>
+        <p:spPr>
+          <a:xfrm>
+            <a:off x="7031736" y="4169664"/>
+            <a:ext cx="685800" cy="475488"/>
           </a:xfrm>
           <a:prstGeom prst="rect">
             <a:avLst/>
@@ -28755,73 +27369,7 @@
                 <a:ea typeface="Trebuchet MS" pitchFamily="34" charset="-122"/>
                 <a:cs typeface="Trebuchet MS" pitchFamily="34" charset="-120"/>
               </a:rPr>
-              <a:t>u</a:t>
-            </a:r>
-            <a:endParaRPr lang="en-US" sz="900" dirty="0"/>
-          </a:p>
-        </p:txBody>
-      </p:sp>
-      <p:sp>
-        <p:nvSpPr>
-          <p:cNvPr id="42" name="Shape 40"/>
-          <p:cNvSpPr/>
-          <p:nvPr/>
-        </p:nvSpPr>
-        <p:spPr>
-          <a:xfrm>
-            <a:off x="7274052" y="4169664"/>
-            <a:ext cx="685800" cy="384048"/>
-          </a:xfrm>
-          <a:prstGeom prst="rect">
-            <a:avLst>
-              <a:gd name="adj" fmla="val 9524"/>
-            </a:avLst>
-          </a:prstGeom>
-          <a:solidFill>
-            <a:srgbClr val="FFFFFF"/>
-          </a:solidFill>
-          <a:ln w="12700">
-            <a:solidFill>
-              <a:srgbClr val="DB2777"/>
-            </a:solidFill>
-            <a:prstDash val="solid"/>
-          </a:ln>
-        </p:spPr>
-      </p:sp>
-      <p:sp>
-        <p:nvSpPr>
-          <p:cNvPr id="43" name="Text 41"/>
-          <p:cNvSpPr/>
-          <p:nvPr/>
-        </p:nvSpPr>
-        <p:spPr>
-          <a:xfrm>
-            <a:off x="7274052" y="4169664"/>
-            <a:ext cx="685800" cy="384048"/>
-          </a:xfrm>
-          <a:prstGeom prst="rect">
-            <a:avLst/>
-          </a:prstGeom>
-          <a:noFill/>
-          <a:ln/>
-        </p:spPr>
-        <p:txBody>
-          <a:bodyPr wrap="square" lIns="0" tIns="0" rIns="0" bIns="0" rtlCol="0" anchor="ctr"/>
-          <a:lstStyle/>
-          <a:p>
-            <a:pPr algn="ctr" indent="0" marL="0">
-              <a:buNone/>
-            </a:pPr>
-            <a:r>
-              <a:rPr lang="en-US" sz="900" b="1" dirty="0">
-                <a:solidFill>
-                  <a:srgbClr val="9D174D"/>
-                </a:solidFill>
-                <a:latin typeface="Trebuchet MS" pitchFamily="34" charset="0"/>
-                <a:ea typeface="Trebuchet MS" pitchFamily="34" charset="-122"/>
-                <a:cs typeface="Trebuchet MS" pitchFamily="34" charset="-120"/>
-              </a:rPr>
-              <a:t>re</a:t>
+              <a:t>air</a:t>
             </a:r>
             <a:endParaRPr lang="en-US" sz="900" dirty="0"/>
           </a:p>
@@ -29252,7 +27800,7 @@
                 <a:ea typeface="Trebuchet MS" pitchFamily="34" charset="-122"/>
                 <a:cs typeface="Trebuchet MS" pitchFamily="34" charset="-120"/>
               </a:rPr>
-              <a:t>unpacking</a:t>
+              <a:t>uncomfortable</a:t>
             </a:r>
             <a:endParaRPr lang="en-US" sz="2800" dirty="0"/>
           </a:p>
@@ -30079,7 +28627,7 @@
                 <a:ea typeface="Trebuchet MS" pitchFamily="34" charset="-122"/>
                 <a:cs typeface="Trebuchet MS" pitchFamily="34" charset="-120"/>
               </a:rPr>
-              <a:t>unpacking</a:t>
+              <a:t>uncomfortable</a:t>
             </a:r>
             <a:endParaRPr lang="en-US" sz="2800" dirty="0"/>
           </a:p>
@@ -30257,7 +28805,7 @@
                 <a:ea typeface="Calibri" pitchFamily="34" charset="-122"/>
                 <a:cs typeface="Calibri" pitchFamily="34" charset="-120"/>
               </a:rPr>
-              <a:t>opposite of</a:t>
+              <a:t>not</a:t>
             </a:r>
             <a:endParaRPr lang="en-US" sz="850" dirty="0"/>
           </a:p>
@@ -30330,7 +28878,7 @@
                 <a:ea typeface="Trebuchet MS" pitchFamily="34" charset="-122"/>
                 <a:cs typeface="Trebuchet MS" pitchFamily="34" charset="-120"/>
               </a:rPr>
-              <a:t>pack</a:t>
+              <a:t>comfort</a:t>
             </a:r>
             <a:endParaRPr lang="en-US" sz="1300" dirty="0"/>
           </a:p>
@@ -30369,7 +28917,7 @@
                 <a:ea typeface="Calibri" pitchFamily="34" charset="-122"/>
                 <a:cs typeface="Calibri" pitchFamily="34" charset="-120"/>
               </a:rPr>
-              <a:t>to put things into a bag or box</a:t>
+              <a:t>a feeling of ease</a:t>
             </a:r>
             <a:endParaRPr lang="en-US" sz="850" dirty="0"/>
           </a:p>
@@ -30442,7 +28990,7 @@
                 <a:ea typeface="Trebuchet MS" pitchFamily="34" charset="-122"/>
                 <a:cs typeface="Trebuchet MS" pitchFamily="34" charset="-120"/>
               </a:rPr>
-              <a:t>ing</a:t>
+              <a:t>able</a:t>
             </a:r>
             <a:endParaRPr lang="en-US" sz="1300" dirty="0"/>
           </a:p>
@@ -30481,7 +29029,7 @@
                 <a:ea typeface="Calibri" pitchFamily="34" charset="-122"/>
                 <a:cs typeface="Calibri" pitchFamily="34" charset="-120"/>
               </a:rPr>
-              <a:t>happening now</a:t>
+              <a:t>able to be</a:t>
             </a:r>
             <a:endParaRPr lang="en-US" sz="850" dirty="0"/>
           </a:p>
@@ -30489,57 +29037,150 @@
       </p:sp>
       <p:sp>
         <p:nvSpPr>
-          <p:cNvPr id="25" name="Text 23"/>
-          <p:cNvSpPr/>
-          <p:nvPr/>
-        </p:nvSpPr>
-        <p:spPr>
-          <a:xfrm>
-            <a:off x="6519672" y="2752344"/>
-            <a:ext cx="1828800" cy="182880"/>
-          </a:xfrm>
-          <a:prstGeom prst="rect">
-            <a:avLst/>
-          </a:prstGeom>
-          <a:noFill/>
-          <a:ln/>
-        </p:spPr>
-        <p:txBody>
-          <a:bodyPr wrap="square" lIns="0" tIns="0" rIns="0" bIns="0" rtlCol="0" anchor="t"/>
-          <a:lstStyle/>
-          <a:p>
-            <a:pPr algn="ctr" indent="0" marL="0">
-              <a:buNone/>
-            </a:pPr>
-            <a:r>
-              <a:rPr lang="en-US" sz="700" i="1" dirty="0">
-                <a:solidFill>
-                  <a:srgbClr val="94A3B8"/>
+          <p:cNvPr id="25" name="Shape 23"/>
+          <p:cNvSpPr/>
+          <p:nvPr/>
+        </p:nvSpPr>
+        <p:spPr>
+          <a:xfrm>
+            <a:off x="365760" y="3273552"/>
+            <a:ext cx="1371600" cy="658368"/>
+          </a:xfrm>
+          <a:prstGeom prst="rect">
+            <a:avLst>
+              <a:gd name="adj" fmla="val 8333"/>
+            </a:avLst>
+          </a:prstGeom>
+          <a:solidFill>
+            <a:srgbClr val="E2E8F0"/>
+          </a:solidFill>
+          <a:ln w="12700">
+            <a:solidFill>
+              <a:srgbClr val="E2E8F0"/>
+            </a:solidFill>
+            <a:prstDash val="solid"/>
+          </a:ln>
+        </p:spPr>
+      </p:sp>
+      <p:sp>
+        <p:nvSpPr>
+          <p:cNvPr id="26" name="Text 24"/>
+          <p:cNvSpPr/>
+          <p:nvPr/>
+        </p:nvSpPr>
+        <p:spPr>
+          <a:xfrm>
+            <a:off x="365760" y="3273552"/>
+            <a:ext cx="1371600" cy="658368"/>
+          </a:xfrm>
+          <a:prstGeom prst="rect">
+            <a:avLst/>
+          </a:prstGeom>
+          <a:noFill/>
+          <a:ln/>
+        </p:spPr>
+        <p:txBody>
+          <a:bodyPr wrap="square" lIns="0" tIns="0" rIns="0" bIns="0" rtlCol="0" anchor="ctr"/>
+          <a:lstStyle/>
+          <a:p>
+            <a:pPr algn="ctr" indent="0" marL="0">
+              <a:buNone/>
+            </a:pPr>
+            <a:r>
+              <a:rPr lang="en-US" sz="1100" b="1" dirty="0">
+                <a:solidFill>
+                  <a:srgbClr val="475569"/>
+                </a:solidFill>
+                <a:latin typeface="Trebuchet MS" pitchFamily="34" charset="0"/>
+                <a:ea typeface="Trebuchet MS" pitchFamily="34" charset="-122"/>
+                <a:cs typeface="Trebuchet MS" pitchFamily="34" charset="-120"/>
+              </a:rPr>
+              <a:t>Syllables</a:t>
+            </a:r>
+            <a:endParaRPr lang="en-US" sz="1100" dirty="0"/>
+          </a:p>
+        </p:txBody>
+      </p:sp>
+      <p:sp>
+        <p:nvSpPr>
+          <p:cNvPr id="27" name="Shape 25"/>
+          <p:cNvSpPr/>
+          <p:nvPr/>
+        </p:nvSpPr>
+        <p:spPr>
+          <a:xfrm>
+            <a:off x="1874520" y="3273552"/>
+            <a:ext cx="6903720" cy="658368"/>
+          </a:xfrm>
+          <a:prstGeom prst="rect">
+            <a:avLst>
+              <a:gd name="adj" fmla="val 8333"/>
+            </a:avLst>
+          </a:prstGeom>
+          <a:solidFill>
+            <a:srgbClr val="F8FAFC"/>
+          </a:solidFill>
+          <a:ln w="12700">
+            <a:solidFill>
+              <a:srgbClr val="E2E8F0"/>
+            </a:solidFill>
+            <a:prstDash val="dash"/>
+          </a:ln>
+        </p:spPr>
+      </p:sp>
+      <p:sp>
+        <p:nvSpPr>
+          <p:cNvPr id="28" name="Text 26"/>
+          <p:cNvSpPr/>
+          <p:nvPr/>
+        </p:nvSpPr>
+        <p:spPr>
+          <a:xfrm>
+            <a:off x="1874520" y="3273552"/>
+            <a:ext cx="6903720" cy="658368"/>
+          </a:xfrm>
+          <a:prstGeom prst="rect">
+            <a:avLst/>
+          </a:prstGeom>
+          <a:noFill/>
+          <a:ln/>
+        </p:spPr>
+        <p:txBody>
+          <a:bodyPr wrap="square" rtlCol="0" anchor="ctr"/>
+          <a:lstStyle/>
+          <a:p>
+            <a:pPr algn="ctr" indent="0" marL="0">
+              <a:buNone/>
+            </a:pPr>
+            <a:r>
+              <a:rPr lang="en-US" sz="1100" i="1" dirty="0">
+                <a:solidFill>
+                  <a:srgbClr val="CBD5E1"/>
                 </a:solidFill>
                 <a:latin typeface="Calibri" pitchFamily="34" charset="0"/>
                 <a:ea typeface="Calibri" pitchFamily="34" charset="-122"/>
                 <a:cs typeface="Calibri" pitchFamily="34" charset="-120"/>
               </a:rPr>
-              <a:t>base 'pack' doubles 'k' — 'ck' counts as one unit, no change needed</a:t>
-            </a:r>
-            <a:endParaRPr lang="en-US" sz="700" dirty="0"/>
-          </a:p>
-        </p:txBody>
-      </p:sp>
-      <p:sp>
-        <p:nvSpPr>
-          <p:cNvPr id="26" name="Shape 24"/>
-          <p:cNvSpPr/>
-          <p:nvPr/>
-        </p:nvSpPr>
-        <p:spPr>
-          <a:xfrm>
-            <a:off x="365760" y="3273552"/>
-            <a:ext cx="1371600" cy="658368"/>
+              <a:t>Write here...</a:t>
+            </a:r>
+            <a:endParaRPr lang="en-US" sz="1100" dirty="0"/>
+          </a:p>
+        </p:txBody>
+      </p:sp>
+      <p:sp>
+        <p:nvSpPr>
+          <p:cNvPr id="29" name="Shape 27"/>
+          <p:cNvSpPr/>
+          <p:nvPr/>
+        </p:nvSpPr>
+        <p:spPr>
+          <a:xfrm>
+            <a:off x="365760" y="4096512"/>
+            <a:ext cx="1371600" cy="804672"/>
           </a:xfrm>
           <a:prstGeom prst="rect">
             <a:avLst>
-              <a:gd name="adj" fmla="val 8333"/>
+              <a:gd name="adj" fmla="val 6818"/>
             </a:avLst>
           </a:prstGeom>
           <a:solidFill>
@@ -30555,14 +29196,14 @@
       </p:sp>
       <p:sp>
         <p:nvSpPr>
-          <p:cNvPr id="27" name="Text 25"/>
-          <p:cNvSpPr/>
-          <p:nvPr/>
-        </p:nvSpPr>
-        <p:spPr>
-          <a:xfrm>
-            <a:off x="365760" y="3273552"/>
-            <a:ext cx="1371600" cy="658368"/>
+          <p:cNvPr id="30" name="Text 28"/>
+          <p:cNvSpPr/>
+          <p:nvPr/>
+        </p:nvSpPr>
+        <p:spPr>
+          <a:xfrm>
+            <a:off x="365760" y="4096512"/>
+            <a:ext cx="1371600" cy="804672"/>
           </a:xfrm>
           <a:prstGeom prst="rect">
             <a:avLst/>
@@ -30586,7 +29227,7 @@
                 <a:ea typeface="Trebuchet MS" pitchFamily="34" charset="-122"/>
                 <a:cs typeface="Trebuchet MS" pitchFamily="34" charset="-120"/>
               </a:rPr>
-              <a:t>Syllables</a:t>
+              <a:t>Phonemes</a:t>
             </a:r>
             <a:endParaRPr lang="en-US" sz="1100" dirty="0"/>
           </a:p>
@@ -30594,80 +29235,14 @@
       </p:sp>
       <p:sp>
         <p:nvSpPr>
-          <p:cNvPr id="28" name="Shape 26"/>
-          <p:cNvSpPr/>
-          <p:nvPr/>
-        </p:nvSpPr>
-        <p:spPr>
-          <a:xfrm>
-            <a:off x="1874520" y="3273552"/>
-            <a:ext cx="6903720" cy="658368"/>
-          </a:xfrm>
-          <a:prstGeom prst="rect">
-            <a:avLst>
-              <a:gd name="adj" fmla="val 8333"/>
-            </a:avLst>
-          </a:prstGeom>
-          <a:solidFill>
-            <a:srgbClr val="F8FAFC"/>
-          </a:solidFill>
-          <a:ln w="12700">
-            <a:solidFill>
-              <a:srgbClr val="E2E8F0"/>
-            </a:solidFill>
-            <a:prstDash val="dash"/>
-          </a:ln>
-        </p:spPr>
-      </p:sp>
-      <p:sp>
-        <p:nvSpPr>
-          <p:cNvPr id="29" name="Text 27"/>
-          <p:cNvSpPr/>
-          <p:nvPr/>
-        </p:nvSpPr>
-        <p:spPr>
-          <a:xfrm>
-            <a:off x="1874520" y="3273552"/>
-            <a:ext cx="6903720" cy="658368"/>
-          </a:xfrm>
-          <a:prstGeom prst="rect">
-            <a:avLst/>
-          </a:prstGeom>
-          <a:noFill/>
-          <a:ln/>
-        </p:spPr>
-        <p:txBody>
-          <a:bodyPr wrap="square" rtlCol="0" anchor="ctr"/>
-          <a:lstStyle/>
-          <a:p>
-            <a:pPr algn="ctr" indent="0" marL="0">
-              <a:buNone/>
-            </a:pPr>
-            <a:r>
-              <a:rPr lang="en-US" sz="1100" i="1" dirty="0">
-                <a:solidFill>
-                  <a:srgbClr val="CBD5E1"/>
-                </a:solidFill>
-                <a:latin typeface="Calibri" pitchFamily="34" charset="0"/>
-                <a:ea typeface="Calibri" pitchFamily="34" charset="-122"/>
-                <a:cs typeface="Calibri" pitchFamily="34" charset="-120"/>
-              </a:rPr>
-              <a:t>Write here...</a:t>
-            </a:r>
-            <a:endParaRPr lang="en-US" sz="1100" dirty="0"/>
-          </a:p>
-        </p:txBody>
-      </p:sp>
-      <p:sp>
-        <p:nvSpPr>
-          <p:cNvPr id="30" name="Shape 28"/>
-          <p:cNvSpPr/>
-          <p:nvPr/>
-        </p:nvSpPr>
-        <p:spPr>
-          <a:xfrm>
-            <a:off x="365760" y="4096512"/>
-            <a:ext cx="1371600" cy="804672"/>
+          <p:cNvPr id="31" name="Shape 29"/>
+          <p:cNvSpPr/>
+          <p:nvPr/>
+        </p:nvSpPr>
+        <p:spPr>
+          <a:xfrm>
+            <a:off x="1874520" y="4096512"/>
+            <a:ext cx="6903720" cy="804672"/>
           </a:xfrm>
           <a:prstGeom prst="rect">
             <a:avLst>
@@ -30675,85 +29250,19 @@
             </a:avLst>
           </a:prstGeom>
           <a:solidFill>
-            <a:srgbClr val="E2E8F0"/>
+            <a:srgbClr val="F8FAFC"/>
           </a:solidFill>
           <a:ln w="12700">
             <a:solidFill>
               <a:srgbClr val="E2E8F0"/>
             </a:solidFill>
-            <a:prstDash val="solid"/>
-          </a:ln>
-        </p:spPr>
-      </p:sp>
-      <p:sp>
-        <p:nvSpPr>
-          <p:cNvPr id="31" name="Text 29"/>
-          <p:cNvSpPr/>
-          <p:nvPr/>
-        </p:nvSpPr>
-        <p:spPr>
-          <a:xfrm>
-            <a:off x="365760" y="4096512"/>
-            <a:ext cx="1371600" cy="804672"/>
-          </a:xfrm>
-          <a:prstGeom prst="rect">
-            <a:avLst/>
-          </a:prstGeom>
-          <a:noFill/>
-          <a:ln/>
-        </p:spPr>
-        <p:txBody>
-          <a:bodyPr wrap="square" lIns="0" tIns="0" rIns="0" bIns="0" rtlCol="0" anchor="ctr"/>
-          <a:lstStyle/>
-          <a:p>
-            <a:pPr algn="ctr" indent="0" marL="0">
-              <a:buNone/>
-            </a:pPr>
-            <a:r>
-              <a:rPr lang="en-US" sz="1100" b="1" dirty="0">
-                <a:solidFill>
-                  <a:srgbClr val="475569"/>
-                </a:solidFill>
-                <a:latin typeface="Trebuchet MS" pitchFamily="34" charset="0"/>
-                <a:ea typeface="Trebuchet MS" pitchFamily="34" charset="-122"/>
-                <a:cs typeface="Trebuchet MS" pitchFamily="34" charset="-120"/>
-              </a:rPr>
-              <a:t>Phonemes</a:t>
-            </a:r>
-            <a:endParaRPr lang="en-US" sz="1100" dirty="0"/>
-          </a:p>
-        </p:txBody>
-      </p:sp>
-      <p:sp>
-        <p:nvSpPr>
-          <p:cNvPr id="32" name="Shape 30"/>
-          <p:cNvSpPr/>
-          <p:nvPr/>
-        </p:nvSpPr>
-        <p:spPr>
-          <a:xfrm>
-            <a:off x="1874520" y="4096512"/>
-            <a:ext cx="6903720" cy="804672"/>
-          </a:xfrm>
-          <a:prstGeom prst="rect">
-            <a:avLst>
-              <a:gd name="adj" fmla="val 6818"/>
-            </a:avLst>
-          </a:prstGeom>
-          <a:solidFill>
-            <a:srgbClr val="F8FAFC"/>
-          </a:solidFill>
-          <a:ln w="12700">
-            <a:solidFill>
-              <a:srgbClr val="E2E8F0"/>
-            </a:solidFill>
             <a:prstDash val="dash"/>
           </a:ln>
         </p:spPr>
       </p:sp>
       <p:sp>
         <p:nvSpPr>
-          <p:cNvPr id="33" name="Text 31"/>
+          <p:cNvPr id="32" name="Text 30"/>
           <p:cNvSpPr/>
           <p:nvPr/>
         </p:nvSpPr>
@@ -31215,7 +29724,7 @@
                 <a:ea typeface="Trebuchet MS" pitchFamily="34" charset="-122"/>
                 <a:cs typeface="Trebuchet MS" pitchFamily="34" charset="-120"/>
               </a:rPr>
-              <a:t>unpacking</a:t>
+              <a:t>uncomfortable</a:t>
             </a:r>
             <a:endParaRPr lang="en-US" sz="2800" dirty="0"/>
           </a:p>
@@ -31393,7 +29902,7 @@
                 <a:ea typeface="Calibri" pitchFamily="34" charset="-122"/>
                 <a:cs typeface="Calibri" pitchFamily="34" charset="-120"/>
               </a:rPr>
-              <a:t>opposite of</a:t>
+              <a:t>not</a:t>
             </a:r>
             <a:endParaRPr lang="en-US" sz="850" dirty="0"/>
           </a:p>
@@ -31466,7 +29975,7 @@
                 <a:ea typeface="Trebuchet MS" pitchFamily="34" charset="-122"/>
                 <a:cs typeface="Trebuchet MS" pitchFamily="34" charset="-120"/>
               </a:rPr>
-              <a:t>pack</a:t>
+              <a:t>comfort</a:t>
             </a:r>
             <a:endParaRPr lang="en-US" sz="1300" dirty="0"/>
           </a:p>
@@ -31505,7 +30014,7 @@
                 <a:ea typeface="Calibri" pitchFamily="34" charset="-122"/>
                 <a:cs typeface="Calibri" pitchFamily="34" charset="-120"/>
               </a:rPr>
-              <a:t>to put things into a bag or box</a:t>
+              <a:t>a feeling of ease</a:t>
             </a:r>
             <a:endParaRPr lang="en-US" sz="850" dirty="0"/>
           </a:p>
@@ -31578,7 +30087,7 @@
                 <a:ea typeface="Trebuchet MS" pitchFamily="34" charset="-122"/>
                 <a:cs typeface="Trebuchet MS" pitchFamily="34" charset="-120"/>
               </a:rPr>
-              <a:t>ing</a:t>
+              <a:t>able</a:t>
             </a:r>
             <a:endParaRPr lang="en-US" sz="1300" dirty="0"/>
           </a:p>
@@ -31617,7 +30126,7 @@
                 <a:ea typeface="Calibri" pitchFamily="34" charset="-122"/>
                 <a:cs typeface="Calibri" pitchFamily="34" charset="-120"/>
               </a:rPr>
-              <a:t>happening now</a:t>
+              <a:t>able to be</a:t>
             </a:r>
             <a:endParaRPr lang="en-US" sz="850" dirty="0"/>
           </a:p>
@@ -31625,46 +30134,7 @@
       </p:sp>
       <p:sp>
         <p:nvSpPr>
-          <p:cNvPr id="25" name="Text 23"/>
-          <p:cNvSpPr/>
-          <p:nvPr/>
-        </p:nvSpPr>
-        <p:spPr>
-          <a:xfrm>
-            <a:off x="6519672" y="2752344"/>
-            <a:ext cx="1828800" cy="182880"/>
-          </a:xfrm>
-          <a:prstGeom prst="rect">
-            <a:avLst/>
-          </a:prstGeom>
-          <a:noFill/>
-          <a:ln/>
-        </p:spPr>
-        <p:txBody>
-          <a:bodyPr wrap="square" lIns="0" tIns="0" rIns="0" bIns="0" rtlCol="0" anchor="t"/>
-          <a:lstStyle/>
-          <a:p>
-            <a:pPr algn="ctr" indent="0" marL="0">
-              <a:buNone/>
-            </a:pPr>
-            <a:r>
-              <a:rPr lang="en-US" sz="700" i="1" dirty="0">
-                <a:solidFill>
-                  <a:srgbClr val="94A3B8"/>
-                </a:solidFill>
-                <a:latin typeface="Calibri" pitchFamily="34" charset="0"/>
-                <a:ea typeface="Calibri" pitchFamily="34" charset="-122"/>
-                <a:cs typeface="Calibri" pitchFamily="34" charset="-120"/>
-              </a:rPr>
-              <a:t>base 'pack' doubles 'k' — 'ck' counts as one unit, no change needed</a:t>
-            </a:r>
-            <a:endParaRPr lang="en-US" sz="700" dirty="0"/>
-          </a:p>
-        </p:txBody>
-      </p:sp>
-      <p:sp>
-        <p:nvSpPr>
-          <p:cNvPr id="26" name="Shape 24"/>
+          <p:cNvPr id="25" name="Shape 23"/>
           <p:cNvSpPr/>
           <p:nvPr/>
         </p:nvSpPr>
@@ -31691,7 +30161,7 @@
       </p:sp>
       <p:sp>
         <p:nvSpPr>
-          <p:cNvPr id="27" name="Text 25"/>
+          <p:cNvPr id="26" name="Text 24"/>
           <p:cNvSpPr/>
           <p:nvPr/>
         </p:nvSpPr>
@@ -31730,7 +30200,7 @@
       </p:sp>
       <p:sp>
         <p:nvSpPr>
-          <p:cNvPr id="28" name="Shape 26"/>
+          <p:cNvPr id="27" name="Shape 25"/>
           <p:cNvSpPr/>
           <p:nvPr/>
         </p:nvSpPr>
@@ -31757,14 +30227,14 @@
       </p:sp>
       <p:sp>
         <p:nvSpPr>
-          <p:cNvPr id="29" name="Shape 27"/>
-          <p:cNvSpPr/>
-          <p:nvPr/>
-        </p:nvSpPr>
-        <p:spPr>
-          <a:xfrm>
-            <a:off x="2313432" y="3364992"/>
-            <a:ext cx="1645920" cy="475488"/>
+          <p:cNvPr id="28" name="Shape 26"/>
+          <p:cNvSpPr/>
+          <p:nvPr/>
+        </p:nvSpPr>
+        <p:spPr>
+          <a:xfrm>
+            <a:off x="1978152" y="3364992"/>
+            <a:ext cx="1225296" cy="475488"/>
           </a:xfrm>
           <a:prstGeom prst="rect">
             <a:avLst>
@@ -31784,14 +30254,14 @@
       </p:sp>
       <p:sp>
         <p:nvSpPr>
-          <p:cNvPr id="30" name="Text 28"/>
-          <p:cNvSpPr/>
-          <p:nvPr/>
-        </p:nvSpPr>
-        <p:spPr>
-          <a:xfrm>
-            <a:off x="2313432" y="3364992"/>
-            <a:ext cx="1645920" cy="475488"/>
+          <p:cNvPr id="29" name="Text 27"/>
+          <p:cNvSpPr/>
+          <p:nvPr/>
+        </p:nvSpPr>
+        <p:spPr>
+          <a:xfrm>
+            <a:off x="1978152" y="3364992"/>
+            <a:ext cx="1225296" cy="475488"/>
           </a:xfrm>
           <a:prstGeom prst="rect">
             <a:avLst/>
@@ -31823,14 +30293,14 @@
       </p:sp>
       <p:sp>
         <p:nvSpPr>
-          <p:cNvPr id="31" name="Text 29"/>
-          <p:cNvSpPr/>
-          <p:nvPr/>
-        </p:nvSpPr>
-        <p:spPr>
-          <a:xfrm>
-            <a:off x="3959352" y="3364992"/>
-            <a:ext cx="411480" cy="475488"/>
+          <p:cNvPr id="30" name="Text 28"/>
+          <p:cNvSpPr/>
+          <p:nvPr/>
+        </p:nvSpPr>
+        <p:spPr>
+          <a:xfrm>
+            <a:off x="3203448" y="3364992"/>
+            <a:ext cx="76200" cy="475488"/>
           </a:xfrm>
           <a:prstGeom prst="rect">
             <a:avLst/>
@@ -31862,14 +30332,14 @@
       </p:sp>
       <p:sp>
         <p:nvSpPr>
-          <p:cNvPr id="32" name="Shape 30"/>
-          <p:cNvSpPr/>
-          <p:nvPr/>
-        </p:nvSpPr>
-        <p:spPr>
-          <a:xfrm>
-            <a:off x="4370832" y="3364992"/>
-            <a:ext cx="1645920" cy="475488"/>
+          <p:cNvPr id="31" name="Shape 29"/>
+          <p:cNvSpPr/>
+          <p:nvPr/>
+        </p:nvSpPr>
+        <p:spPr>
+          <a:xfrm>
+            <a:off x="3279648" y="3364992"/>
+            <a:ext cx="1225296" cy="475488"/>
           </a:xfrm>
           <a:prstGeom prst="rect">
             <a:avLst>
@@ -31889,14 +30359,14 @@
       </p:sp>
       <p:sp>
         <p:nvSpPr>
-          <p:cNvPr id="33" name="Text 31"/>
-          <p:cNvSpPr/>
-          <p:nvPr/>
-        </p:nvSpPr>
-        <p:spPr>
-          <a:xfrm>
-            <a:off x="4370832" y="3364992"/>
-            <a:ext cx="1645920" cy="475488"/>
+          <p:cNvPr id="32" name="Text 30"/>
+          <p:cNvSpPr/>
+          <p:nvPr/>
+        </p:nvSpPr>
+        <p:spPr>
+          <a:xfrm>
+            <a:off x="3279648" y="3364992"/>
+            <a:ext cx="1225296" cy="475488"/>
           </a:xfrm>
           <a:prstGeom prst="rect">
             <a:avLst/>
@@ -31920,7 +30390,7 @@
                 <a:ea typeface="Trebuchet MS" pitchFamily="34" charset="-122"/>
                 <a:cs typeface="Trebuchet MS" pitchFamily="34" charset="-120"/>
               </a:rPr>
-              <a:t>pack</a:t>
+              <a:t>com</a:t>
             </a:r>
             <a:endParaRPr lang="en-US" sz="1400" dirty="0"/>
           </a:p>
@@ -31928,14 +30398,14 @@
       </p:sp>
       <p:sp>
         <p:nvSpPr>
-          <p:cNvPr id="34" name="Text 32"/>
-          <p:cNvSpPr/>
-          <p:nvPr/>
-        </p:nvSpPr>
-        <p:spPr>
-          <a:xfrm>
-            <a:off x="6016752" y="3364992"/>
-            <a:ext cx="411480" cy="475488"/>
+          <p:cNvPr id="33" name="Text 31"/>
+          <p:cNvSpPr/>
+          <p:nvPr/>
+        </p:nvSpPr>
+        <p:spPr>
+          <a:xfrm>
+            <a:off x="4504944" y="3364992"/>
+            <a:ext cx="76200" cy="475488"/>
           </a:xfrm>
           <a:prstGeom prst="rect">
             <a:avLst/>
@@ -31967,14 +30437,14 @@
       </p:sp>
       <p:sp>
         <p:nvSpPr>
-          <p:cNvPr id="35" name="Shape 33"/>
-          <p:cNvSpPr/>
-          <p:nvPr/>
-        </p:nvSpPr>
-        <p:spPr>
-          <a:xfrm>
-            <a:off x="6428232" y="3364992"/>
-            <a:ext cx="1645920" cy="475488"/>
+          <p:cNvPr id="34" name="Shape 32"/>
+          <p:cNvSpPr/>
+          <p:nvPr/>
+        </p:nvSpPr>
+        <p:spPr>
+          <a:xfrm>
+            <a:off x="4581144" y="3364992"/>
+            <a:ext cx="1225296" cy="475488"/>
           </a:xfrm>
           <a:prstGeom prst="rect">
             <a:avLst>
@@ -31994,14 +30464,14 @@
       </p:sp>
       <p:sp>
         <p:nvSpPr>
-          <p:cNvPr id="36" name="Text 34"/>
-          <p:cNvSpPr/>
-          <p:nvPr/>
-        </p:nvSpPr>
-        <p:spPr>
-          <a:xfrm>
-            <a:off x="6428232" y="3364992"/>
-            <a:ext cx="1645920" cy="475488"/>
+          <p:cNvPr id="35" name="Text 33"/>
+          <p:cNvSpPr/>
+          <p:nvPr/>
+        </p:nvSpPr>
+        <p:spPr>
+          <a:xfrm>
+            <a:off x="4581144" y="3364992"/>
+            <a:ext cx="1225296" cy="475488"/>
           </a:xfrm>
           <a:prstGeom prst="rect">
             <a:avLst/>
@@ -32025,7 +30495,7 @@
                 <a:ea typeface="Trebuchet MS" pitchFamily="34" charset="-122"/>
                 <a:cs typeface="Trebuchet MS" pitchFamily="34" charset="-120"/>
               </a:rPr>
-              <a:t>ing</a:t>
+              <a:t>for</a:t>
             </a:r>
             <a:endParaRPr lang="en-US" sz="1400" dirty="0"/>
           </a:p>
@@ -32033,7 +30503,217 @@
       </p:sp>
       <p:sp>
         <p:nvSpPr>
+          <p:cNvPr id="36" name="Text 34"/>
+          <p:cNvSpPr/>
+          <p:nvPr/>
+        </p:nvSpPr>
+        <p:spPr>
+          <a:xfrm>
+            <a:off x="5806440" y="3364992"/>
+            <a:ext cx="76200" cy="475488"/>
+          </a:xfrm>
+          <a:prstGeom prst="rect">
+            <a:avLst/>
+          </a:prstGeom>
+          <a:noFill/>
+          <a:ln/>
+        </p:spPr>
+        <p:txBody>
+          <a:bodyPr wrap="square" lIns="0" tIns="0" rIns="0" bIns="0" rtlCol="0" anchor="ctr"/>
+          <a:lstStyle/>
+          <a:p>
+            <a:pPr algn="ctr" indent="0" marL="0">
+              <a:buNone/>
+            </a:pPr>
+            <a:r>
+              <a:rPr lang="en-US" sz="1600" b="1" dirty="0">
+                <a:solidFill>
+                  <a:srgbClr val="0D9488"/>
+                </a:solidFill>
+                <a:latin typeface="Trebuchet MS" pitchFamily="34" charset="0"/>
+                <a:ea typeface="Trebuchet MS" pitchFamily="34" charset="-122"/>
+                <a:cs typeface="Trebuchet MS" pitchFamily="34" charset="-120"/>
+              </a:rPr>
+              <a:t>·</a:t>
+            </a:r>
+            <a:endParaRPr lang="en-US" sz="1600" dirty="0"/>
+          </a:p>
+        </p:txBody>
+      </p:sp>
+      <p:sp>
+        <p:nvSpPr>
           <p:cNvPr id="37" name="Shape 35"/>
+          <p:cNvSpPr/>
+          <p:nvPr/>
+        </p:nvSpPr>
+        <p:spPr>
+          <a:xfrm>
+            <a:off x="5882640" y="3364992"/>
+            <a:ext cx="1225296" cy="475488"/>
+          </a:xfrm>
+          <a:prstGeom prst="rect">
+            <a:avLst>
+              <a:gd name="adj" fmla="val 9615"/>
+            </a:avLst>
+          </a:prstGeom>
+          <a:solidFill>
+            <a:srgbClr val="FFFFFF"/>
+          </a:solidFill>
+          <a:ln w="12700">
+            <a:solidFill>
+              <a:srgbClr val="0D9488"/>
+            </a:solidFill>
+            <a:prstDash val="solid"/>
+          </a:ln>
+        </p:spPr>
+      </p:sp>
+      <p:sp>
+        <p:nvSpPr>
+          <p:cNvPr id="38" name="Text 36"/>
+          <p:cNvSpPr/>
+          <p:nvPr/>
+        </p:nvSpPr>
+        <p:spPr>
+          <a:xfrm>
+            <a:off x="5882640" y="3364992"/>
+            <a:ext cx="1225296" cy="475488"/>
+          </a:xfrm>
+          <a:prstGeom prst="rect">
+            <a:avLst/>
+          </a:prstGeom>
+          <a:noFill/>
+          <a:ln/>
+        </p:spPr>
+        <p:txBody>
+          <a:bodyPr wrap="square" lIns="0" tIns="0" rIns="0" bIns="0" rtlCol="0" anchor="ctr"/>
+          <a:lstStyle/>
+          <a:p>
+            <a:pPr algn="ctr" indent="0" marL="0">
+              <a:buNone/>
+            </a:pPr>
+            <a:r>
+              <a:rPr lang="en-US" sz="1400" b="1" dirty="0">
+                <a:solidFill>
+                  <a:srgbClr val="0D9488"/>
+                </a:solidFill>
+                <a:latin typeface="Trebuchet MS" pitchFamily="34" charset="0"/>
+                <a:ea typeface="Trebuchet MS" pitchFamily="34" charset="-122"/>
+                <a:cs typeface="Trebuchet MS" pitchFamily="34" charset="-120"/>
+              </a:rPr>
+              <a:t>ta</a:t>
+            </a:r>
+            <a:endParaRPr lang="en-US" sz="1400" dirty="0"/>
+          </a:p>
+        </p:txBody>
+      </p:sp>
+      <p:sp>
+        <p:nvSpPr>
+          <p:cNvPr id="39" name="Text 37"/>
+          <p:cNvSpPr/>
+          <p:nvPr/>
+        </p:nvSpPr>
+        <p:spPr>
+          <a:xfrm>
+            <a:off x="7107936" y="3364992"/>
+            <a:ext cx="76200" cy="475488"/>
+          </a:xfrm>
+          <a:prstGeom prst="rect">
+            <a:avLst/>
+          </a:prstGeom>
+          <a:noFill/>
+          <a:ln/>
+        </p:spPr>
+        <p:txBody>
+          <a:bodyPr wrap="square" lIns="0" tIns="0" rIns="0" bIns="0" rtlCol="0" anchor="ctr"/>
+          <a:lstStyle/>
+          <a:p>
+            <a:pPr algn="ctr" indent="0" marL="0">
+              <a:buNone/>
+            </a:pPr>
+            <a:r>
+              <a:rPr lang="en-US" sz="1600" b="1" dirty="0">
+                <a:solidFill>
+                  <a:srgbClr val="0D9488"/>
+                </a:solidFill>
+                <a:latin typeface="Trebuchet MS" pitchFamily="34" charset="0"/>
+                <a:ea typeface="Trebuchet MS" pitchFamily="34" charset="-122"/>
+                <a:cs typeface="Trebuchet MS" pitchFamily="34" charset="-120"/>
+              </a:rPr>
+              <a:t>·</a:t>
+            </a:r>
+            <a:endParaRPr lang="en-US" sz="1600" dirty="0"/>
+          </a:p>
+        </p:txBody>
+      </p:sp>
+      <p:sp>
+        <p:nvSpPr>
+          <p:cNvPr id="40" name="Shape 38"/>
+          <p:cNvSpPr/>
+          <p:nvPr/>
+        </p:nvSpPr>
+        <p:spPr>
+          <a:xfrm>
+            <a:off x="7184136" y="3364992"/>
+            <a:ext cx="1225296" cy="475488"/>
+          </a:xfrm>
+          <a:prstGeom prst="rect">
+            <a:avLst>
+              <a:gd name="adj" fmla="val 9615"/>
+            </a:avLst>
+          </a:prstGeom>
+          <a:solidFill>
+            <a:srgbClr val="FFFFFF"/>
+          </a:solidFill>
+          <a:ln w="12700">
+            <a:solidFill>
+              <a:srgbClr val="0D9488"/>
+            </a:solidFill>
+            <a:prstDash val="solid"/>
+          </a:ln>
+        </p:spPr>
+      </p:sp>
+      <p:sp>
+        <p:nvSpPr>
+          <p:cNvPr id="41" name="Text 39"/>
+          <p:cNvSpPr/>
+          <p:nvPr/>
+        </p:nvSpPr>
+        <p:spPr>
+          <a:xfrm>
+            <a:off x="7184136" y="3364992"/>
+            <a:ext cx="1225296" cy="475488"/>
+          </a:xfrm>
+          <a:prstGeom prst="rect">
+            <a:avLst/>
+          </a:prstGeom>
+          <a:noFill/>
+          <a:ln/>
+        </p:spPr>
+        <p:txBody>
+          <a:bodyPr wrap="square" lIns="0" tIns="0" rIns="0" bIns="0" rtlCol="0" anchor="ctr"/>
+          <a:lstStyle/>
+          <a:p>
+            <a:pPr algn="ctr" indent="0" marL="0">
+              <a:buNone/>
+            </a:pPr>
+            <a:r>
+              <a:rPr lang="en-US" sz="1400" b="1" dirty="0">
+                <a:solidFill>
+                  <a:srgbClr val="0D9488"/>
+                </a:solidFill>
+                <a:latin typeface="Trebuchet MS" pitchFamily="34" charset="0"/>
+                <a:ea typeface="Trebuchet MS" pitchFamily="34" charset="-122"/>
+                <a:cs typeface="Trebuchet MS" pitchFamily="34" charset="-120"/>
+              </a:rPr>
+              <a:t>ble</a:t>
+            </a:r>
+            <a:endParaRPr lang="en-US" sz="1400" dirty="0"/>
+          </a:p>
+        </p:txBody>
+      </p:sp>
+      <p:sp>
+        <p:nvSpPr>
+          <p:cNvPr id="42" name="Shape 40"/>
           <p:cNvSpPr/>
           <p:nvPr/>
         </p:nvSpPr>
@@ -32060,7 +30740,7 @@
       </p:sp>
       <p:sp>
         <p:nvSpPr>
-          <p:cNvPr id="38" name="Text 36"/>
+          <p:cNvPr id="43" name="Text 41"/>
           <p:cNvSpPr/>
           <p:nvPr/>
         </p:nvSpPr>
@@ -32099,7 +30779,7 @@
       </p:sp>
       <p:sp>
         <p:nvSpPr>
-          <p:cNvPr id="39" name="Shape 37"/>
+          <p:cNvPr id="44" name="Shape 42"/>
           <p:cNvSpPr/>
           <p:nvPr/>
         </p:nvSpPr>
@@ -32126,7 +30806,7 @@
       </p:sp>
       <p:sp>
         <p:nvSpPr>
-          <p:cNvPr id="40" name="Text 38"/>
+          <p:cNvPr id="45" name="Text 43"/>
           <p:cNvSpPr/>
           <p:nvPr/>
         </p:nvSpPr>
@@ -32588,7 +31268,7 @@
                 <a:ea typeface="Trebuchet MS" pitchFamily="34" charset="-122"/>
                 <a:cs typeface="Trebuchet MS" pitchFamily="34" charset="-120"/>
               </a:rPr>
-              <a:t>unpacking</a:t>
+              <a:t>uncomfortable</a:t>
             </a:r>
             <a:endParaRPr lang="en-US" sz="2800" dirty="0"/>
           </a:p>
@@ -32766,7 +31446,7 @@
                 <a:ea typeface="Calibri" pitchFamily="34" charset="-122"/>
                 <a:cs typeface="Calibri" pitchFamily="34" charset="-120"/>
               </a:rPr>
-              <a:t>opposite of</a:t>
+              <a:t>not</a:t>
             </a:r>
             <a:endParaRPr lang="en-US" sz="850" dirty="0"/>
           </a:p>
@@ -32839,7 +31519,7 @@
                 <a:ea typeface="Trebuchet MS" pitchFamily="34" charset="-122"/>
                 <a:cs typeface="Trebuchet MS" pitchFamily="34" charset="-120"/>
               </a:rPr>
-              <a:t>pack</a:t>
+              <a:t>comfort</a:t>
             </a:r>
             <a:endParaRPr lang="en-US" sz="1300" dirty="0"/>
           </a:p>
@@ -32878,7 +31558,7 @@
                 <a:ea typeface="Calibri" pitchFamily="34" charset="-122"/>
                 <a:cs typeface="Calibri" pitchFamily="34" charset="-120"/>
               </a:rPr>
-              <a:t>to put things into a bag or box</a:t>
+              <a:t>a feeling of ease</a:t>
             </a:r>
             <a:endParaRPr lang="en-US" sz="850" dirty="0"/>
           </a:p>
@@ -32951,7 +31631,7 @@
                 <a:ea typeface="Trebuchet MS" pitchFamily="34" charset="-122"/>
                 <a:cs typeface="Trebuchet MS" pitchFamily="34" charset="-120"/>
               </a:rPr>
-              <a:t>ing</a:t>
+              <a:t>able</a:t>
             </a:r>
             <a:endParaRPr lang="en-US" sz="1300" dirty="0"/>
           </a:p>
@@ -32990,7 +31670,7 @@
                 <a:ea typeface="Calibri" pitchFamily="34" charset="-122"/>
                 <a:cs typeface="Calibri" pitchFamily="34" charset="-120"/>
               </a:rPr>
-              <a:t>happening now</a:t>
+              <a:t>able to be</a:t>
             </a:r>
             <a:endParaRPr lang="en-US" sz="850" dirty="0"/>
           </a:p>
@@ -32998,46 +31678,7 @@
       </p:sp>
       <p:sp>
         <p:nvSpPr>
-          <p:cNvPr id="25" name="Text 23"/>
-          <p:cNvSpPr/>
-          <p:nvPr/>
-        </p:nvSpPr>
-        <p:spPr>
-          <a:xfrm>
-            <a:off x="6519672" y="2752344"/>
-            <a:ext cx="1828800" cy="182880"/>
-          </a:xfrm>
-          <a:prstGeom prst="rect">
-            <a:avLst/>
-          </a:prstGeom>
-          <a:noFill/>
-          <a:ln/>
-        </p:spPr>
-        <p:txBody>
-          <a:bodyPr wrap="square" lIns="0" tIns="0" rIns="0" bIns="0" rtlCol="0" anchor="t"/>
-          <a:lstStyle/>
-          <a:p>
-            <a:pPr algn="ctr" indent="0" marL="0">
-              <a:buNone/>
-            </a:pPr>
-            <a:r>
-              <a:rPr lang="en-US" sz="700" i="1" dirty="0">
-                <a:solidFill>
-                  <a:srgbClr val="94A3B8"/>
-                </a:solidFill>
-                <a:latin typeface="Calibri" pitchFamily="34" charset="0"/>
-                <a:ea typeface="Calibri" pitchFamily="34" charset="-122"/>
-                <a:cs typeface="Calibri" pitchFamily="34" charset="-120"/>
-              </a:rPr>
-              <a:t>base 'pack' doubles 'k' — 'ck' counts as one unit, no change needed</a:t>
-            </a:r>
-            <a:endParaRPr lang="en-US" sz="700" dirty="0"/>
-          </a:p>
-        </p:txBody>
-      </p:sp>
-      <p:sp>
-        <p:nvSpPr>
-          <p:cNvPr id="26" name="Shape 24"/>
+          <p:cNvPr id="25" name="Shape 23"/>
           <p:cNvSpPr/>
           <p:nvPr/>
         </p:nvSpPr>
@@ -33064,7 +31705,7 @@
       </p:sp>
       <p:sp>
         <p:nvSpPr>
-          <p:cNvPr id="27" name="Text 25"/>
+          <p:cNvPr id="26" name="Text 24"/>
           <p:cNvSpPr/>
           <p:nvPr/>
         </p:nvSpPr>
@@ -33103,7 +31744,7 @@
       </p:sp>
       <p:sp>
         <p:nvSpPr>
-          <p:cNvPr id="28" name="Shape 26"/>
+          <p:cNvPr id="27" name="Shape 25"/>
           <p:cNvSpPr/>
           <p:nvPr/>
         </p:nvSpPr>
@@ -33130,14 +31771,14 @@
       </p:sp>
       <p:sp>
         <p:nvSpPr>
-          <p:cNvPr id="29" name="Shape 27"/>
-          <p:cNvSpPr/>
-          <p:nvPr/>
-        </p:nvSpPr>
-        <p:spPr>
-          <a:xfrm>
-            <a:off x="2313432" y="3364992"/>
-            <a:ext cx="1645920" cy="475488"/>
+          <p:cNvPr id="28" name="Shape 26"/>
+          <p:cNvSpPr/>
+          <p:nvPr/>
+        </p:nvSpPr>
+        <p:spPr>
+          <a:xfrm>
+            <a:off x="1978152" y="3364992"/>
+            <a:ext cx="1225296" cy="475488"/>
           </a:xfrm>
           <a:prstGeom prst="rect">
             <a:avLst>
@@ -33157,14 +31798,14 @@
       </p:sp>
       <p:sp>
         <p:nvSpPr>
-          <p:cNvPr id="30" name="Text 28"/>
-          <p:cNvSpPr/>
-          <p:nvPr/>
-        </p:nvSpPr>
-        <p:spPr>
-          <a:xfrm>
-            <a:off x="2313432" y="3364992"/>
-            <a:ext cx="1645920" cy="475488"/>
+          <p:cNvPr id="29" name="Text 27"/>
+          <p:cNvSpPr/>
+          <p:nvPr/>
+        </p:nvSpPr>
+        <p:spPr>
+          <a:xfrm>
+            <a:off x="1978152" y="3364992"/>
+            <a:ext cx="1225296" cy="475488"/>
           </a:xfrm>
           <a:prstGeom prst="rect">
             <a:avLst/>
@@ -33196,14 +31837,14 @@
       </p:sp>
       <p:sp>
         <p:nvSpPr>
-          <p:cNvPr id="31" name="Text 29"/>
-          <p:cNvSpPr/>
-          <p:nvPr/>
-        </p:nvSpPr>
-        <p:spPr>
-          <a:xfrm>
-            <a:off x="3959352" y="3364992"/>
-            <a:ext cx="411480" cy="475488"/>
+          <p:cNvPr id="30" name="Text 28"/>
+          <p:cNvSpPr/>
+          <p:nvPr/>
+        </p:nvSpPr>
+        <p:spPr>
+          <a:xfrm>
+            <a:off x="3203448" y="3364992"/>
+            <a:ext cx="76200" cy="475488"/>
           </a:xfrm>
           <a:prstGeom prst="rect">
             <a:avLst/>
@@ -33235,14 +31876,14 @@
       </p:sp>
       <p:sp>
         <p:nvSpPr>
-          <p:cNvPr id="32" name="Shape 30"/>
-          <p:cNvSpPr/>
-          <p:nvPr/>
-        </p:nvSpPr>
-        <p:spPr>
-          <a:xfrm>
-            <a:off x="4370832" y="3364992"/>
-            <a:ext cx="1645920" cy="475488"/>
+          <p:cNvPr id="31" name="Shape 29"/>
+          <p:cNvSpPr/>
+          <p:nvPr/>
+        </p:nvSpPr>
+        <p:spPr>
+          <a:xfrm>
+            <a:off x="3279648" y="3364992"/>
+            <a:ext cx="1225296" cy="475488"/>
           </a:xfrm>
           <a:prstGeom prst="rect">
             <a:avLst>
@@ -33262,14 +31903,14 @@
       </p:sp>
       <p:sp>
         <p:nvSpPr>
-          <p:cNvPr id="33" name="Text 31"/>
-          <p:cNvSpPr/>
-          <p:nvPr/>
-        </p:nvSpPr>
-        <p:spPr>
-          <a:xfrm>
-            <a:off x="4370832" y="3364992"/>
-            <a:ext cx="1645920" cy="475488"/>
+          <p:cNvPr id="32" name="Text 30"/>
+          <p:cNvSpPr/>
+          <p:nvPr/>
+        </p:nvSpPr>
+        <p:spPr>
+          <a:xfrm>
+            <a:off x="3279648" y="3364992"/>
+            <a:ext cx="1225296" cy="475488"/>
           </a:xfrm>
           <a:prstGeom prst="rect">
             <a:avLst/>
@@ -33293,7 +31934,7 @@
                 <a:ea typeface="Trebuchet MS" pitchFamily="34" charset="-122"/>
                 <a:cs typeface="Trebuchet MS" pitchFamily="34" charset="-120"/>
               </a:rPr>
-              <a:t>pack</a:t>
+              <a:t>com</a:t>
             </a:r>
             <a:endParaRPr lang="en-US" sz="1400" dirty="0"/>
           </a:p>
@@ -33301,14 +31942,14 @@
       </p:sp>
       <p:sp>
         <p:nvSpPr>
-          <p:cNvPr id="34" name="Text 32"/>
-          <p:cNvSpPr/>
-          <p:nvPr/>
-        </p:nvSpPr>
-        <p:spPr>
-          <a:xfrm>
-            <a:off x="6016752" y="3364992"/>
-            <a:ext cx="411480" cy="475488"/>
+          <p:cNvPr id="33" name="Text 31"/>
+          <p:cNvSpPr/>
+          <p:nvPr/>
+        </p:nvSpPr>
+        <p:spPr>
+          <a:xfrm>
+            <a:off x="4504944" y="3364992"/>
+            <a:ext cx="76200" cy="475488"/>
           </a:xfrm>
           <a:prstGeom prst="rect">
             <a:avLst/>
@@ -33340,14 +31981,14 @@
       </p:sp>
       <p:sp>
         <p:nvSpPr>
-          <p:cNvPr id="35" name="Shape 33"/>
-          <p:cNvSpPr/>
-          <p:nvPr/>
-        </p:nvSpPr>
-        <p:spPr>
-          <a:xfrm>
-            <a:off x="6428232" y="3364992"/>
-            <a:ext cx="1645920" cy="475488"/>
+          <p:cNvPr id="34" name="Shape 32"/>
+          <p:cNvSpPr/>
+          <p:nvPr/>
+        </p:nvSpPr>
+        <p:spPr>
+          <a:xfrm>
+            <a:off x="4581144" y="3364992"/>
+            <a:ext cx="1225296" cy="475488"/>
           </a:xfrm>
           <a:prstGeom prst="rect">
             <a:avLst>
@@ -33367,14 +32008,14 @@
       </p:sp>
       <p:sp>
         <p:nvSpPr>
-          <p:cNvPr id="36" name="Text 34"/>
-          <p:cNvSpPr/>
-          <p:nvPr/>
-        </p:nvSpPr>
-        <p:spPr>
-          <a:xfrm>
-            <a:off x="6428232" y="3364992"/>
-            <a:ext cx="1645920" cy="475488"/>
+          <p:cNvPr id="35" name="Text 33"/>
+          <p:cNvSpPr/>
+          <p:nvPr/>
+        </p:nvSpPr>
+        <p:spPr>
+          <a:xfrm>
+            <a:off x="4581144" y="3364992"/>
+            <a:ext cx="1225296" cy="475488"/>
           </a:xfrm>
           <a:prstGeom prst="rect">
             <a:avLst/>
@@ -33398,7 +32039,7 @@
                 <a:ea typeface="Trebuchet MS" pitchFamily="34" charset="-122"/>
                 <a:cs typeface="Trebuchet MS" pitchFamily="34" charset="-120"/>
               </a:rPr>
-              <a:t>ing</a:t>
+              <a:t>for</a:t>
             </a:r>
             <a:endParaRPr lang="en-US" sz="1400" dirty="0"/>
           </a:p>
@@ -33406,7 +32047,217 @@
       </p:sp>
       <p:sp>
         <p:nvSpPr>
+          <p:cNvPr id="36" name="Text 34"/>
+          <p:cNvSpPr/>
+          <p:nvPr/>
+        </p:nvSpPr>
+        <p:spPr>
+          <a:xfrm>
+            <a:off x="5806440" y="3364992"/>
+            <a:ext cx="76200" cy="475488"/>
+          </a:xfrm>
+          <a:prstGeom prst="rect">
+            <a:avLst/>
+          </a:prstGeom>
+          <a:noFill/>
+          <a:ln/>
+        </p:spPr>
+        <p:txBody>
+          <a:bodyPr wrap="square" lIns="0" tIns="0" rIns="0" bIns="0" rtlCol="0" anchor="ctr"/>
+          <a:lstStyle/>
+          <a:p>
+            <a:pPr algn="ctr" indent="0" marL="0">
+              <a:buNone/>
+            </a:pPr>
+            <a:r>
+              <a:rPr lang="en-US" sz="1600" b="1" dirty="0">
+                <a:solidFill>
+                  <a:srgbClr val="0D9488"/>
+                </a:solidFill>
+                <a:latin typeface="Trebuchet MS" pitchFamily="34" charset="0"/>
+                <a:ea typeface="Trebuchet MS" pitchFamily="34" charset="-122"/>
+                <a:cs typeface="Trebuchet MS" pitchFamily="34" charset="-120"/>
+              </a:rPr>
+              <a:t>·</a:t>
+            </a:r>
+            <a:endParaRPr lang="en-US" sz="1600" dirty="0"/>
+          </a:p>
+        </p:txBody>
+      </p:sp>
+      <p:sp>
+        <p:nvSpPr>
           <p:cNvPr id="37" name="Shape 35"/>
+          <p:cNvSpPr/>
+          <p:nvPr/>
+        </p:nvSpPr>
+        <p:spPr>
+          <a:xfrm>
+            <a:off x="5882640" y="3364992"/>
+            <a:ext cx="1225296" cy="475488"/>
+          </a:xfrm>
+          <a:prstGeom prst="rect">
+            <a:avLst>
+              <a:gd name="adj" fmla="val 9615"/>
+            </a:avLst>
+          </a:prstGeom>
+          <a:solidFill>
+            <a:srgbClr val="FFFFFF"/>
+          </a:solidFill>
+          <a:ln w="12700">
+            <a:solidFill>
+              <a:srgbClr val="0D9488"/>
+            </a:solidFill>
+            <a:prstDash val="solid"/>
+          </a:ln>
+        </p:spPr>
+      </p:sp>
+      <p:sp>
+        <p:nvSpPr>
+          <p:cNvPr id="38" name="Text 36"/>
+          <p:cNvSpPr/>
+          <p:nvPr/>
+        </p:nvSpPr>
+        <p:spPr>
+          <a:xfrm>
+            <a:off x="5882640" y="3364992"/>
+            <a:ext cx="1225296" cy="475488"/>
+          </a:xfrm>
+          <a:prstGeom prst="rect">
+            <a:avLst/>
+          </a:prstGeom>
+          <a:noFill/>
+          <a:ln/>
+        </p:spPr>
+        <p:txBody>
+          <a:bodyPr wrap="square" lIns="0" tIns="0" rIns="0" bIns="0" rtlCol="0" anchor="ctr"/>
+          <a:lstStyle/>
+          <a:p>
+            <a:pPr algn="ctr" indent="0" marL="0">
+              <a:buNone/>
+            </a:pPr>
+            <a:r>
+              <a:rPr lang="en-US" sz="1400" b="1" dirty="0">
+                <a:solidFill>
+                  <a:srgbClr val="0D9488"/>
+                </a:solidFill>
+                <a:latin typeface="Trebuchet MS" pitchFamily="34" charset="0"/>
+                <a:ea typeface="Trebuchet MS" pitchFamily="34" charset="-122"/>
+                <a:cs typeface="Trebuchet MS" pitchFamily="34" charset="-120"/>
+              </a:rPr>
+              <a:t>ta</a:t>
+            </a:r>
+            <a:endParaRPr lang="en-US" sz="1400" dirty="0"/>
+          </a:p>
+        </p:txBody>
+      </p:sp>
+      <p:sp>
+        <p:nvSpPr>
+          <p:cNvPr id="39" name="Text 37"/>
+          <p:cNvSpPr/>
+          <p:nvPr/>
+        </p:nvSpPr>
+        <p:spPr>
+          <a:xfrm>
+            <a:off x="7107936" y="3364992"/>
+            <a:ext cx="76200" cy="475488"/>
+          </a:xfrm>
+          <a:prstGeom prst="rect">
+            <a:avLst/>
+          </a:prstGeom>
+          <a:noFill/>
+          <a:ln/>
+        </p:spPr>
+        <p:txBody>
+          <a:bodyPr wrap="square" lIns="0" tIns="0" rIns="0" bIns="0" rtlCol="0" anchor="ctr"/>
+          <a:lstStyle/>
+          <a:p>
+            <a:pPr algn="ctr" indent="0" marL="0">
+              <a:buNone/>
+            </a:pPr>
+            <a:r>
+              <a:rPr lang="en-US" sz="1600" b="1" dirty="0">
+                <a:solidFill>
+                  <a:srgbClr val="0D9488"/>
+                </a:solidFill>
+                <a:latin typeface="Trebuchet MS" pitchFamily="34" charset="0"/>
+                <a:ea typeface="Trebuchet MS" pitchFamily="34" charset="-122"/>
+                <a:cs typeface="Trebuchet MS" pitchFamily="34" charset="-120"/>
+              </a:rPr>
+              <a:t>·</a:t>
+            </a:r>
+            <a:endParaRPr lang="en-US" sz="1600" dirty="0"/>
+          </a:p>
+        </p:txBody>
+      </p:sp>
+      <p:sp>
+        <p:nvSpPr>
+          <p:cNvPr id="40" name="Shape 38"/>
+          <p:cNvSpPr/>
+          <p:nvPr/>
+        </p:nvSpPr>
+        <p:spPr>
+          <a:xfrm>
+            <a:off x="7184136" y="3364992"/>
+            <a:ext cx="1225296" cy="475488"/>
+          </a:xfrm>
+          <a:prstGeom prst="rect">
+            <a:avLst>
+              <a:gd name="adj" fmla="val 9615"/>
+            </a:avLst>
+          </a:prstGeom>
+          <a:solidFill>
+            <a:srgbClr val="FFFFFF"/>
+          </a:solidFill>
+          <a:ln w="12700">
+            <a:solidFill>
+              <a:srgbClr val="0D9488"/>
+            </a:solidFill>
+            <a:prstDash val="solid"/>
+          </a:ln>
+        </p:spPr>
+      </p:sp>
+      <p:sp>
+        <p:nvSpPr>
+          <p:cNvPr id="41" name="Text 39"/>
+          <p:cNvSpPr/>
+          <p:nvPr/>
+        </p:nvSpPr>
+        <p:spPr>
+          <a:xfrm>
+            <a:off x="7184136" y="3364992"/>
+            <a:ext cx="1225296" cy="475488"/>
+          </a:xfrm>
+          <a:prstGeom prst="rect">
+            <a:avLst/>
+          </a:prstGeom>
+          <a:noFill/>
+          <a:ln/>
+        </p:spPr>
+        <p:txBody>
+          <a:bodyPr wrap="square" lIns="0" tIns="0" rIns="0" bIns="0" rtlCol="0" anchor="ctr"/>
+          <a:lstStyle/>
+          <a:p>
+            <a:pPr algn="ctr" indent="0" marL="0">
+              <a:buNone/>
+            </a:pPr>
+            <a:r>
+              <a:rPr lang="en-US" sz="1400" b="1" dirty="0">
+                <a:solidFill>
+                  <a:srgbClr val="0D9488"/>
+                </a:solidFill>
+                <a:latin typeface="Trebuchet MS" pitchFamily="34" charset="0"/>
+                <a:ea typeface="Trebuchet MS" pitchFamily="34" charset="-122"/>
+                <a:cs typeface="Trebuchet MS" pitchFamily="34" charset="-120"/>
+              </a:rPr>
+              <a:t>ble</a:t>
+            </a:r>
+            <a:endParaRPr lang="en-US" sz="1400" dirty="0"/>
+          </a:p>
+        </p:txBody>
+      </p:sp>
+      <p:sp>
+        <p:nvSpPr>
+          <p:cNvPr id="42" name="Shape 40"/>
           <p:cNvSpPr/>
           <p:nvPr/>
         </p:nvSpPr>
@@ -33433,7 +32284,7 @@
       </p:sp>
       <p:sp>
         <p:nvSpPr>
-          <p:cNvPr id="38" name="Text 36"/>
+          <p:cNvPr id="43" name="Text 41"/>
           <p:cNvSpPr/>
           <p:nvPr/>
         </p:nvSpPr>
@@ -33472,7 +32323,7 @@
       </p:sp>
       <p:sp>
         <p:nvSpPr>
-          <p:cNvPr id="39" name="Shape 37"/>
+          <p:cNvPr id="44" name="Shape 42"/>
           <p:cNvSpPr/>
           <p:nvPr/>
         </p:nvSpPr>
@@ -33499,14 +32350,14 @@
       </p:sp>
       <p:sp>
         <p:nvSpPr>
-          <p:cNvPr id="40" name="Shape 38"/>
-          <p:cNvSpPr/>
-          <p:nvPr/>
-        </p:nvSpPr>
-        <p:spPr>
-          <a:xfrm>
-            <a:off x="2124837" y="4169664"/>
-            <a:ext cx="685800" cy="475488"/>
+          <p:cNvPr id="45" name="Shape 43"/>
+          <p:cNvSpPr/>
+          <p:nvPr/>
+        </p:nvSpPr>
+        <p:spPr>
+          <a:xfrm>
+            <a:off x="1952244" y="4169664"/>
+            <a:ext cx="543652" cy="475488"/>
           </a:xfrm>
           <a:prstGeom prst="rect">
             <a:avLst>
@@ -33526,14 +32377,14 @@
       </p:sp>
       <p:sp>
         <p:nvSpPr>
-          <p:cNvPr id="41" name="Text 39"/>
-          <p:cNvSpPr/>
-          <p:nvPr/>
-        </p:nvSpPr>
-        <p:spPr>
-          <a:xfrm>
-            <a:off x="2124837" y="4169664"/>
-            <a:ext cx="685800" cy="475488"/>
+          <p:cNvPr id="46" name="Text 44"/>
+          <p:cNvSpPr/>
+          <p:nvPr/>
+        </p:nvSpPr>
+        <p:spPr>
+          <a:xfrm>
+            <a:off x="1952244" y="4169664"/>
+            <a:ext cx="543652" cy="475488"/>
           </a:xfrm>
           <a:prstGeom prst="rect">
             <a:avLst/>
@@ -33565,14 +32416,14 @@
       </p:sp>
       <p:sp>
         <p:nvSpPr>
-          <p:cNvPr id="42" name="Shape 40"/>
-          <p:cNvSpPr/>
-          <p:nvPr/>
-        </p:nvSpPr>
-        <p:spPr>
-          <a:xfrm>
-            <a:off x="3033522" y="4169664"/>
-            <a:ext cx="685800" cy="475488"/>
+          <p:cNvPr id="47" name="Shape 45"/>
+          <p:cNvSpPr/>
+          <p:nvPr/>
+        </p:nvSpPr>
+        <p:spPr>
+          <a:xfrm>
+            <a:off x="2546188" y="4169664"/>
+            <a:ext cx="543652" cy="475488"/>
           </a:xfrm>
           <a:prstGeom prst="rect">
             <a:avLst>
@@ -33592,14 +32443,14 @@
       </p:sp>
       <p:sp>
         <p:nvSpPr>
-          <p:cNvPr id="43" name="Text 41"/>
-          <p:cNvSpPr/>
-          <p:nvPr/>
-        </p:nvSpPr>
-        <p:spPr>
-          <a:xfrm>
-            <a:off x="3033522" y="4169664"/>
-            <a:ext cx="685800" cy="475488"/>
+          <p:cNvPr id="48" name="Text 46"/>
+          <p:cNvSpPr/>
+          <p:nvPr/>
+        </p:nvSpPr>
+        <p:spPr>
+          <a:xfrm>
+            <a:off x="2546188" y="4169664"/>
+            <a:ext cx="543652" cy="475488"/>
           </a:xfrm>
           <a:prstGeom prst="rect">
             <a:avLst/>
@@ -33631,14 +32482,14 @@
       </p:sp>
       <p:sp>
         <p:nvSpPr>
-          <p:cNvPr id="44" name="Shape 42"/>
-          <p:cNvSpPr/>
-          <p:nvPr/>
-        </p:nvSpPr>
-        <p:spPr>
-          <a:xfrm>
-            <a:off x="3942207" y="4169664"/>
-            <a:ext cx="685800" cy="475488"/>
+          <p:cNvPr id="49" name="Shape 47"/>
+          <p:cNvSpPr/>
+          <p:nvPr/>
+        </p:nvSpPr>
+        <p:spPr>
+          <a:xfrm>
+            <a:off x="3140133" y="4169664"/>
+            <a:ext cx="543652" cy="475488"/>
           </a:xfrm>
           <a:prstGeom prst="rect">
             <a:avLst>
@@ -33658,14 +32509,14 @@
       </p:sp>
       <p:sp>
         <p:nvSpPr>
-          <p:cNvPr id="45" name="Text 43"/>
-          <p:cNvSpPr/>
-          <p:nvPr/>
-        </p:nvSpPr>
-        <p:spPr>
-          <a:xfrm>
-            <a:off x="3942207" y="4169664"/>
-            <a:ext cx="685800" cy="475488"/>
+          <p:cNvPr id="50" name="Text 48"/>
+          <p:cNvSpPr/>
+          <p:nvPr/>
+        </p:nvSpPr>
+        <p:spPr>
+          <a:xfrm>
+            <a:off x="3140133" y="4169664"/>
+            <a:ext cx="543652" cy="475488"/>
           </a:xfrm>
           <a:prstGeom prst="rect">
             <a:avLst/>
@@ -33689,7 +32540,7 @@
                 <a:ea typeface="Trebuchet MS" pitchFamily="34" charset="-122"/>
                 <a:cs typeface="Trebuchet MS" pitchFamily="34" charset="-120"/>
               </a:rPr>
-              <a:t>p</a:t>
+              <a:t>c</a:t>
             </a:r>
             <a:endParaRPr lang="en-US" sz="900" dirty="0"/>
           </a:p>
@@ -33697,14 +32548,14 @@
       </p:sp>
       <p:sp>
         <p:nvSpPr>
-          <p:cNvPr id="46" name="Shape 44"/>
-          <p:cNvSpPr/>
-          <p:nvPr/>
-        </p:nvSpPr>
-        <p:spPr>
-          <a:xfrm>
-            <a:off x="4850892" y="4169664"/>
-            <a:ext cx="685800" cy="475488"/>
+          <p:cNvPr id="51" name="Shape 49"/>
+          <p:cNvSpPr/>
+          <p:nvPr/>
+        </p:nvSpPr>
+        <p:spPr>
+          <a:xfrm>
+            <a:off x="3734077" y="4169664"/>
+            <a:ext cx="543652" cy="475488"/>
           </a:xfrm>
           <a:prstGeom prst="rect">
             <a:avLst>
@@ -33724,14 +32575,14 @@
       </p:sp>
       <p:sp>
         <p:nvSpPr>
-          <p:cNvPr id="47" name="Text 45"/>
-          <p:cNvSpPr/>
-          <p:nvPr/>
-        </p:nvSpPr>
-        <p:spPr>
-          <a:xfrm>
-            <a:off x="4850892" y="4169664"/>
-            <a:ext cx="685800" cy="475488"/>
+          <p:cNvPr id="52" name="Text 50"/>
+          <p:cNvSpPr/>
+          <p:nvPr/>
+        </p:nvSpPr>
+        <p:spPr>
+          <a:xfrm>
+            <a:off x="3734077" y="4169664"/>
+            <a:ext cx="543652" cy="475488"/>
           </a:xfrm>
           <a:prstGeom prst="rect">
             <a:avLst/>
@@ -33755,7 +32606,7 @@
                 <a:ea typeface="Trebuchet MS" pitchFamily="34" charset="-122"/>
                 <a:cs typeface="Trebuchet MS" pitchFamily="34" charset="-120"/>
               </a:rPr>
-              <a:t>a</a:t>
+              <a:t>o</a:t>
             </a:r>
             <a:endParaRPr lang="en-US" sz="900" dirty="0"/>
           </a:p>
@@ -33763,14 +32614,14 @@
       </p:sp>
       <p:sp>
         <p:nvSpPr>
-          <p:cNvPr id="48" name="Shape 46"/>
-          <p:cNvSpPr/>
-          <p:nvPr/>
-        </p:nvSpPr>
-        <p:spPr>
-          <a:xfrm>
-            <a:off x="5759577" y="4169664"/>
-            <a:ext cx="685800" cy="475488"/>
+          <p:cNvPr id="53" name="Shape 51"/>
+          <p:cNvSpPr/>
+          <p:nvPr/>
+        </p:nvSpPr>
+        <p:spPr>
+          <a:xfrm>
+            <a:off x="4328021" y="4169664"/>
+            <a:ext cx="543652" cy="475488"/>
           </a:xfrm>
           <a:prstGeom prst="rect">
             <a:avLst>
@@ -33790,14 +32641,14 @@
       </p:sp>
       <p:sp>
         <p:nvSpPr>
-          <p:cNvPr id="49" name="Text 47"/>
-          <p:cNvSpPr/>
-          <p:nvPr/>
-        </p:nvSpPr>
-        <p:spPr>
-          <a:xfrm>
-            <a:off x="5759577" y="4169664"/>
-            <a:ext cx="685800" cy="475488"/>
+          <p:cNvPr id="54" name="Text 52"/>
+          <p:cNvSpPr/>
+          <p:nvPr/>
+        </p:nvSpPr>
+        <p:spPr>
+          <a:xfrm>
+            <a:off x="4328021" y="4169664"/>
+            <a:ext cx="543652" cy="475488"/>
           </a:xfrm>
           <a:prstGeom prst="rect">
             <a:avLst/>
@@ -33821,7 +32672,7 @@
                 <a:ea typeface="Trebuchet MS" pitchFamily="34" charset="-122"/>
                 <a:cs typeface="Trebuchet MS" pitchFamily="34" charset="-120"/>
               </a:rPr>
-              <a:t>ck</a:t>
+              <a:t>m</a:t>
             </a:r>
             <a:endParaRPr lang="en-US" sz="900" dirty="0"/>
           </a:p>
@@ -33829,14 +32680,14 @@
       </p:sp>
       <p:sp>
         <p:nvSpPr>
-          <p:cNvPr id="50" name="Shape 48"/>
-          <p:cNvSpPr/>
-          <p:nvPr/>
-        </p:nvSpPr>
-        <p:spPr>
-          <a:xfrm>
-            <a:off x="6668262" y="4169664"/>
-            <a:ext cx="685800" cy="475488"/>
+          <p:cNvPr id="55" name="Shape 53"/>
+          <p:cNvSpPr/>
+          <p:nvPr/>
+        </p:nvSpPr>
+        <p:spPr>
+          <a:xfrm>
+            <a:off x="4921966" y="4169664"/>
+            <a:ext cx="543652" cy="475488"/>
           </a:xfrm>
           <a:prstGeom prst="rect">
             <a:avLst>
@@ -33856,14 +32707,14 @@
       </p:sp>
       <p:sp>
         <p:nvSpPr>
-          <p:cNvPr id="51" name="Text 49"/>
-          <p:cNvSpPr/>
-          <p:nvPr/>
-        </p:nvSpPr>
-        <p:spPr>
-          <a:xfrm>
-            <a:off x="6668262" y="4169664"/>
-            <a:ext cx="685800" cy="475488"/>
+          <p:cNvPr id="56" name="Text 54"/>
+          <p:cNvSpPr/>
+          <p:nvPr/>
+        </p:nvSpPr>
+        <p:spPr>
+          <a:xfrm>
+            <a:off x="4921966" y="4169664"/>
+            <a:ext cx="543652" cy="475488"/>
           </a:xfrm>
           <a:prstGeom prst="rect">
             <a:avLst/>
@@ -33887,7 +32738,7 @@
                 <a:ea typeface="Trebuchet MS" pitchFamily="34" charset="-122"/>
                 <a:cs typeface="Trebuchet MS" pitchFamily="34" charset="-120"/>
               </a:rPr>
-              <a:t>i</a:t>
+              <a:t>f</a:t>
             </a:r>
             <a:endParaRPr lang="en-US" sz="900" dirty="0"/>
           </a:p>
@@ -33895,14 +32746,14 @@
       </p:sp>
       <p:sp>
         <p:nvSpPr>
-          <p:cNvPr id="52" name="Shape 50"/>
-          <p:cNvSpPr/>
-          <p:nvPr/>
-        </p:nvSpPr>
-        <p:spPr>
-          <a:xfrm>
-            <a:off x="7576947" y="4169664"/>
-            <a:ext cx="685800" cy="475488"/>
+          <p:cNvPr id="57" name="Shape 55"/>
+          <p:cNvSpPr/>
+          <p:nvPr/>
+        </p:nvSpPr>
+        <p:spPr>
+          <a:xfrm>
+            <a:off x="5515910" y="4169664"/>
+            <a:ext cx="543652" cy="475488"/>
           </a:xfrm>
           <a:prstGeom prst="rect">
             <a:avLst>
@@ -33922,14 +32773,14 @@
       </p:sp>
       <p:sp>
         <p:nvSpPr>
-          <p:cNvPr id="53" name="Text 51"/>
-          <p:cNvSpPr/>
-          <p:nvPr/>
-        </p:nvSpPr>
-        <p:spPr>
-          <a:xfrm>
-            <a:off x="7576947" y="4169664"/>
-            <a:ext cx="685800" cy="475488"/>
+          <p:cNvPr id="58" name="Text 56"/>
+          <p:cNvSpPr/>
+          <p:nvPr/>
+        </p:nvSpPr>
+        <p:spPr>
+          <a:xfrm>
+            <a:off x="5515910" y="4169664"/>
+            <a:ext cx="543652" cy="475488"/>
           </a:xfrm>
           <a:prstGeom prst="rect">
             <a:avLst/>
@@ -33953,7 +32804,271 @@
                 <a:ea typeface="Trebuchet MS" pitchFamily="34" charset="-122"/>
                 <a:cs typeface="Trebuchet MS" pitchFamily="34" charset="-120"/>
               </a:rPr>
-              <a:t>ng</a:t>
+              <a:t>or</a:t>
+            </a:r>
+            <a:endParaRPr lang="en-US" sz="900" dirty="0"/>
+          </a:p>
+        </p:txBody>
+      </p:sp>
+      <p:sp>
+        <p:nvSpPr>
+          <p:cNvPr id="59" name="Shape 57"/>
+          <p:cNvSpPr/>
+          <p:nvPr/>
+        </p:nvSpPr>
+        <p:spPr>
+          <a:xfrm>
+            <a:off x="6109855" y="4169664"/>
+            <a:ext cx="543652" cy="475488"/>
+          </a:xfrm>
+          <a:prstGeom prst="rect">
+            <a:avLst>
+              <a:gd name="adj" fmla="val 7692"/>
+            </a:avLst>
+          </a:prstGeom>
+          <a:solidFill>
+            <a:srgbClr val="FFFFFF"/>
+          </a:solidFill>
+          <a:ln w="12700">
+            <a:solidFill>
+              <a:srgbClr val="DB2777"/>
+            </a:solidFill>
+            <a:prstDash val="solid"/>
+          </a:ln>
+        </p:spPr>
+      </p:sp>
+      <p:sp>
+        <p:nvSpPr>
+          <p:cNvPr id="60" name="Text 58"/>
+          <p:cNvSpPr/>
+          <p:nvPr/>
+        </p:nvSpPr>
+        <p:spPr>
+          <a:xfrm>
+            <a:off x="6109855" y="4169664"/>
+            <a:ext cx="543652" cy="475488"/>
+          </a:xfrm>
+          <a:prstGeom prst="rect">
+            <a:avLst/>
+          </a:prstGeom>
+          <a:noFill/>
+          <a:ln/>
+        </p:spPr>
+        <p:txBody>
+          <a:bodyPr wrap="square" lIns="0" tIns="0" rIns="0" bIns="0" rtlCol="0" anchor="ctr"/>
+          <a:lstStyle/>
+          <a:p>
+            <a:pPr algn="ctr" indent="0" marL="0">
+              <a:buNone/>
+            </a:pPr>
+            <a:r>
+              <a:rPr lang="en-US" sz="900" b="1" dirty="0">
+                <a:solidFill>
+                  <a:srgbClr val="9D174D"/>
+                </a:solidFill>
+                <a:latin typeface="Trebuchet MS" pitchFamily="34" charset="0"/>
+                <a:ea typeface="Trebuchet MS" pitchFamily="34" charset="-122"/>
+                <a:cs typeface="Trebuchet MS" pitchFamily="34" charset="-120"/>
+              </a:rPr>
+              <a:t>t</a:t>
+            </a:r>
+            <a:endParaRPr lang="en-US" sz="900" dirty="0"/>
+          </a:p>
+        </p:txBody>
+      </p:sp>
+      <p:sp>
+        <p:nvSpPr>
+          <p:cNvPr id="61" name="Shape 59"/>
+          <p:cNvSpPr/>
+          <p:nvPr/>
+        </p:nvSpPr>
+        <p:spPr>
+          <a:xfrm>
+            <a:off x="6703799" y="4169664"/>
+            <a:ext cx="543652" cy="475488"/>
+          </a:xfrm>
+          <a:prstGeom prst="rect">
+            <a:avLst>
+              <a:gd name="adj" fmla="val 7692"/>
+            </a:avLst>
+          </a:prstGeom>
+          <a:solidFill>
+            <a:srgbClr val="FFFFFF"/>
+          </a:solidFill>
+          <a:ln w="12700">
+            <a:solidFill>
+              <a:srgbClr val="DB2777"/>
+            </a:solidFill>
+            <a:prstDash val="solid"/>
+          </a:ln>
+        </p:spPr>
+      </p:sp>
+      <p:sp>
+        <p:nvSpPr>
+          <p:cNvPr id="62" name="Text 60"/>
+          <p:cNvSpPr/>
+          <p:nvPr/>
+        </p:nvSpPr>
+        <p:spPr>
+          <a:xfrm>
+            <a:off x="6703799" y="4169664"/>
+            <a:ext cx="543652" cy="475488"/>
+          </a:xfrm>
+          <a:prstGeom prst="rect">
+            <a:avLst/>
+          </a:prstGeom>
+          <a:noFill/>
+          <a:ln/>
+        </p:spPr>
+        <p:txBody>
+          <a:bodyPr wrap="square" lIns="0" tIns="0" rIns="0" bIns="0" rtlCol="0" anchor="ctr"/>
+          <a:lstStyle/>
+          <a:p>
+            <a:pPr algn="ctr" indent="0" marL="0">
+              <a:buNone/>
+            </a:pPr>
+            <a:r>
+              <a:rPr lang="en-US" sz="900" b="1" dirty="0">
+                <a:solidFill>
+                  <a:srgbClr val="9D174D"/>
+                </a:solidFill>
+                <a:latin typeface="Trebuchet MS" pitchFamily="34" charset="0"/>
+                <a:ea typeface="Trebuchet MS" pitchFamily="34" charset="-122"/>
+                <a:cs typeface="Trebuchet MS" pitchFamily="34" charset="-120"/>
+              </a:rPr>
+              <a:t>a</a:t>
+            </a:r>
+            <a:endParaRPr lang="en-US" sz="900" dirty="0"/>
+          </a:p>
+        </p:txBody>
+      </p:sp>
+      <p:sp>
+        <p:nvSpPr>
+          <p:cNvPr id="63" name="Shape 61"/>
+          <p:cNvSpPr/>
+          <p:nvPr/>
+        </p:nvSpPr>
+        <p:spPr>
+          <a:xfrm>
+            <a:off x="7297743" y="4169664"/>
+            <a:ext cx="543652" cy="475488"/>
+          </a:xfrm>
+          <a:prstGeom prst="rect">
+            <a:avLst>
+              <a:gd name="adj" fmla="val 7692"/>
+            </a:avLst>
+          </a:prstGeom>
+          <a:solidFill>
+            <a:srgbClr val="FFFFFF"/>
+          </a:solidFill>
+          <a:ln w="12700">
+            <a:solidFill>
+              <a:srgbClr val="DB2777"/>
+            </a:solidFill>
+            <a:prstDash val="solid"/>
+          </a:ln>
+        </p:spPr>
+      </p:sp>
+      <p:sp>
+        <p:nvSpPr>
+          <p:cNvPr id="64" name="Text 62"/>
+          <p:cNvSpPr/>
+          <p:nvPr/>
+        </p:nvSpPr>
+        <p:spPr>
+          <a:xfrm>
+            <a:off x="7297743" y="4169664"/>
+            <a:ext cx="543652" cy="475488"/>
+          </a:xfrm>
+          <a:prstGeom prst="rect">
+            <a:avLst/>
+          </a:prstGeom>
+          <a:noFill/>
+          <a:ln/>
+        </p:spPr>
+        <p:txBody>
+          <a:bodyPr wrap="square" lIns="0" tIns="0" rIns="0" bIns="0" rtlCol="0" anchor="ctr"/>
+          <a:lstStyle/>
+          <a:p>
+            <a:pPr algn="ctr" indent="0" marL="0">
+              <a:buNone/>
+            </a:pPr>
+            <a:r>
+              <a:rPr lang="en-US" sz="900" b="1" dirty="0">
+                <a:solidFill>
+                  <a:srgbClr val="9D174D"/>
+                </a:solidFill>
+                <a:latin typeface="Trebuchet MS" pitchFamily="34" charset="0"/>
+                <a:ea typeface="Trebuchet MS" pitchFamily="34" charset="-122"/>
+                <a:cs typeface="Trebuchet MS" pitchFamily="34" charset="-120"/>
+              </a:rPr>
+              <a:t>b</a:t>
+            </a:r>
+            <a:endParaRPr lang="en-US" sz="900" dirty="0"/>
+          </a:p>
+        </p:txBody>
+      </p:sp>
+      <p:sp>
+        <p:nvSpPr>
+          <p:cNvPr id="65" name="Shape 63"/>
+          <p:cNvSpPr/>
+          <p:nvPr/>
+        </p:nvSpPr>
+        <p:spPr>
+          <a:xfrm>
+            <a:off x="7891688" y="4169664"/>
+            <a:ext cx="543652" cy="475488"/>
+          </a:xfrm>
+          <a:prstGeom prst="rect">
+            <a:avLst>
+              <a:gd name="adj" fmla="val 7692"/>
+            </a:avLst>
+          </a:prstGeom>
+          <a:solidFill>
+            <a:srgbClr val="FFFFFF"/>
+          </a:solidFill>
+          <a:ln w="12700">
+            <a:solidFill>
+              <a:srgbClr val="DB2777"/>
+            </a:solidFill>
+            <a:prstDash val="solid"/>
+          </a:ln>
+        </p:spPr>
+      </p:sp>
+      <p:sp>
+        <p:nvSpPr>
+          <p:cNvPr id="66" name="Text 64"/>
+          <p:cNvSpPr/>
+          <p:nvPr/>
+        </p:nvSpPr>
+        <p:spPr>
+          <a:xfrm>
+            <a:off x="7891688" y="4169664"/>
+            <a:ext cx="543652" cy="475488"/>
+          </a:xfrm>
+          <a:prstGeom prst="rect">
+            <a:avLst/>
+          </a:prstGeom>
+          <a:noFill/>
+          <a:ln/>
+        </p:spPr>
+        <p:txBody>
+          <a:bodyPr wrap="square" lIns="0" tIns="0" rIns="0" bIns="0" rtlCol="0" anchor="ctr"/>
+          <a:lstStyle/>
+          <a:p>
+            <a:pPr algn="ctr" indent="0" marL="0">
+              <a:buNone/>
+            </a:pPr>
+            <a:r>
+              <a:rPr lang="en-US" sz="900" b="1" dirty="0">
+                <a:solidFill>
+                  <a:srgbClr val="9D174D"/>
+                </a:solidFill>
+                <a:latin typeface="Trebuchet MS" pitchFamily="34" charset="0"/>
+                <a:ea typeface="Trebuchet MS" pitchFamily="34" charset="-122"/>
+                <a:cs typeface="Trebuchet MS" pitchFamily="34" charset="-120"/>
+              </a:rPr>
+              <a:t>le</a:t>
             </a:r>
             <a:endParaRPr lang="en-US" sz="900" dirty="0"/>
           </a:p>
@@ -35932,7 +35047,7 @@
                 <a:ea typeface="Trebuchet MS" pitchFamily="34" charset="-122"/>
                 <a:cs typeface="Trebuchet MS" pitchFamily="34" charset="-120"/>
               </a:rPr>
-              <a:t>kind</a:t>
+              <a:t>lock</a:t>
             </a:r>
             <a:endParaRPr lang="en-US" sz="1300" dirty="0"/>
           </a:p>
@@ -36085,7 +35200,7 @@
                 <a:ea typeface="Trebuchet MS" pitchFamily="34" charset="-122"/>
                 <a:cs typeface="Trebuchet MS" pitchFamily="34" charset="-120"/>
               </a:rPr>
-              <a:t>pack</a:t>
+              <a:t>kind</a:t>
             </a:r>
             <a:endParaRPr lang="en-US" sz="1300" dirty="0"/>
           </a:p>
@@ -36238,7 +35353,7 @@
                 <a:ea typeface="Trebuchet MS" pitchFamily="34" charset="-122"/>
                 <a:cs typeface="Trebuchet MS" pitchFamily="34" charset="-120"/>
               </a:rPr>
-              <a:t>cover</a:t>
+              <a:t>fair</a:t>
             </a:r>
             <a:endParaRPr lang="en-US" sz="1300" dirty="0"/>
           </a:p>
@@ -36391,7 +35506,7 @@
                 <a:ea typeface="Trebuchet MS" pitchFamily="34" charset="-122"/>
                 <a:cs typeface="Trebuchet MS" pitchFamily="34" charset="-120"/>
               </a:rPr>
-              <a:t>fair</a:t>
+              <a:t>cover</a:t>
             </a:r>
             <a:endParaRPr lang="en-US" sz="1300" dirty="0"/>
           </a:p>
@@ -36626,7 +35741,7 @@
                 <a:ea typeface="Trebuchet MS" pitchFamily="34" charset="-122"/>
                 <a:cs typeface="Trebuchet MS" pitchFamily="34" charset="-120"/>
               </a:rPr>
-              <a:t>unfair</a:t>
+              <a:t>unlock</a:t>
             </a:r>
             <a:endParaRPr lang="en-US" sz="1200" dirty="0"/>
           </a:p>
@@ -36758,7 +35873,7 @@
                 <a:ea typeface="Trebuchet MS" pitchFamily="34" charset="-122"/>
                 <a:cs typeface="Trebuchet MS" pitchFamily="34" charset="-120"/>
               </a:rPr>
-              <a:t>unpack</a:t>
+              <a:t>unfair</a:t>
             </a:r>
             <a:endParaRPr lang="en-US" sz="1200" dirty="0"/>
           </a:p>
@@ -36890,7 +36005,7 @@
                 <a:ea typeface="Trebuchet MS" pitchFamily="34" charset="-122"/>
                 <a:cs typeface="Trebuchet MS" pitchFamily="34" charset="-120"/>
               </a:rPr>
-              <a:t>unusual</a:t>
+              <a:t>unlikely</a:t>
             </a:r>
             <a:endParaRPr lang="en-US" sz="1200" dirty="0"/>
           </a:p>
@@ -36956,7 +36071,7 @@
                 <a:ea typeface="Trebuchet MS" pitchFamily="34" charset="-122"/>
                 <a:cs typeface="Trebuchet MS" pitchFamily="34" charset="-120"/>
               </a:rPr>
-              <a:t>unclear</a:t>
+              <a:t>unfinished</a:t>
             </a:r>
             <a:endParaRPr lang="en-US" sz="1200" dirty="0"/>
           </a:p>
@@ -37022,7 +36137,7 @@
                 <a:ea typeface="Trebuchet MS" pitchFamily="34" charset="-122"/>
                 <a:cs typeface="Trebuchet MS" pitchFamily="34" charset="-120"/>
               </a:rPr>
-              <a:t>unsafe</a:t>
+              <a:t>uncomfortable</a:t>
             </a:r>
             <a:endParaRPr lang="en-US" sz="1200" dirty="0"/>
           </a:p>
@@ -38210,7 +37325,7 @@
                 <a:ea typeface="Calibri" pitchFamily="34" charset="-122"/>
                 <a:cs typeface="Calibri" pitchFamily="34" charset="-120"/>
               </a:rPr>
-              <a:t>1.  The prefix 'un-' means 'not' or the opposite of something.</a:t>
+              <a:t>1.  The prefix 'un-' comes from Old English.</a:t>
             </a:r>
             <a:endParaRPr lang="en-US" sz="1300" dirty="0"/>
           </a:p>
@@ -38349,7 +37464,7 @@
                 <a:ea typeface="Calibri" pitchFamily="34" charset="-122"/>
                 <a:cs typeface="Calibri" pitchFamily="34" charset="-120"/>
               </a:rPr>
-              <a:t>2.  The word 'uncle' starts with the prefix 'un-'.</a:t>
+              <a:t>2.  Adding 'un-' to a word always makes it longer by three letters.</a:t>
             </a:r>
             <a:endParaRPr lang="en-US" sz="1300" dirty="0"/>
           </a:p>
@@ -38488,7 +37603,7 @@
                 <a:ea typeface="Calibri" pitchFamily="34" charset="-122"/>
                 <a:cs typeface="Calibri" pitchFamily="34" charset="-120"/>
               </a:rPr>
-              <a:t>3.  Adding 'un-' to 'happy' makes a word that means not happy.</a:t>
+              <a:t>3.  The prefix 'un-' can mean 'not' or the opposite of something.</a:t>
             </a:r>
             <a:endParaRPr lang="en-US" sz="1300" dirty="0"/>
           </a:p>
@@ -38627,7 +37742,7 @@
                 <a:ea typeface="Calibri" pitchFamily="34" charset="-122"/>
                 <a:cs typeface="Calibri" pitchFamily="34" charset="-120"/>
               </a:rPr>
-              <a:t>4.  'Un-' comes from Old English and has been used in English for a very long time.</a:t>
+              <a:t>4.  'Unhappy' means the same thing as 'sad' or 'not happy'.</a:t>
             </a:r>
             <a:endParaRPr lang="en-US" sz="1300" dirty="0"/>
           </a:p>
@@ -38766,7 +37881,7 @@
                 <a:ea typeface="Calibri" pitchFamily="34" charset="-122"/>
                 <a:cs typeface="Calibri" pitchFamily="34" charset="-120"/>
               </a:rPr>
-              <a:t>5.  The prefix 'un-' always makes a word mean more of something.</a:t>
+              <a:t>5.  The word 'uncle' contains the prefix 'un-' meaning 'not'.</a:t>
             </a:r>
             <a:endParaRPr lang="en-US" sz="1300" dirty="0"/>
           </a:p>
@@ -39471,7 +38586,7 @@
                 <a:ea typeface="Trebuchet MS" pitchFamily="34" charset="-122"/>
                 <a:cs typeface="Trebuchet MS" pitchFamily="34" charset="-120"/>
               </a:rPr>
-              <a:t>unfair</a:t>
+              <a:t>unlock</a:t>
             </a:r>
             <a:endParaRPr lang="en-US" sz="1300" dirty="0"/>
           </a:p>
@@ -39603,7 +38718,7 @@
                 <a:ea typeface="Trebuchet MS" pitchFamily="34" charset="-122"/>
                 <a:cs typeface="Trebuchet MS" pitchFamily="34" charset="-120"/>
               </a:rPr>
-              <a:t>unpack</a:t>
+              <a:t>unfair</a:t>
             </a:r>
             <a:endParaRPr lang="en-US" sz="1300" dirty="0"/>
           </a:p>
@@ -39735,7 +38850,7 @@
                 <a:ea typeface="Trebuchet MS" pitchFamily="34" charset="-122"/>
                 <a:cs typeface="Trebuchet MS" pitchFamily="34" charset="-120"/>
               </a:rPr>
-              <a:t>unusual</a:t>
+              <a:t>unlikely</a:t>
             </a:r>
             <a:endParaRPr lang="en-US" sz="1300" dirty="0"/>
           </a:p>
@@ -39801,7 +38916,7 @@
                 <a:ea typeface="Trebuchet MS" pitchFamily="34" charset="-122"/>
                 <a:cs typeface="Trebuchet MS" pitchFamily="34" charset="-120"/>
               </a:rPr>
-              <a:t>unclear</a:t>
+              <a:t>unfinished</a:t>
             </a:r>
             <a:endParaRPr lang="en-US" sz="1300" dirty="0"/>
           </a:p>
@@ -40611,7 +39726,7 @@
                 <a:ea typeface="Trebuchet MS" pitchFamily="34" charset="-122"/>
                 <a:cs typeface="Trebuchet MS" pitchFamily="34" charset="-120"/>
               </a:rPr>
-              <a:t>kind</a:t>
+              <a:t>lock</a:t>
             </a:r>
             <a:endParaRPr lang="en-US" sz="1300" dirty="0"/>
           </a:p>
@@ -40764,7 +39879,7 @@
                 <a:ea typeface="Trebuchet MS" pitchFamily="34" charset="-122"/>
                 <a:cs typeface="Trebuchet MS" pitchFamily="34" charset="-120"/>
               </a:rPr>
-              <a:t>pack</a:t>
+              <a:t>kind</a:t>
             </a:r>
             <a:endParaRPr lang="en-US" sz="1300" dirty="0"/>
           </a:p>
@@ -40917,7 +40032,7 @@
                 <a:ea typeface="Trebuchet MS" pitchFamily="34" charset="-122"/>
                 <a:cs typeface="Trebuchet MS" pitchFamily="34" charset="-120"/>
               </a:rPr>
-              <a:t>cover</a:t>
+              <a:t>fair</a:t>
             </a:r>
             <a:endParaRPr lang="en-US" sz="1300" dirty="0"/>
           </a:p>
@@ -41070,7 +40185,7 @@
                 <a:ea typeface="Trebuchet MS" pitchFamily="34" charset="-122"/>
                 <a:cs typeface="Trebuchet MS" pitchFamily="34" charset="-120"/>
               </a:rPr>
-              <a:t>fair</a:t>
+              <a:t>cover</a:t>
             </a:r>
             <a:endParaRPr lang="en-US" sz="1300" dirty="0"/>
           </a:p>
@@ -42045,7 +41160,7 @@
                 <a:ea typeface="Calibri" pitchFamily="34" charset="-122"/>
                 <a:cs typeface="Calibri" pitchFamily="34" charset="-120"/>
               </a:rPr>
-              <a:t>To remove a cover from something, or to find out something that was hidden.</a:t>
+              <a:t>To remove a cover and reveal what is underneath.</a:t>
             </a:r>
             <a:endParaRPr lang="en-US" sz="1200" dirty="0"/>
           </a:p>
@@ -42118,7 +41233,7 @@
                 <a:ea typeface="Trebuchet MS" pitchFamily="34" charset="-122"/>
                 <a:cs typeface="Trebuchet MS" pitchFamily="34" charset="-120"/>
               </a:rPr>
-              <a:t>unfair</a:t>
+              <a:t>unlock</a:t>
             </a:r>
             <a:endParaRPr lang="en-US" sz="1200" dirty="0"/>
           </a:p>
@@ -42184,7 +41299,7 @@
                 <a:ea typeface="Calibri" pitchFamily="34" charset="-122"/>
                 <a:cs typeface="Calibri" pitchFamily="34" charset="-120"/>
               </a:rPr>
-              <a:t>Not feeling happy or joyful; sad or upset about something.</a:t>
+              <a:t>Feeling sad or not pleased about something.</a:t>
             </a:r>
             <a:endParaRPr lang="en-US" sz="1200" dirty="0"/>
           </a:p>
@@ -42323,7 +41438,7 @@
                 <a:ea typeface="Calibri" pitchFamily="34" charset="-122"/>
                 <a:cs typeface="Calibri" pitchFamily="34" charset="-120"/>
               </a:rPr>
-              <a:t>To take things out of a bag, box, or suitcase.</a:t>
+              <a:t>Not treating everyone equally or justly.</a:t>
             </a:r>
             <a:endParaRPr lang="en-US" sz="1200" dirty="0"/>
           </a:p>
@@ -42396,7 +41511,7 @@
                 <a:ea typeface="Trebuchet MS" pitchFamily="34" charset="-122"/>
                 <a:cs typeface="Trebuchet MS" pitchFamily="34" charset="-120"/>
               </a:rPr>
-              <a:t>unpack</a:t>
+              <a:t>unfair</a:t>
             </a:r>
             <a:endParaRPr lang="en-US" sz="1200" dirty="0"/>
           </a:p>
@@ -42462,7 +41577,7 @@
                 <a:ea typeface="Calibri" pitchFamily="34" charset="-122"/>
                 <a:cs typeface="Calibri" pitchFamily="34" charset="-120"/>
               </a:rPr>
-              <a:t>Not normal or ordinary; different from what you would usually expect.</a:t>
+              <a:t>Not expected to happen; having little chance.</a:t>
             </a:r>
             <a:endParaRPr lang="en-US" sz="1200" dirty="0"/>
           </a:p>
@@ -42601,7 +41716,7 @@
                 <a:ea typeface="Calibri" pitchFamily="34" charset="-122"/>
                 <a:cs typeface="Calibri" pitchFamily="34" charset="-120"/>
               </a:rPr>
-              <a:t>Not easy to understand or see; confusing or hard to make out.</a:t>
+              <a:t>Not completed; still needing more work.</a:t>
             </a:r>
             <a:endParaRPr lang="en-US" sz="1200" dirty="0"/>
           </a:p>
@@ -42674,7 +41789,7 @@
                 <a:ea typeface="Trebuchet MS" pitchFamily="34" charset="-122"/>
                 <a:cs typeface="Trebuchet MS" pitchFamily="34" charset="-120"/>
               </a:rPr>
-              <a:t>unusual</a:t>
+              <a:t>unlikely</a:t>
             </a:r>
             <a:endParaRPr lang="en-US" sz="1200" dirty="0"/>
           </a:p>
@@ -42740,7 +41855,7 @@
                 <a:ea typeface="Calibri" pitchFamily="34" charset="-122"/>
                 <a:cs typeface="Calibri" pitchFamily="34" charset="-120"/>
               </a:rPr>
-              <a:t>Not kind or caring; behaving in a mean or hurtful way towards others.</a:t>
+              <a:t>Not being nice or gentle to others.</a:t>
             </a:r>
             <a:endParaRPr lang="en-US" sz="1200" dirty="0"/>
           </a:p>
@@ -42813,7 +41928,7 @@
                 <a:ea typeface="Trebuchet MS" pitchFamily="34" charset="-122"/>
                 <a:cs typeface="Trebuchet MS" pitchFamily="34" charset="-120"/>
               </a:rPr>
-              <a:t>unclear</a:t>
+              <a:t>unfinished</a:t>
             </a:r>
             <a:endParaRPr lang="en-US" sz="1200" dirty="0"/>
           </a:p>
@@ -42879,7 +41994,7 @@
                 <a:ea typeface="Calibri" pitchFamily="34" charset="-122"/>
                 <a:cs typeface="Calibri" pitchFamily="34" charset="-120"/>
               </a:rPr>
-              <a:t>Not fair or just; treating people in a way that is not equal or right.</a:t>
+              <a:t>To open a lock so something can be opened.</a:t>
             </a:r>
             <a:endParaRPr lang="en-US" sz="1200" dirty="0"/>
           </a:p>
@@ -43374,7 +42489,7 @@
                 <a:ea typeface="Calibri" pitchFamily="34" charset="-122"/>
                 <a:cs typeface="Calibri" pitchFamily="34" charset="-120"/>
               </a:rPr>
-              <a:t>It was unfair that only some students got extra time to finish the art project.</a:t>
+              <a:t>It is unfair to leave someone out of a game just because they are new to the school.</a:t>
             </a:r>
             <a:endParaRPr lang="en-US" sz="1500" dirty="0"/>
           </a:p>
@@ -43538,7 +42653,7 @@
                 <a:ea typeface="Calibri" pitchFamily="34" charset="-122"/>
                 <a:cs typeface="Calibri" pitchFamily="34" charset="-120"/>
               </a:rPr>
-              <a:t>Please unpack your school bag and put your reader on the desk.</a:t>
+              <a:t>The explorer had to uncover the ancient pot very carefully so it would not break.</a:t>
             </a:r>
             <a:endParaRPr lang="en-US" sz="1500" dirty="0"/>
           </a:p>
@@ -43702,7 +42817,7 @@
                 <a:ea typeface="Calibri" pitchFamily="34" charset="-122"/>
                 <a:cs typeface="Calibri" pitchFamily="34" charset="-120"/>
               </a:rPr>
-              <a:t>The instructions were so unclear that nobody knew what to do first.</a:t>
+              <a:t>Mia felt unhappy when her best friend moved to a different town.</a:t>
             </a:r>
             <a:endParaRPr lang="en-US" sz="1500" dirty="0"/>
           </a:p>
